--- a/presentaciones/Bienestar-10K-Team-Rise-Up.pptx
+++ b/presentaciones/Bienestar-10K-Team-Rise-Up.pptx
@@ -165,7 +165,7 @@
   <p:extLst>
     <p:ext uri="{521415D9-36F7-43E2-AB2F-B90AF26B5E84}">
       <p14:sectionLst xmlns:p14="http://schemas.microsoft.com/office/powerpoint/2010/main">
-        <p14:section name="Introducción" id="{c8763d53-5b04-5867-59d3-6b97be9e0c59}">
+        <p14:section name="Introducción" id="{81b42cd3-3663-3a11-7ec8-7aa50eadd4de}">
           <p14:sldIdLst>
             <p14:sldId id="256"/>
             <p14:sldId id="257"/>
@@ -174,21 +174,21 @@
             <p14:sldId id="260"/>
           </p14:sldIdLst>
         </p14:section>
-        <p14:section name="El «New Rich»" id="{209a2f0e-ae7b-848c-d51a-254b58a5b981}">
+        <p14:section name="El «New Rich»" id="{b19bf721-dc2d-183f-53cd-3a0e3ab0f4fc}">
           <p14:sldIdLst>
             <p14:sldId id="261"/>
             <p14:sldId id="262"/>
             <p14:sldId id="263"/>
           </p14:sldIdLst>
         </p14:section>
-        <p14:section name="Quiénes somos" id="{d76ab0d8-3ec3-4e4b-98bb-41a85b6fdd4e}">
+        <p14:section name="Quiénes somos" id="{0931d529-4e19-5592-ac2d-32d6a5aedd35}">
           <p14:sldIdLst>
             <p14:sldId id="264"/>
             <p14:sldId id="265"/>
             <p14:sldId id="266"/>
           </p14:sldIdLst>
         </p14:section>
-        <p14:section name="Crisis de salud" id="{70da5aab-1f00-afcf-2e04-cca3bf705328}">
+        <p14:section name="Crisis de salud" id="{95f4e73f-d21b-47d2-0752-092af3133a89}">
           <p14:sldIdLst>
             <p14:sldId id="267"/>
             <p14:sldId id="268"/>
@@ -199,7 +199,7 @@
             <p14:sldId id="273"/>
           </p14:sldIdLst>
         </p14:section>
-        <p14:section name="La solución" id="{1bf42ff0-2df8-7d74-44e8-d99bc2ca2bbd}">
+        <p14:section name="La solución" id="{64bceef7-faf9-32fc-f7a1-5acf21f541da}">
           <p14:sldIdLst>
             <p14:sldId id="274"/>
             <p14:sldId id="275"/>
@@ -213,7 +213,7 @@
             <p14:sldId id="283"/>
           </p14:sldIdLst>
         </p14:section>
-        <p14:section name="Crisis financiera" id="{a7615754-6598-3824-c420-d90a846bc912}">
+        <p14:section name="Crisis financiera" id="{0877ab1e-10fe-34ee-805a-885a1def6cc2}">
           <p14:sldIdLst>
             <p14:sldId id="284"/>
             <p14:sldId id="285"/>
@@ -229,7 +229,7 @@
             <p14:sldId id="295"/>
           </p14:sldIdLst>
         </p14:section>
-        <p14:section name="Cómo hacerlo" id="{0da60da3-2027-26aa-e45e-548d2a209313}">
+        <p14:section name="Cómo hacerlo" id="{98bc3657-3541-6a3b-73f8-0fa49300b327}">
           <p14:sldIdLst>
             <p14:sldId id="296"/>
             <p14:sldId id="297"/>
@@ -240,7 +240,7 @@
             <p14:sldId id="302"/>
           </p14:sldIdLst>
         </p14:section>
-        <p14:section name="La oferta" id="{a1eda040-95eb-e5d0-b76e-fedcb1553699}">
+        <p14:section name="La oferta" id="{e5950341-7173-0c6a-6acd-9205080ddf72}">
           <p14:sldIdLst>
             <p14:sldId id="303"/>
             <p14:sldId id="304"/>
@@ -255,7 +255,7 @@
             <p14:sldId id="313"/>
           </p14:sldIdLst>
         </p14:section>
-        <p14:section name="Cierre" id="{b4fe007c-66cb-eb2d-b2ac-50228f18755d}">
+        <p14:section name="Cierre" id="{1a7a511e-fcd8-bb69-a907-1cc684189a18}">
           <p14:sldIdLst>
             <p14:sldId id="314"/>
           </p14:sldIdLst>
@@ -1382,7 +1382,7 @@
           <a:p>
             <a:r>
               <a:rPr lang="en-US" dirty="0"/>
-              <a:t/>
+              <a:t>[0:00–5:00] Carly da la bienvenida (más de 600 inscritos) y pide que digan desde dónde se conectan. Aclara que no hay presión: el objetivo es escuchar y ver si esto encaja contigo. Duración: 90 minutos, con más de $550 en premios en efectivo al final para quien se quede. Pide escuchar «como si hubieras pagado $5.000» por estar aquí.</a:t>
             </a:r>
             <a:endParaRPr lang="en-US" dirty="0"/>
           </a:p>
@@ -1470,7 +1470,7 @@
           <a:p>
             <a:r>
               <a:rPr lang="en-US" dirty="0"/>
-              <a:t/>
+              <a:t>[22:55–24:35] Esta pequeña comunidad generó más de $5M en ventas el último año, y $2.8M fueron comisiones para sus miembros. Ejemplos: Ali depositó $3.100 en cheques; Kate empezó para ayudar a su hijo con problemas intestinales; Ellen, mamá homeschool de 7 con un bebé de 3 meses, tuvo su primer mes de $9.000 a los 5 meses; Joya, superviviente de cáncer dos veces, empezó solo por beber el agua.</a:t>
             </a:r>
             <a:endParaRPr lang="en-US" dirty="0"/>
           </a:p>
@@ -1558,7 +1558,7 @@
           <a:p>
             <a:r>
               <a:rPr lang="en-US" dirty="0"/>
-              <a:t/>
+              <a:t>[24:35–25:00] Resolvemos dos cosas: la crisis de salud (la base de una salud duradera que casi nadie mira: el agua) y la crisis financiera (estabilidad financiera e ingreso de legado para tus hijos).</a:t>
             </a:r>
             <a:endParaRPr lang="en-US" dirty="0"/>
           </a:p>
@@ -1646,7 +1646,7 @@
           <a:p>
             <a:r>
               <a:rPr lang="en-US" dirty="0"/>
-              <a:t/>
+              <a:t>[25:00–26:15] Michelle se presenta: enfermera formada en medicina occidental, ahora holística, mamá de 4. En la escuela de enfermería nunca le enseñaron que la hidratación es la base de la salud. Tras su 4.º bebé decidió no volver al hospital; se mudó, encontró este negocio y ha generado más de $200K en dos años.</a:t>
             </a:r>
             <a:endParaRPr lang="en-US" dirty="0"/>
           </a:p>
@@ -1734,7 +1734,7 @@
           <a:p>
             <a:r>
               <a:rPr lang="en-US" dirty="0"/>
-              <a:t/>
+              <a:t>[26:15–26:40] El cuerpo humano es más de un 70% agua y el cerebro un 75%. Si queremos resolver una crisis de salud sin mirar el agua que bebemos, nos estamos perdiendo algo.</a:t>
             </a:r>
             <a:endParaRPr lang="en-US" dirty="0"/>
           </a:p>
@@ -1822,7 +1822,7 @@
           <a:p>
             <a:r>
               <a:rPr lang="en-US" dirty="0"/>
-              <a:t/>
+              <a:t>[26:40–27:55] La EPA ha identificado más de 80 contaminantes regulados en el agua del grifo: fármacos, plomo, hormonas, patógenos, aluminio, microplásticos, bacterias… Aunque no la bebas, la usas al comer fuera, al ducharte o al bañar a tus hijos. En EE. UU. puedes consultar tu código postal en ewg.org/tapwater. Dato citado: 1 de cada 2 hombres y 1 de cada 3 mujeres serán diagnosticados de cáncer.</a:t>
             </a:r>
             <a:endParaRPr lang="en-US" dirty="0"/>
           </a:p>
@@ -1910,7 +1910,7 @@
           <a:p>
             <a:r>
               <a:rPr lang="en-US" dirty="0"/>
-              <a:t/>
+              <a:t>[27:55–29:35] Ósmosis inversa: muy limpia pero sin minerales («agua limpia pero muerta»); recomiendan remineralizarla y activarla. Filtros de gravedad: Michelle cuenta que con su filtro su familia seguía enfermando cíclicamente y un análisis mostró plomo cuyo origen era el propio filtro. Ahí encontró el producto y empezó el negocio.</a:t>
             </a:r>
             <a:endParaRPr lang="en-US" dirty="0"/>
           </a:p>
@@ -1998,7 +1998,7 @@
           <a:p>
             <a:r>
               <a:rPr lang="en-US" dirty="0"/>
-              <a:t/>
+              <a:t>[29:35–30:25] El agua embotellada y las bebidas en lata suelen contener microplásticos, descritos como neurotoxinas, carcinógenos y disruptores endocrinos. Media de 325 partículas de plástico por litro. Michelle cuenta que su cuarto hijo tuvo problemas respiratorios que ella relaciona con microplásticos.</a:t>
             </a:r>
             <a:endParaRPr lang="en-US" dirty="0"/>
           </a:p>
@@ -2086,7 +2086,7 @@
           <a:p>
             <a:r>
               <a:rPr lang="en-US" dirty="0"/>
-              <a:t/>
+              <a:t>[30:25–30:50] Además, el agua embotellada cuesta unas 3.000 veces más por galón que la del grifo. Comparativa a 15 años: un ionizador (~$5.890) frente a $29K–38K en agua embotellada de marca.</a:t>
             </a:r>
             <a:endParaRPr lang="en-US" dirty="0"/>
           </a:p>
@@ -2174,7 +2174,7 @@
           <a:p>
             <a:r>
               <a:rPr lang="en-US" dirty="0"/>
-              <a:t/>
+              <a:t>[30:50–31:40] Anna cuenta la ironía: entró por el negocio, no por el agua. Tenía una lesión del manguito rotador; tras un año de remedios y esteroides iba a operarse. A las 6 semanas de beber el agua, dice, desapareció la inflamación, recuperó la movilidad y no necesitó cirugía. Lleva un cuarto de millón de dólares en dos años con el negocio.</a:t>
             </a:r>
             <a:endParaRPr lang="en-US" dirty="0"/>
           </a:p>
@@ -2262,7 +2262,7 @@
           <a:p>
             <a:r>
               <a:rPr lang="en-US" dirty="0"/>
-              <a:t/>
+              <a:t>[31:40–32:55] El ionizador de grado médico produce agua con hidrógeno molecular mediante electrólisis. Se afirma que hay estudios en más de 170 enfermedades. Se fabrican a mano en Japón, inspirados en el agua de las «zonas azules». Hace 7 tipos de agua con 85 usos y sustituye productos de limpieza: lejía, detergente, quitamanchas, desmaquillante, limpiador de verduras…</a:t>
             </a:r>
             <a:endParaRPr lang="en-US" dirty="0"/>
           </a:p>
@@ -2350,7 +2350,7 @@
           <a:p>
             <a:r>
               <a:rPr lang="en-US" dirty="0"/>
-              <a:t/>
+              <a:t>[8:20–9:35] Presentación de las ponentes. Carly conoció el producto en una clínica oncológica integrativa durante su proceso de cáncer y ha generado más de $2M en 4 años. Shannon: mamá homeschool, $100K en su primer año. Iulia: exmaestra, mes de $34K a los 5 meses. Lynn: nido vacío, $26K en sus 2 primeros meses (recuperó su inversión). Michelle: enfermera convertida en sanadora holística, mamá de 4, $140K en 20 meses. Aubrey: ex empleada corporativa, $13K en su 4.º mes. Anna: ex ejecutiva de marketing.</a:t>
             </a:r>
             <a:endParaRPr lang="en-US" dirty="0"/>
           </a:p>
@@ -2438,7 +2438,7 @@
           <a:p>
             <a:r>
               <a:rPr lang="en-US" dirty="0"/>
-              <a:t/>
+              <a:t>[32:55–33:20] Pregunta típica: «¿no tiene ya hidrógeno el agua?». No: en H₂O el hidrógeno no está accesible. La electrólisis separa hidrógeno y oxígeno; dos átomos de hidrógeno se unen y forman H₂ (hidrógeno molecular), que queda disuelto en el agua.</a:t>
             </a:r>
             <a:endParaRPr lang="en-US" dirty="0"/>
           </a:p>
@@ -2526,7 +2526,7 @@
           <a:p>
             <a:r>
               <a:rPr lang="en-US" dirty="0"/>
-              <a:t/>
+              <a:t>[33:20–34:10] Cinco cualidades del agua: rica en antioxidantes, absorción rápida (dicen que hidrata y elimina toxinas 6–10 veces más rápido), alcalina, ORP negativo y rica en hidrógeno molecular. Resultado: protección frente al estrés oxidativo, más energía y menos niebla mental.</a:t>
             </a:r>
             <a:endParaRPr lang="en-US" dirty="0"/>
           </a:p>
@@ -2614,7 +2614,7 @@
           <a:p>
             <a:r>
               <a:rPr lang="en-US" dirty="0"/>
-              <a:t/>
+              <a:t>[34:10–35:00] «No es el agua, es el hidrógeno del agua». El H₂ es la molécula más pequeña (primer elemento de la tabla periódica); como gas penetra en células, mitocondrias y ADN. Se presenta como antioxidante, antiinflamatorio, antienvejecimiento, antidiabético y antitumoral.</a:t>
             </a:r>
             <a:endParaRPr lang="en-US" dirty="0"/>
           </a:p>
@@ -2702,7 +2702,7 @@
           <a:p>
             <a:r>
               <a:rPr lang="en-US" dirty="0"/>
-              <a:t/>
+              <a:t>[35:00–35:50] El estrés oxidativo es un desequilibrio entre radicales libres y antioxidantes. Los radicales libres son moléculas inestables que «roban» a las células sanas y las dañan. Los antioxidantes como el hidrógeno frenan esa reacción en cadena.</a:t>
             </a:r>
             <a:endParaRPr lang="en-US" dirty="0"/>
           </a:p>
@@ -2790,7 +2790,7 @@
           <a:p>
             <a:r>
               <a:rPr lang="en-US" dirty="0"/>
-              <a:t/>
+              <a:t>[35:50–36:15] ¿Qué causa radicales libres? «Vivir en el mundo moderno»: comida, azúcar, toxinas, contaminación, agua embotellada y del grifo… «No es para dar miedo: el conocimiento es poder». Datos citados: un radical libre puede dañar 2 millones de células en un minuto; cada célula recibe 15.000 ataques al día.</a:t>
             </a:r>
             <a:endParaRPr lang="en-US" dirty="0"/>
           </a:p>
@@ -2878,7 +2878,7 @@
           <a:p>
             <a:r>
               <a:rPr lang="en-US" dirty="0"/>
-              <a:t/>
+              <a:t>[36:15–37:05] El hidrógeno es un antioxidante selectivo: busca los radicales más dañinos. Activa la vía Nrf2, que hace que las células produzcan más glutatión. Se afirma que reduce el estrés oxidativo y los radicales libres un 70%.</a:t>
             </a:r>
             <a:endParaRPr lang="en-US" dirty="0"/>
           </a:p>
@@ -2966,7 +2966,7 @@
           <a:p>
             <a:r>
               <a:rPr lang="en-US" dirty="0"/>
-              <a:t/>
+              <a:t>[37:05–38:45] Testimonios: erupción cutánea tras intoxicación que no mejoraba con dermatólogos ni esteroides y que, según cuenta, se fue en dos semanas; inflamación por celiaquía; el marido de una compañera con dolor de rodilla (tomaba narcóticos), migrañas y pérdida de peso; una atleta con estreñimiento que dejó su inhalador; una señora que dejó su medicación en un mes. Recordatorio: son testimonios, no evidencia médica. Para investigar: «electrolyzed reduced water», «molecular hydrogen», Molecular Hydrogen Institute. Botellas y pastillas de hidrógeno: el hidrógeno dura 10–20 min frente a 48–72 h del ionizador, y la batería dura 300–500 ciclos.</a:t>
             </a:r>
             <a:endParaRPr lang="en-US" dirty="0"/>
           </a:p>
@@ -3054,7 +3054,7 @@
           <a:p>
             <a:r>
               <a:rPr lang="en-US" dirty="0"/>
-              <a:t/>
+              <a:t>[40:25–42:05] La prevención es la mejor cura: el infarto a los 50 empezó a los 20; el alzhéimer a los 70, a los 40; el cáncer a los 60, a los 30. No enfermamos de un día para otro. Testimonios: Stephanie dejó sus recetas tras 6 meses; a Lois le bajó el LDL 43 puntos en 3 semanas; Dana mejoró alergias e intestino irritable en 4 semanas.</a:t>
             </a:r>
             <a:endParaRPr lang="en-US" dirty="0"/>
           </a:p>
@@ -3142,7 +3142,7 @@
           <a:p>
             <a:r>
               <a:rPr lang="en-US" dirty="0"/>
-              <a:t/>
+              <a:t>[42:05–43:20] Otros productos: Anespa convierte la ducha en un spa mineral y filtra cloro y bacterias (dicen que en 10 minutos de ducha el cuerpo absorbe unos 8 vasos de agua). Ukon: cúrcuma silvestre de Okinawa (zona azul) en cápsulas, té y jabón. Kangen Beauté: nueva línea coreana de cuidado de la piel con Ukon y agua de pH 5,5.</a:t>
             </a:r>
             <a:endParaRPr lang="en-US" dirty="0"/>
           </a:p>
@@ -3230,7 +3230,7 @@
           <a:p>
             <a:r>
               <a:rPr lang="en-US" dirty="0"/>
-              <a:t/>
+              <a:t>[43:20–45:50] Lynn: hace poco estaba viendo esta misma clase. Con su hija pequeña entrando en el último año de instituto, se preguntó cuál sería su siguiente etapa. La piel de su hijo reaccionaba al agua (con arsénico). Hizo el proceso de descubrimiento con su marido, empezó con el Quad, pasó al Legacy y en sus primeras 7 semanas generó más de $26.000 en comisiones. También cuenta mejoras en piel, energía y niebla mental.</a:t>
             </a:r>
             <a:endParaRPr lang="en-US" dirty="0"/>
           </a:p>
@@ -3318,7 +3318,7 @@
           <a:p>
             <a:r>
               <a:rPr lang="en-US" dirty="0"/>
-              <a:t/>
+              <a:t>[7:05–10:00] Lo que verás hoy es el camino más claro para convertir la pasión por el bienestar en ingresos online sin ser agresiva en ventas, sin publicar sin parar y sin experiencia previa. Carly cuenta que acaba de volver de Japón, de la casa natal del fundador de la empresa (exvendedor de Sony), cuya filosofía es servir primero. Objetivo: entender el modelo Wellness Partnership y cómo generar ingresos desde cualquier lugar con el móvil o el ordenador.</a:t>
             </a:r>
             <a:endParaRPr lang="en-US" dirty="0"/>
           </a:p>
@@ -3406,7 +3406,7 @@
           <a:p>
             <a:r>
               <a:rPr lang="en-US" dirty="0"/>
-              <a:t/>
+              <a:t>[45:50–46:40] La libertad son las cuatro ruedas de un coche: tiempo, ubicación, dinero y salud. Un médico o abogado tiene libertad financiera pero no de tiempo; Lynn, con el nido vacío, tenía tiempo pero no libertad financiera ni de ubicación.</a:t>
             </a:r>
             <a:endParaRPr lang="en-US" dirty="0"/>
           </a:p>
@@ -3494,7 +3494,7 @@
           <a:p>
             <a:r>
               <a:rPr lang="en-US" dirty="0"/>
-              <a:t/>
+              <a:t>[46:40–50:50] Carly explica el cuadrante del flujo de dinero: empleado (cambias tiempo por dinero), autoempleado (tienes un trabajo propio), dueño de negocio (tienes un sistema) e inversor (tus inversiones generan ingresos). Este negocio no empieza ahí: se gana con el tiempo. De media, en 3–5 años (sin garantía) se llega al rango «legacy», con ingresos mensuales heredables. También destaca la calidad del producto japonés y el plan de compensación patentado (empresa con más de 50 años).</a:t>
             </a:r>
             <a:endParaRPr lang="en-US" dirty="0"/>
           </a:p>
@@ -3582,7 +3582,7 @@
           <a:p>
             <a:r>
               <a:rPr lang="en-US" dirty="0"/>
-              <a:t/>
+              <a:t>[50:50–51:15] Joya era coach de salud autónoma: para ganar más necesitaba más llamadas, más clientes y más energía. Ganaba $500–600 al mes; ahora genera $3K–9K al mes con más flexibilidad e ingresos pasivos.</a:t>
             </a:r>
             <a:endParaRPr lang="en-US" dirty="0"/>
           </a:p>
@@ -3670,7 +3670,7 @@
           <a:p>
             <a:r>
               <a:rPr lang="en-US" dirty="0"/>
-              <a:t/>
+              <a:t>[51:15–52:30] Un negocio físico requiere cientos de miles de dólares de arranque, operaciones diarias y poca flexibilidad. Naomi tenía márgenes del 10–15% en su cafetería; con este modelo habla de un 70–80%. El comercio electrónico no para de crecer mientras caen las ventas de grandes almacenes: aprender a vender online es clave.</a:t>
             </a:r>
             <a:endParaRPr lang="en-US" dirty="0"/>
           </a:p>
@@ -3758,7 +3758,7 @@
           <a:p>
             <a:r>
               <a:rPr lang="en-US" dirty="0"/>
-              <a:t/>
+              <a:t>[52:30–53:45] Shannon venía de las ventas de bajo ticket. Le encantaba ese trabajo, pero no era sostenible: su mejor mes fueron unos $13.000 con más de 100 ventas. Hace poco tuvo un mes de $30.000 con solo 7 ventas. «Quiero un negocio que encaje en mi vida, no una vida que encaje en mi negocio».</a:t>
             </a:r>
             <a:endParaRPr lang="en-US" dirty="0"/>
           </a:p>
@@ -3846,7 +3846,7 @@
           <a:p>
             <a:r>
               <a:rPr lang="en-US" dirty="0"/>
-              <a:t/>
+              <a:t>[53:45–55:00] Para ganar $10K al mes: con bajo ticket necesitas 500–1.000 ventas; como empleado, un sueldo con techo; como coach a $100–300 por sesión, muchísimos clientes; un negocio físico tiene gastos que reducen el beneficio. Con el modelo Wellness Partnership ($3K–7K por venta) bastan 2–4 socias alineadas al mes.</a:t>
             </a:r>
             <a:endParaRPr lang="en-US" dirty="0"/>
           </a:p>
@@ -3934,7 +3934,7 @@
           <a:p>
             <a:r>
               <a:rPr lang="en-US" dirty="0"/>
-              <a:t/>
+              <a:t>[55:00–56:40] Estabilidad financiera: cubrir lo básico (unos $2K–5K al mes). Independencia: el doble, con margen para invertir. Libertad financiera: 10 veces la estabilidad, para invertir y ser «radicalmente generosa». Ejemplo: Carly pasó 12 semanas en Grecia con su familia trabajando unas dos horas por la tarde. «No puedo garantizarte nada; si alguien te lo garantiza, es una señal de alarma».</a:t>
             </a:r>
             <a:endParaRPr lang="en-US" dirty="0"/>
           </a:p>
@@ -4022,7 +4022,7 @@
           <a:p>
             <a:r>
               <a:rPr lang="en-US" dirty="0"/>
-              <a:t/>
+              <a:t>[56:40–57:30] Pregunta en el chat: si dejaras de trabajar hoy, ¿tu negocio seguiría generando ingresos? Y si murieras hoy, ¿tendrías un ingreso que dejar en herencia a tus hijos? La mayoría no lo tiene.</a:t>
             </a:r>
             <a:endParaRPr lang="en-US" dirty="0"/>
           </a:p>
@@ -4110,7 +4110,7 @@
           <a:p>
             <a:r>
               <a:rPr lang="en-US" dirty="0"/>
-              <a:t/>
+              <a:t>[57:30–58:45] Por qué Enagic: empresa japonesa de 52 años con sede en Okinawa, más de $1.000M en ventas. El agua es algo que todos necesitan; el producto es sostenible y dura más de 20 años (hay gente con máquinas de 25–30 años). Sin inventario ni cuotas; según Shannon, se parece más a un modelo inmobiliario que a la venta directa tradicional. Alrededor del 51% de comisión va a los distribuidores.</a:t>
             </a:r>
             <a:endParaRPr lang="en-US" dirty="0"/>
           </a:p>
@@ -4198,7 +4198,7 @@
           <a:p>
             <a:r>
               <a:rPr lang="en-US" dirty="0"/>
-              <a:t/>
+              <a:t>[58:45–59:35] El plan de compensación: lo importante es el rango 6A2-3, que Carly alcanzó hace unos meses: un mínimo de $5.000 al mes de por vida y heredable. «La gente trabaja décadas para su pensión a los 65; aquí se puede conseguir en 3–5 años».</a:t>
             </a:r>
             <a:endParaRPr lang="en-US" dirty="0"/>
           </a:p>
@@ -4286,7 +4286,7 @@
           <a:p>
             <a:r>
               <a:rPr lang="en-US" dirty="0"/>
-              <a:t/>
+              <a:t>[11:15–12:55] Si te quedas hasta el final recibes dos cosas: (1) una llamada de claridad con una coach del equipo para ver tu caso según tu calendario, personalidad y objetivos; (2) acceso a un grupo privado de mentoría de 4 semanas con personas que ganan 6 y 7 cifras: bases y visión, plan de redes y DMs, ventas offline, mentalidad e ingreso de legado. «Aunque no tengas seguidores ni te sientas tecnológica, saldrás con un plan claro».</a:t>
             </a:r>
             <a:endParaRPr lang="en-US" dirty="0"/>
           </a:p>
@@ -4374,7 +4374,7 @@
           <a:p>
             <a:r>
               <a:rPr lang="en-US" dirty="0"/>
-              <a:t/>
+              <a:t>[59:35–1:00:25] La venta directa global valía unos $200.000M en 2022 y llegará a unos $286.000M en 2030. El mercado de ionizadores crecerá más de $1.000M entre 2021 y 2027. Sumado al marketing online, «no llegas tarde: es el momento, la demanda y la oportunidad alineados».</a:t>
             </a:r>
             <a:endParaRPr lang="en-US" dirty="0"/>
           </a:p>
@@ -4462,7 +4462,7 @@
           <a:p>
             <a:r>
               <a:rPr lang="en-US" dirty="0"/>
-              <a:t/>
+              <a:t>[1:00:25–1:02:30] «¿Necesito experiencia, ser influencer o experta en tecnología?». No. Iulia se presenta: lleva 7–8 meses y en su 5.º–6.º mes ganó $34.000 en un mes. Fue maestra con un sueldo de $32.000 al año en un trabajo que odiaba; ahora hace homeschool con sus 5 hijos.</a:t>
             </a:r>
             <a:endParaRPr lang="en-US" dirty="0"/>
           </a:p>
@@ -4550,7 +4550,7 @@
           <a:p>
             <a:r>
               <a:rPr lang="en-US" dirty="0"/>
-              <a:t/>
+              <a:t>[1:02:30–1:08:45] Tres caminos. Orgánico: hay más de 5.200M de usuarios de redes y pasamos más de 6 horas al día online; no hace falta ser influencer, se trata de compartir lo que te apasiona y crear contenido que trabaje 24/7. Publicidad pagada: anuncios de pocos dólares al día en Meta dirigidos a tu público ideal; Iulia ganó más de $7.000 con un solo anuncio en 3 semanas sin experiencia previa. Offline (Aubrey): conversaciones reales, bolsa de agua con folleto, máquina en préstamo, puntos de recogida en centros de bienestar, demostraciones y ferias.</a:t>
             </a:r>
             <a:endParaRPr lang="en-US" dirty="0"/>
           </a:p>
@@ -4638,7 +4638,7 @@
           <a:p>
             <a:r>
               <a:rPr lang="en-US" dirty="0"/>
-              <a:t/>
+              <a:t>[1:08:45–1:11:15] Membresías de agua compartida: Aubrey conoció el agua así. Hizo una demostración en casa, lanzó su programa de agua compartida esa noche y pagó su máquina en 6 meses. La tabla muestra ingresos mensuales extra de negocios (smoothies ~$2.500, MedSpa ~$1.300) y hogares ($500–1.500), y las comisiones cuando esos clientes compran su propia máquina.</a:t>
             </a:r>
             <a:endParaRPr lang="en-US" dirty="0"/>
           </a:p>
@@ -4726,7 +4726,7 @@
           <a:p>
             <a:r>
               <a:rPr lang="en-US" dirty="0"/>
-              <a:t/>
+              <a:t>[1:11:15–1:12:30] No importa el tamaño de tu cuenta: Dana tiene 20.000 seguidores, otras 4.000 o 1.500. Dana, acupuntora, ha generado más de $336.000; Anna duplicó sus ingresos en tres meses; Michelle superó los $100.000 en 13 meses con un día de $10.255. Aubrey trabajó 12 años en marketing corporativo y ha sustituido su sueldo para estar en casa con su hija.</a:t>
             </a:r>
             <a:endParaRPr lang="en-US" dirty="0"/>
           </a:p>
@@ -4814,7 +4814,7 @@
           <a:p>
             <a:r>
               <a:rPr lang="en-US" dirty="0"/>
-              <a:t/>
+              <a:t>[1:12:30–1:13:45] La infraestructura del millón en 5 pasos: 1) atraer atención y conectar (orgánico, anuncios o en persona); 2) presentar una oferta que mejora la vida de alguien; 3) conectarlo a un sistema que genera confianza; 4) automatizar el proceso para no cambiar tiempo por dinero; 5) acelerar con mentoría.</a:t>
             </a:r>
             <a:endParaRPr lang="en-US" dirty="0"/>
           </a:p>
@@ -4902,7 +4902,7 @@
           <a:p>
             <a:r>
               <a:rPr lang="en-US" dirty="0"/>
-              <a:t/>
+              <a:t>[1:13:45–1:15:25] «No tienes que construir estos sistemas: ya están hechos». Conexión real → clase gratuita como esta → proceso de aprendizaje automatizado (el «proceso de descubrimiento») → la persona decide sus productos y entra en la comunidad. Aubrey: así puede ir al gimnasio a las 8:30 y quedar con amigas entre semana. Después, Ross (marido de Carly) cuenta que era el «marido escéptico»: investigó la parte de salud (el hidrógeno) y el modelo de negocio, que describe como una forma de «gamificar» las ventas y el marketing con afiliados.</a:t>
             </a:r>
             <a:endParaRPr lang="en-US" dirty="0"/>
           </a:p>
@@ -4990,7 +4990,7 @@
           <a:p>
             <a:r>
               <a:rPr lang="en-US" dirty="0"/>
-              <a:t/>
+              <a:t>[1:20:25–1:21:40] La forma más rápida de cambiar tu vida es encontrar a alguien que ya vive la vida que quieres y aprender de esa persona. Oprah fue mentorizada por Maya Angelou; Zuckerberg, por Steve Jobs; Lady Gaga, por Akon; Tony Robbins, por Jim Rohn. La mentoría acorta los plazos.</a:t>
             </a:r>
             <a:endParaRPr lang="en-US" dirty="0"/>
           </a:p>
@@ -5078,7 +5078,7 @@
           <a:p>
             <a:r>
               <a:rPr lang="en-US" dirty="0"/>
-              <a:t/>
+              <a:t>[1:21:40–1:22:30] El modelo no va de reclutar masivamente, ni de hacerse viral, ni de lanzar enlaces. Va de identificar a unas pocas mujeres serias y alineadas con la misma pasión por la salud, el impacto y la libertad, presentarles la infraestructura y conectarlas con la mentoría adecuada.</a:t>
             </a:r>
             <a:endParaRPr lang="en-US" dirty="0"/>
           </a:p>
@@ -5166,7 +5166,7 @@
           <a:p>
             <a:r>
               <a:rPr lang="en-US" dirty="0"/>
-              <a:t/>
+              <a:t>[1:22:30–1:24:10] Si todo lo que hiciera este negocio fuera… cambiar tu perspectiva (Dana dice que ha crecido más en 2 años que en toda su vida); reemplazar tu sueldo (Anna: 12 ventas directas en un mes); viajar (Ali recorre Australia en caravana con meses de 12.000 AUD); hacer lo que amas (a Lacey la empresa le reembolsó $7.700 por ir a Japón); más tiempo en familia; mejorar la salud (la hija de Amanda con PANDAS); o una comunidad afín… ¿merecería la pena?</a:t>
             </a:r>
             <a:endParaRPr lang="en-US" dirty="0"/>
           </a:p>
@@ -5254,7 +5254,7 @@
           <a:p>
             <a:r>
               <a:rPr lang="en-US" dirty="0"/>
-              <a:t/>
+              <a:t>[12:55–14:35] Visualización: imagínate dentro de un año, construyendo algo a largo plazo, con impulso y apoyo, trabajando desde cualquier lugar, pudiendo viajar o quedarte en casa con tus hijos. «¿Cómo sería tu vida si el dinero dejara de mandar?». Carly pide un trato: 90 minutos de atención total, móvil en no molestar.</a:t>
             </a:r>
             <a:endParaRPr lang="en-US" dirty="0"/>
           </a:p>
@@ -5342,7 +5342,7 @@
           <a:p>
             <a:r>
               <a:rPr lang="en-US" dirty="0"/>
-              <a:t/>
+              <a:t>[1:24:10–1:25:00] Hemos cubierto mucho, pero la información sola no cambia tu vida: vivimos rodeados de información y ruido. Podrías aprenderlo todo por tu cuenta, pero ¿y si tuvieras una comunidad y sistemas a los que conectarte?</a:t>
             </a:r>
             <a:endParaRPr lang="en-US" dirty="0"/>
           </a:p>
@@ -5430,7 +5430,7 @@
           <a:p>
             <a:r>
               <a:rPr lang="en-US" dirty="0"/>
-              <a:t/>
+              <a:t>[1:25:00–1:27:05] El paquete Wellness Partnership: primero el proceso de descubrimiento (vídeos cortos con más testimonios, productos, financiación y preguntas frecuentes), que conviene ver con cualquier otra persona que decida en casa. Luego una llamada de claridad uno a uno. Al invertir en producto se abre la comunidad: acceso de por vida al centro de formación (lanzamiento, ventas, redes, anuncios), llamadas en directo, chats 24/7 y masterminds. «Como un MBA para trabajar online».</a:t>
             </a:r>
             <a:endParaRPr lang="en-US" dirty="0"/>
           </a:p>
@@ -5518,7 +5518,7 @@
           <a:p>
             <a:r>
               <a:rPr lang="en-US" dirty="0"/>
-              <a:t/>
+              <a:t>[1:27:05–1:28:45] Más resultados: Sunny, $100K en su primer año; Naomi, $50K en sus primeros 6 meses; Jillian, días de $5.000 y $7.500. Hay tres formas de empezar, con una inversión de $6K a $24K y opciones de financiación. Lo importante es el retorno: con el K8 recuperas la inversión en 9 ventas; con el Quad y el Legacy, en unas 4. A partir de ahí, «estás en beneficio el resto de tu vida».</a:t>
             </a:r>
             <a:endParaRPr lang="en-US" dirty="0"/>
           </a:p>
@@ -5606,7 +5606,7 @@
           <a:p>
             <a:r>
               <a:rPr lang="en-US" dirty="0"/>
-              <a:t/>
+              <a:t>[1:28:45–1:29:35] El K8 cuesta $5.890 más impuestos y envío. El Quad (dos K8, uno para ti y otro para prestar, filtro de ducha, remineralizador y cúrcuma) ronda los $18.000. El Legacy (dos filtros de ducha, dos ionizadores y dos Ukon) ronda los $24.000. Las cifras exactas se dan en la llamada.</a:t>
             </a:r>
             <a:endParaRPr lang="en-US" dirty="0"/>
           </a:p>
@@ -5694,7 +5694,7 @@
           <a:p>
             <a:r>
               <a:rPr lang="en-US" dirty="0"/>
-              <a:t/>
+              <a:t>[1:29:35–1:30:25] Con el Legacy recuperas la inversión en 5 ventas y llegas a unos $50.000 en 8 ventas. Esto conecta con el cuadrante del inversor: los rangos legacy (3–5 años de media) dan ingresos mensuales heredables. Carly enseña a tener las tres cuentas superiores, por eso su ingreso legacy pasará de $5.000 este año a $20.000 el próximo.</a:t>
             </a:r>
             <a:endParaRPr lang="en-US" dirty="0"/>
           </a:p>
@@ -5782,7 +5782,7 @@
           <a:p>
             <a:r>
               <a:rPr lang="en-US" dirty="0"/>
-              <a:t/>
+              <a:t>[1:30:25–1:31:15] Promoción de la propia empresa solo en junio: empiezas con 4 veces la comisión. Normalmente tu primera venta de un Quad son $3.030; este mes empiezas en $4.040 y la tercera sube a $5.050. Son más de $3.000 extra si cierras tus ventas antes de fin de mes.</a:t>
             </a:r>
             <a:endParaRPr lang="en-US" dirty="0"/>
           </a:p>
@@ -5870,7 +5870,7 @@
           <a:p>
             <a:r>
               <a:rPr lang="en-US" dirty="0"/>
-              <a:t/>
+              <a:t>[1:31:15–1:32:05] Bonos: el grupo privado de mentoría; apoyo hasta tus primeros $10.000 en ventas (te acompañan en tu primera conversación con un cliente); acceso al marco del millón de dólares que compartió Aubrey; y retiros y eventos presenciales cada tres meses.</a:t>
             </a:r>
             <a:endParaRPr lang="en-US" dirty="0"/>
           </a:p>
@@ -5958,7 +5958,7 @@
           <a:p>
             <a:r>
               <a:rPr lang="en-US" dirty="0"/>
-              <a:t/>
+              <a:t>[1:32:05–1:32:30] Fuera de esta llamada, el proceso de descubrimiento y la llamada cuestan $99. Hoy no se cobran esos $99: puedes avanzar al siguiente paso gratis, sin ninguna inversión hasta que decidas tu paquete.</a:t>
             </a:r>
             <a:endParaRPr lang="en-US" dirty="0"/>
           </a:p>
@@ -6046,7 +6046,7 @@
           <a:p>
             <a:r>
               <a:rPr lang="en-US" dirty="0"/>
-              <a:t/>
+              <a:t>[1:32:30–1:35:25] Siguiente paso: solicitar plaza en el grupo de mentoría (por qué te interesa, qué quieres aprender). Si te aprueban, recibes gratis los vídeos del proceso de descubrimiento, reservas tu llamada uno a uno y decides si empiezas con el K8, el Quad o el Legacy. Tras invertir se abren las puertas de Team Rise Up. Ábrelo en otra pestaña: al cerrar la llamada deja de estar disponible.</a:t>
             </a:r>
             <a:endParaRPr lang="en-US" dirty="0"/>
           </a:p>
@@ -6134,7 +6134,7 @@
           <a:p>
             <a:r>
               <a:rPr lang="en-US" dirty="0"/>
-              <a:t/>
+              <a:t>[1:35:25–1:41:30] Premios en efectivo ($560 repartidos entre dos personas). Marissa, recién graduada del instituto, cuenta que no pidió plaza en la universidad porque quiere empezar este negocio para tener libertad de tiempo, ubicación y dinero. Melis, coach de salud y mamá de dos, venía de un MLM de bajo ticket agotador; le atraen la salud, la libertad financiera y la comunidad con mentoría. Recordatorio: para entrar en la promoción de junio hay que hacerlo antes de fin de mes, y conviene ver el proceso de descubrimiento con quien decida en casa.</a:t>
             </a:r>
             <a:endParaRPr lang="en-US" dirty="0"/>
           </a:p>
@@ -6222,7 +6222,7 @@
           <a:p>
             <a:r>
               <a:rPr lang="en-US" dirty="0"/>
-              <a:t/>
+              <a:t>[16:40–17:55] Lo que la gente cree que crea riqueza: un trabajo estable de 9 a 5 hasta los 65, una carrera en derecho, finanzas o medicina, o una herencia. Pero mucha gente en esas carreras está quemada y sin tiempo, y muchas personas con herencia no sienten propósito. «Eso no es lo que buscamos».</a:t>
             </a:r>
             <a:endParaRPr lang="en-US" dirty="0"/>
           </a:p>
@@ -6310,7 +6310,7 @@
           <a:p>
             <a:r>
               <a:rPr lang="en-US" dirty="0"/>
-              <a:t/>
+              <a:t>[17:55–19:35] El «New Rich»: un cuerpo sano, un corazón alegre, una cuenta bancaria abundante y tiempo para disfrutarlo. No es una pirámide de «tres que traen a tres», ni copiar y pegar DMs, ni vender cursos, ni hacer una lista de 100 amigos. Es aprender una habilidad, seguir un sistema y conectarte a una comunidad. El verdadero activo eres tú: tus habilidades, tu mensaje y tu confianza.</a:t>
             </a:r>
             <a:endParaRPr lang="en-US" dirty="0"/>
           </a:p>
@@ -6398,7 +6398,7 @@
           <a:p>
             <a:r>
               <a:rPr lang="en-US" dirty="0"/>
-              <a:t/>
+              <a:t>[19:35–22:05] Es para ti si amas el bienestar, quieres un negocio alineado y no agresivo, estás harta de la cultura del hustle, no tienes audiencia pero estás dispuesta a aprender y seguir un plan. No es para ti si buscas dinero fácil, no quieres crecer ni dejarte guiar, te quedas en el escepticismo de «demuéstramelo» o no asumes responsabilidad. Si no es para ti, puedes salir sin ningún problema.</a:t>
             </a:r>
             <a:endParaRPr lang="en-US" dirty="0"/>
           </a:p>
@@ -6486,7 +6486,7 @@
           <a:p>
             <a:r>
               <a:rPr lang="en-US" dirty="0"/>
-              <a:t/>
+              <a:t>[22:05–22:55] Team Rise Up: un equipo de líderes con mentalidad de crecimiento y conscientes de su salud que crean libertad de tiempo y financiera, una persona hidratada a la vez. Padres, profesores, mamás y papás en casa, familias homeschool, ex ejecutivos… todos buscando una forma mejor.</a:t>
             </a:r>
             <a:endParaRPr lang="en-US" dirty="0"/>
           </a:p>
@@ -7181,7 +7181,7 @@
       </p:grpSpPr>
       <p:sp>
         <p:nvSpPr>
-          <p:cNvPr id="2" name="Text 0"/>
+          <p:cNvPr id="3" name="Text 0"/>
           <p:cNvSpPr txBox="1"/>
           <p:nvPr/>
         </p:nvSpPr>
@@ -7220,7 +7220,7 @@
       </p:sp>
       <p:sp>
         <p:nvSpPr>
-          <p:cNvPr id="3" name="Text 1"/>
+          <p:cNvPr id="4" name="Text 1"/>
           <p:cNvSpPr txBox="1"/>
           <p:nvPr/>
         </p:nvSpPr>
@@ -7259,7 +7259,7 @@
       </p:sp>
       <p:sp>
         <p:nvSpPr>
-          <p:cNvPr id="4" name="Text 2"/>
+          <p:cNvPr id="5" name="Text 2"/>
           <p:cNvSpPr txBox="1"/>
           <p:nvPr/>
         </p:nvSpPr>
@@ -7298,7 +7298,7 @@
       </p:sp>
       <p:sp>
         <p:nvSpPr>
-          <p:cNvPr id="5" name="Shape 3"/>
+          <p:cNvPr id="6" name="Shape 3"/>
           <p:cNvSpPr/>
           <p:nvPr/>
         </p:nvSpPr>
@@ -7325,7 +7325,7 @@
       </p:sp>
       <p:sp>
         <p:nvSpPr>
-          <p:cNvPr id="6" name="Text 4"/>
+          <p:cNvPr id="7" name="Text 4"/>
           <p:cNvSpPr txBox="1"/>
           <p:nvPr/>
         </p:nvSpPr>
@@ -7378,7 +7378,7 @@
       </p:sp>
       <p:sp>
         <p:nvSpPr>
-          <p:cNvPr id="7" name="Text 5"/>
+          <p:cNvPr id="8" name="Text 5"/>
           <p:cNvSpPr txBox="1"/>
           <p:nvPr/>
         </p:nvSpPr>
@@ -7417,7 +7417,7 @@
       </p:sp>
       <p:sp>
         <p:nvSpPr>
-          <p:cNvPr id="8" name="Text 6"/>
+          <p:cNvPr id="9" name="Text 6"/>
           <p:cNvSpPr txBox="1"/>
           <p:nvPr/>
         </p:nvSpPr>
@@ -7522,7 +7522,7 @@
       </p:sp>
       <p:sp>
         <p:nvSpPr>
-          <p:cNvPr id="3" name="Shape 1"/>
+          <p:cNvPr id="4" name="Shape 1"/>
           <p:cNvSpPr/>
           <p:nvPr/>
         </p:nvSpPr>
@@ -7549,7 +7549,7 @@
       </p:sp>
       <p:sp>
         <p:nvSpPr>
-          <p:cNvPr id="4" name="Text 2"/>
+          <p:cNvPr id="5" name="Text 2"/>
           <p:cNvSpPr txBox="1"/>
           <p:nvPr/>
         </p:nvSpPr>
@@ -7588,7 +7588,7 @@
       </p:sp>
       <p:sp>
         <p:nvSpPr>
-          <p:cNvPr id="5" name="Text 3"/>
+          <p:cNvPr id="6" name="Text 3"/>
           <p:cNvSpPr txBox="1"/>
           <p:nvPr/>
         </p:nvSpPr>
@@ -7627,7 +7627,7 @@
       </p:sp>
       <p:sp>
         <p:nvSpPr>
-          <p:cNvPr id="6" name="Shape 4"/>
+          <p:cNvPr id="7" name="Shape 4"/>
           <p:cNvSpPr/>
           <p:nvPr/>
         </p:nvSpPr>
@@ -7654,7 +7654,7 @@
       </p:sp>
       <p:sp>
         <p:nvSpPr>
-          <p:cNvPr id="7" name="Text 5"/>
+          <p:cNvPr id="8" name="Text 5"/>
           <p:cNvSpPr txBox="1"/>
           <p:nvPr/>
         </p:nvSpPr>
@@ -7693,7 +7693,7 @@
       </p:sp>
       <p:sp>
         <p:nvSpPr>
-          <p:cNvPr id="8" name="Text 6"/>
+          <p:cNvPr id="9" name="Text 6"/>
           <p:cNvSpPr txBox="1"/>
           <p:nvPr/>
         </p:nvSpPr>
@@ -7732,7 +7732,7 @@
       </p:sp>
       <p:sp>
         <p:nvSpPr>
-          <p:cNvPr id="9" name="Text 7"/>
+          <p:cNvPr id="10" name="Text 7"/>
           <p:cNvSpPr txBox="1"/>
           <p:nvPr/>
         </p:nvSpPr>
@@ -7885,7 +7885,7 @@
       </p:sp>
       <p:sp>
         <p:nvSpPr>
-          <p:cNvPr id="3" name="Shape 1"/>
+          <p:cNvPr id="4" name="Shape 1"/>
           <p:cNvSpPr/>
           <p:nvPr/>
         </p:nvSpPr>
@@ -7912,7 +7912,7 @@
       </p:sp>
       <p:sp>
         <p:nvSpPr>
-          <p:cNvPr id="4" name="Text 2"/>
+          <p:cNvPr id="5" name="Text 2"/>
           <p:cNvSpPr txBox="1"/>
           <p:nvPr/>
         </p:nvSpPr>
@@ -7951,7 +7951,7 @@
       </p:sp>
       <p:sp>
         <p:nvSpPr>
-          <p:cNvPr id="5" name="Text 3"/>
+          <p:cNvPr id="6" name="Text 3"/>
           <p:cNvSpPr txBox="1"/>
           <p:nvPr/>
         </p:nvSpPr>
@@ -7990,7 +7990,7 @@
       </p:sp>
       <p:sp>
         <p:nvSpPr>
-          <p:cNvPr id="6" name="Shape 4"/>
+          <p:cNvPr id="7" name="Shape 4"/>
           <p:cNvSpPr/>
           <p:nvPr/>
         </p:nvSpPr>
@@ -8015,7 +8015,7 @@
       </p:sp>
       <p:sp>
         <p:nvSpPr>
-          <p:cNvPr id="7" name="Text 5"/>
+          <p:cNvPr id="8" name="Text 5"/>
           <p:cNvSpPr txBox="1"/>
           <p:nvPr/>
         </p:nvSpPr>
@@ -8054,7 +8054,7 @@
       </p:sp>
       <p:sp>
         <p:nvSpPr>
-          <p:cNvPr id="8" name="Shape 6"/>
+          <p:cNvPr id="9" name="Shape 6"/>
           <p:cNvSpPr/>
           <p:nvPr/>
         </p:nvSpPr>
@@ -8081,7 +8081,7 @@
       </p:sp>
       <p:sp>
         <p:nvSpPr>
-          <p:cNvPr id="9" name="Text 7"/>
+          <p:cNvPr id="10" name="Text 7"/>
           <p:cNvSpPr txBox="1"/>
           <p:nvPr/>
         </p:nvSpPr>
@@ -8120,7 +8120,7 @@
       </p:sp>
       <p:sp>
         <p:nvSpPr>
-          <p:cNvPr id="10" name="Text 8"/>
+          <p:cNvPr id="11" name="Text 8"/>
           <p:cNvSpPr txBox="1"/>
           <p:nvPr/>
         </p:nvSpPr>
@@ -8159,7 +8159,7 @@
       </p:sp>
       <p:sp>
         <p:nvSpPr>
-          <p:cNvPr id="11" name="Shape 9"/>
+          <p:cNvPr id="12" name="Shape 9"/>
           <p:cNvSpPr/>
           <p:nvPr/>
         </p:nvSpPr>
@@ -8184,7 +8184,7 @@
       </p:sp>
       <p:sp>
         <p:nvSpPr>
-          <p:cNvPr id="12" name="Text 10"/>
+          <p:cNvPr id="13" name="Text 10"/>
           <p:cNvSpPr txBox="1"/>
           <p:nvPr/>
         </p:nvSpPr>
@@ -8303,7 +8303,7 @@
       </p:grpSpPr>
       <p:sp>
         <p:nvSpPr>
-          <p:cNvPr id="2" name="Text 0"/>
+          <p:cNvPr id="3" name="Text 0"/>
           <p:cNvSpPr txBox="1"/>
           <p:nvPr/>
         </p:nvSpPr>
@@ -8342,7 +8342,7 @@
       </p:sp>
       <p:sp>
         <p:nvSpPr>
-          <p:cNvPr id="3" name="Text 1"/>
+          <p:cNvPr id="4" name="Text 1"/>
           <p:cNvSpPr txBox="1"/>
           <p:nvPr/>
         </p:nvSpPr>
@@ -8381,7 +8381,7 @@
       </p:sp>
       <p:sp>
         <p:nvSpPr>
-          <p:cNvPr id="4" name="Shape 2"/>
+          <p:cNvPr id="5" name="Shape 2"/>
           <p:cNvSpPr/>
           <p:nvPr/>
         </p:nvSpPr>
@@ -8408,7 +8408,7 @@
       </p:sp>
       <p:sp>
         <p:nvSpPr>
-          <p:cNvPr id="5" name="Text 3"/>
+          <p:cNvPr id="6" name="Text 3"/>
           <p:cNvSpPr txBox="1"/>
           <p:nvPr/>
         </p:nvSpPr>
@@ -8472,7 +8472,7 @@
       </p:grpSpPr>
       <p:sp>
         <p:nvSpPr>
-          <p:cNvPr id="2" name="Text 0"/>
+          <p:cNvPr id="3" name="Text 0"/>
           <p:cNvSpPr txBox="1"/>
           <p:nvPr/>
         </p:nvSpPr>
@@ -8511,7 +8511,7 @@
       </p:sp>
       <p:sp>
         <p:nvSpPr>
-          <p:cNvPr id="3" name="Text 1"/>
+          <p:cNvPr id="4" name="Text 1"/>
           <p:cNvSpPr txBox="1"/>
           <p:nvPr/>
         </p:nvSpPr>
@@ -8550,7 +8550,7 @@
       </p:sp>
       <p:sp>
         <p:nvSpPr>
-          <p:cNvPr id="4" name="Text 2"/>
+          <p:cNvPr id="5" name="Text 2"/>
           <p:cNvSpPr txBox="1"/>
           <p:nvPr/>
         </p:nvSpPr>
@@ -8589,7 +8589,7 @@
       </p:sp>
       <p:sp>
         <p:nvSpPr>
-          <p:cNvPr id="5" name="Text 0"/>
+          <p:cNvPr id="6" name="Text 0"/>
           <p:cNvSpPr/>
           <p:nvPr>
             <p:ph idx="100" type="title" hasCustomPrompt="1"/>
@@ -8733,7 +8733,7 @@
       </p:sp>
       <p:sp>
         <p:nvSpPr>
-          <p:cNvPr id="3" name="Text 1"/>
+          <p:cNvPr id="4" name="Text 1"/>
           <p:cNvSpPr txBox="1"/>
           <p:nvPr/>
         </p:nvSpPr>
@@ -8772,7 +8772,7 @@
       </p:sp>
       <p:sp>
         <p:nvSpPr>
-          <p:cNvPr id="4" name="Text 2"/>
+          <p:cNvPr id="5" name="Text 2"/>
           <p:cNvSpPr txBox="1"/>
           <p:nvPr/>
         </p:nvSpPr>
@@ -8811,7 +8811,7 @@
       </p:sp>
       <p:sp>
         <p:nvSpPr>
-          <p:cNvPr id="5" name="Shape 3"/>
+          <p:cNvPr id="6" name="Shape 3"/>
           <p:cNvSpPr/>
           <p:nvPr/>
         </p:nvSpPr>
@@ -8838,7 +8838,7 @@
       </p:sp>
       <p:sp>
         <p:nvSpPr>
-          <p:cNvPr id="6" name="Text 4"/>
+          <p:cNvPr id="7" name="Text 4"/>
           <p:cNvSpPr txBox="1"/>
           <p:nvPr/>
         </p:nvSpPr>
@@ -8877,7 +8877,7 @@
       </p:sp>
       <p:sp>
         <p:nvSpPr>
-          <p:cNvPr id="7" name="Shape 5"/>
+          <p:cNvPr id="8" name="Shape 5"/>
           <p:cNvSpPr/>
           <p:nvPr/>
         </p:nvSpPr>
@@ -8904,7 +8904,7 @@
       </p:sp>
       <p:sp>
         <p:nvSpPr>
-          <p:cNvPr id="8" name="Text 6"/>
+          <p:cNvPr id="9" name="Text 6"/>
           <p:cNvSpPr txBox="1"/>
           <p:nvPr/>
         </p:nvSpPr>
@@ -8943,7 +8943,7 @@
       </p:sp>
       <p:sp>
         <p:nvSpPr>
-          <p:cNvPr id="9" name="Shape 7"/>
+          <p:cNvPr id="10" name="Shape 7"/>
           <p:cNvSpPr/>
           <p:nvPr/>
         </p:nvSpPr>
@@ -8970,7 +8970,7 @@
       </p:sp>
       <p:sp>
         <p:nvSpPr>
-          <p:cNvPr id="10" name="Text 8"/>
+          <p:cNvPr id="11" name="Text 8"/>
           <p:cNvSpPr txBox="1"/>
           <p:nvPr/>
         </p:nvSpPr>
@@ -9009,7 +9009,7 @@
       </p:sp>
       <p:sp>
         <p:nvSpPr>
-          <p:cNvPr id="11" name="Shape 9"/>
+          <p:cNvPr id="12" name="Shape 9"/>
           <p:cNvSpPr/>
           <p:nvPr/>
         </p:nvSpPr>
@@ -9036,7 +9036,7 @@
       </p:sp>
       <p:sp>
         <p:nvSpPr>
-          <p:cNvPr id="12" name="Text 10"/>
+          <p:cNvPr id="13" name="Text 10"/>
           <p:cNvSpPr txBox="1"/>
           <p:nvPr/>
         </p:nvSpPr>
@@ -9075,7 +9075,7 @@
       </p:sp>
       <p:sp>
         <p:nvSpPr>
-          <p:cNvPr id="13" name="Shape 11"/>
+          <p:cNvPr id="14" name="Shape 11"/>
           <p:cNvSpPr/>
           <p:nvPr/>
         </p:nvSpPr>
@@ -9102,7 +9102,7 @@
       </p:sp>
       <p:sp>
         <p:nvSpPr>
-          <p:cNvPr id="14" name="Text 12"/>
+          <p:cNvPr id="15" name="Text 12"/>
           <p:cNvSpPr txBox="1"/>
           <p:nvPr/>
         </p:nvSpPr>
@@ -9141,7 +9141,7 @@
       </p:sp>
       <p:sp>
         <p:nvSpPr>
-          <p:cNvPr id="15" name="Shape 13"/>
+          <p:cNvPr id="16" name="Shape 13"/>
           <p:cNvSpPr/>
           <p:nvPr/>
         </p:nvSpPr>
@@ -9168,7 +9168,7 @@
       </p:sp>
       <p:sp>
         <p:nvSpPr>
-          <p:cNvPr id="16" name="Text 14"/>
+          <p:cNvPr id="17" name="Text 14"/>
           <p:cNvSpPr txBox="1"/>
           <p:nvPr/>
         </p:nvSpPr>
@@ -9207,7 +9207,7 @@
       </p:sp>
       <p:sp>
         <p:nvSpPr>
-          <p:cNvPr id="17" name="Shape 15"/>
+          <p:cNvPr id="18" name="Shape 15"/>
           <p:cNvSpPr/>
           <p:nvPr/>
         </p:nvSpPr>
@@ -9234,7 +9234,7 @@
       </p:sp>
       <p:sp>
         <p:nvSpPr>
-          <p:cNvPr id="18" name="Text 16"/>
+          <p:cNvPr id="19" name="Text 16"/>
           <p:cNvSpPr txBox="1"/>
           <p:nvPr/>
         </p:nvSpPr>
@@ -9273,7 +9273,7 @@
       </p:sp>
       <p:sp>
         <p:nvSpPr>
-          <p:cNvPr id="19" name="Shape 17"/>
+          <p:cNvPr id="20" name="Shape 17"/>
           <p:cNvSpPr/>
           <p:nvPr/>
         </p:nvSpPr>
@@ -9300,7 +9300,7 @@
       </p:sp>
       <p:sp>
         <p:nvSpPr>
-          <p:cNvPr id="20" name="Text 18"/>
+          <p:cNvPr id="21" name="Text 18"/>
           <p:cNvSpPr txBox="1"/>
           <p:nvPr/>
         </p:nvSpPr>
@@ -9339,7 +9339,7 @@
       </p:sp>
       <p:sp>
         <p:nvSpPr>
-          <p:cNvPr id="21" name="Shape 19"/>
+          <p:cNvPr id="22" name="Shape 19"/>
           <p:cNvSpPr/>
           <p:nvPr/>
         </p:nvSpPr>
@@ -9366,7 +9366,7 @@
       </p:sp>
       <p:sp>
         <p:nvSpPr>
-          <p:cNvPr id="22" name="Text 20"/>
+          <p:cNvPr id="23" name="Text 20"/>
           <p:cNvSpPr txBox="1"/>
           <p:nvPr/>
         </p:nvSpPr>
@@ -9405,7 +9405,7 @@
       </p:sp>
       <p:sp>
         <p:nvSpPr>
-          <p:cNvPr id="23" name="Shape 21"/>
+          <p:cNvPr id="24" name="Shape 21"/>
           <p:cNvSpPr/>
           <p:nvPr/>
         </p:nvSpPr>
@@ -9432,7 +9432,7 @@
       </p:sp>
       <p:sp>
         <p:nvSpPr>
-          <p:cNvPr id="24" name="Text 22"/>
+          <p:cNvPr id="25" name="Text 22"/>
           <p:cNvSpPr txBox="1"/>
           <p:nvPr/>
         </p:nvSpPr>
@@ -9471,7 +9471,7 @@
       </p:sp>
       <p:sp>
         <p:nvSpPr>
-          <p:cNvPr id="25" name="Shape 23"/>
+          <p:cNvPr id="26" name="Shape 23"/>
           <p:cNvSpPr/>
           <p:nvPr/>
         </p:nvSpPr>
@@ -9498,7 +9498,7 @@
       </p:sp>
       <p:sp>
         <p:nvSpPr>
-          <p:cNvPr id="26" name="Text 24"/>
+          <p:cNvPr id="27" name="Text 24"/>
           <p:cNvSpPr txBox="1"/>
           <p:nvPr/>
         </p:nvSpPr>
@@ -9537,7 +9537,7 @@
       </p:sp>
       <p:sp>
         <p:nvSpPr>
-          <p:cNvPr id="27" name="Shape 25"/>
+          <p:cNvPr id="28" name="Shape 25"/>
           <p:cNvSpPr/>
           <p:nvPr/>
         </p:nvSpPr>
@@ -9564,7 +9564,7 @@
       </p:sp>
       <p:sp>
         <p:nvSpPr>
-          <p:cNvPr id="28" name="Text 26"/>
+          <p:cNvPr id="29" name="Text 26"/>
           <p:cNvSpPr txBox="1"/>
           <p:nvPr/>
         </p:nvSpPr>
@@ -9717,7 +9717,7 @@
       </p:sp>
       <p:sp>
         <p:nvSpPr>
-          <p:cNvPr id="3" name="Shape 1"/>
+          <p:cNvPr id="4" name="Shape 1"/>
           <p:cNvSpPr/>
           <p:nvPr/>
         </p:nvSpPr>
@@ -9742,7 +9742,7 @@
       </p:sp>
       <p:sp>
         <p:nvSpPr>
-          <p:cNvPr id="4" name="Text 2"/>
+          <p:cNvPr id="5" name="Text 2"/>
           <p:cNvSpPr txBox="1"/>
           <p:nvPr/>
         </p:nvSpPr>
@@ -9781,7 +9781,7 @@
       </p:sp>
       <p:sp>
         <p:nvSpPr>
-          <p:cNvPr id="5" name="Shape 3"/>
+          <p:cNvPr id="6" name="Shape 3"/>
           <p:cNvSpPr/>
           <p:nvPr/>
         </p:nvSpPr>
@@ -9806,7 +9806,7 @@
       </p:sp>
       <p:sp>
         <p:nvSpPr>
-          <p:cNvPr id="6" name="Text 4"/>
+          <p:cNvPr id="7" name="Text 4"/>
           <p:cNvSpPr txBox="1"/>
           <p:nvPr/>
         </p:nvSpPr>
@@ -9933,7 +9933,7 @@
       </p:sp>
       <p:sp>
         <p:nvSpPr>
-          <p:cNvPr id="7" name="Shape 5"/>
+          <p:cNvPr id="8" name="Shape 5"/>
           <p:cNvSpPr/>
           <p:nvPr/>
         </p:nvSpPr>
@@ -9958,7 +9958,7 @@
       </p:sp>
       <p:sp>
         <p:nvSpPr>
-          <p:cNvPr id="8" name="Text 6"/>
+          <p:cNvPr id="9" name="Text 6"/>
           <p:cNvSpPr txBox="1"/>
           <p:nvPr/>
         </p:nvSpPr>
@@ -9997,7 +9997,7 @@
       </p:sp>
       <p:sp>
         <p:nvSpPr>
-          <p:cNvPr id="9" name="Shape 7"/>
+          <p:cNvPr id="10" name="Shape 7"/>
           <p:cNvSpPr/>
           <p:nvPr/>
         </p:nvSpPr>
@@ -10022,7 +10022,7 @@
       </p:sp>
       <p:sp>
         <p:nvSpPr>
-          <p:cNvPr id="10" name="Text 8"/>
+          <p:cNvPr id="11" name="Text 8"/>
           <p:cNvSpPr txBox="1"/>
           <p:nvPr/>
         </p:nvSpPr>
@@ -10149,7 +10149,7 @@
       </p:sp>
       <p:sp>
         <p:nvSpPr>
-          <p:cNvPr id="11" name="Shape 9"/>
+          <p:cNvPr id="12" name="Shape 9"/>
           <p:cNvSpPr/>
           <p:nvPr/>
         </p:nvSpPr>
@@ -10174,7 +10174,7 @@
       </p:sp>
       <p:sp>
         <p:nvSpPr>
-          <p:cNvPr id="12" name="Text 10"/>
+          <p:cNvPr id="13" name="Text 10"/>
           <p:cNvSpPr txBox="1"/>
           <p:nvPr/>
         </p:nvSpPr>
@@ -10213,7 +10213,7 @@
       </p:sp>
       <p:sp>
         <p:nvSpPr>
-          <p:cNvPr id="13" name="Shape 11"/>
+          <p:cNvPr id="14" name="Shape 11"/>
           <p:cNvSpPr/>
           <p:nvPr/>
         </p:nvSpPr>
@@ -10238,7 +10238,7 @@
       </p:sp>
       <p:sp>
         <p:nvSpPr>
-          <p:cNvPr id="14" name="Text 12"/>
+          <p:cNvPr id="15" name="Text 12"/>
           <p:cNvSpPr txBox="1"/>
           <p:nvPr/>
         </p:nvSpPr>
@@ -10479,7 +10479,7 @@
       </p:sp>
       <p:sp>
         <p:nvSpPr>
-          <p:cNvPr id="3" name="Text 1"/>
+          <p:cNvPr id="4" name="Text 1"/>
           <p:cNvSpPr txBox="1"/>
           <p:nvPr/>
         </p:nvSpPr>
@@ -10560,7 +10560,7 @@
       </p:sp>
       <p:sp>
         <p:nvSpPr>
-          <p:cNvPr id="4" name="Shape 2"/>
+          <p:cNvPr id="5" name="Shape 2"/>
           <p:cNvSpPr/>
           <p:nvPr/>
         </p:nvSpPr>
@@ -10587,7 +10587,7 @@
       </p:sp>
       <p:sp>
         <p:nvSpPr>
-          <p:cNvPr id="5" name="Text 3"/>
+          <p:cNvPr id="6" name="Text 3"/>
           <p:cNvSpPr txBox="1"/>
           <p:nvPr/>
         </p:nvSpPr>
@@ -10626,7 +10626,7 @@
       </p:sp>
       <p:sp>
         <p:nvSpPr>
-          <p:cNvPr id="6" name="Text 4"/>
+          <p:cNvPr id="7" name="Text 4"/>
           <p:cNvSpPr txBox="1"/>
           <p:nvPr/>
         </p:nvSpPr>
@@ -10665,7 +10665,7 @@
       </p:sp>
       <p:sp>
         <p:nvSpPr>
-          <p:cNvPr id="7" name="Shape 5"/>
+          <p:cNvPr id="8" name="Shape 5"/>
           <p:cNvSpPr/>
           <p:nvPr/>
         </p:nvSpPr>
@@ -10692,7 +10692,7 @@
       </p:sp>
       <p:sp>
         <p:nvSpPr>
-          <p:cNvPr id="8" name="Text 6"/>
+          <p:cNvPr id="9" name="Text 6"/>
           <p:cNvSpPr txBox="1"/>
           <p:nvPr/>
         </p:nvSpPr>
@@ -10731,7 +10731,7 @@
       </p:sp>
       <p:sp>
         <p:nvSpPr>
-          <p:cNvPr id="9" name="Text 7"/>
+          <p:cNvPr id="10" name="Text 7"/>
           <p:cNvSpPr txBox="1"/>
           <p:nvPr/>
         </p:nvSpPr>
@@ -10770,7 +10770,7 @@
       </p:sp>
       <p:sp>
         <p:nvSpPr>
-          <p:cNvPr id="10" name="Text 8"/>
+          <p:cNvPr id="11" name="Text 8"/>
           <p:cNvSpPr txBox="1"/>
           <p:nvPr/>
         </p:nvSpPr>
@@ -10923,7 +10923,7 @@
       </p:sp>
       <p:graphicFrame>
         <p:nvGraphicFramePr>
-          <p:cNvPr id="3" name="Chart 0" descr=""/>
+          <p:cNvPr id="4" name="Chart 0" descr=""/>
           <p:cNvGraphicFramePr/>
           <p:nvPr/>
         </p:nvGraphicFramePr>
@@ -10939,7 +10939,7 @@
       </p:graphicFrame>
       <p:sp>
         <p:nvSpPr>
-          <p:cNvPr id="4" name="Shape 1"/>
+          <p:cNvPr id="5" name="Shape 1"/>
           <p:cNvSpPr/>
           <p:nvPr/>
         </p:nvSpPr>
@@ -10966,7 +10966,7 @@
       </p:sp>
       <p:sp>
         <p:nvSpPr>
-          <p:cNvPr id="5" name="Text 2"/>
+          <p:cNvPr id="6" name="Text 2"/>
           <p:cNvSpPr txBox="1"/>
           <p:nvPr/>
         </p:nvSpPr>
@@ -11005,7 +11005,7 @@
       </p:sp>
       <p:sp>
         <p:nvSpPr>
-          <p:cNvPr id="6" name="Text 3"/>
+          <p:cNvPr id="7" name="Text 3"/>
           <p:cNvSpPr txBox="1"/>
           <p:nvPr/>
         </p:nvSpPr>
@@ -11111,7 +11111,7 @@
       </p:sp>
       <p:sp>
         <p:nvSpPr>
-          <p:cNvPr id="7" name="Text 4"/>
+          <p:cNvPr id="8" name="Text 4"/>
           <p:cNvSpPr txBox="1"/>
           <p:nvPr/>
         </p:nvSpPr>
@@ -11223,7 +11223,7 @@
       </p:grpSpPr>
       <p:sp>
         <p:nvSpPr>
-          <p:cNvPr id="2" name="Text 0"/>
+          <p:cNvPr id="3" name="Text 0"/>
           <p:cNvSpPr txBox="1"/>
           <p:nvPr/>
         </p:nvSpPr>
@@ -11328,7 +11328,7 @@
       </p:sp>
       <p:sp>
         <p:nvSpPr>
-          <p:cNvPr id="3" name="Shape 1"/>
+          <p:cNvPr id="4" name="Shape 1"/>
           <p:cNvSpPr/>
           <p:nvPr/>
         </p:nvSpPr>
@@ -11353,7 +11353,7 @@
       </p:sp>
       <p:sp>
         <p:nvSpPr>
-          <p:cNvPr id="4" name="Text 2"/>
+          <p:cNvPr id="5" name="Text 2"/>
           <p:cNvSpPr txBox="1"/>
           <p:nvPr/>
         </p:nvSpPr>
@@ -11392,7 +11392,7 @@
       </p:sp>
       <p:sp>
         <p:nvSpPr>
-          <p:cNvPr id="5" name="Text 3"/>
+          <p:cNvPr id="6" name="Text 3"/>
           <p:cNvSpPr txBox="1"/>
           <p:nvPr/>
         </p:nvSpPr>
@@ -11459,7 +11459,7 @@
       </p:sp>
       <p:sp>
         <p:nvSpPr>
-          <p:cNvPr id="6" name="Shape 4"/>
+          <p:cNvPr id="7" name="Shape 4"/>
           <p:cNvSpPr/>
           <p:nvPr/>
         </p:nvSpPr>
@@ -11484,7 +11484,7 @@
       </p:sp>
       <p:sp>
         <p:nvSpPr>
-          <p:cNvPr id="7" name="Text 5"/>
+          <p:cNvPr id="8" name="Text 5"/>
           <p:cNvSpPr txBox="1"/>
           <p:nvPr/>
         </p:nvSpPr>
@@ -11523,7 +11523,7 @@
       </p:sp>
       <p:sp>
         <p:nvSpPr>
-          <p:cNvPr id="8" name="Text 6"/>
+          <p:cNvPr id="9" name="Text 6"/>
           <p:cNvSpPr txBox="1"/>
           <p:nvPr/>
         </p:nvSpPr>
@@ -11579,7 +11579,7 @@
       </p:sp>
       <p:sp>
         <p:nvSpPr>
-          <p:cNvPr id="9" name="Shape 7"/>
+          <p:cNvPr id="10" name="Shape 7"/>
           <p:cNvSpPr/>
           <p:nvPr/>
         </p:nvSpPr>
@@ -11604,7 +11604,7 @@
       </p:sp>
       <p:sp>
         <p:nvSpPr>
-          <p:cNvPr id="10" name="Text 8"/>
+          <p:cNvPr id="11" name="Text 8"/>
           <p:cNvSpPr txBox="1"/>
           <p:nvPr/>
         </p:nvSpPr>
@@ -11643,7 +11643,7 @@
       </p:sp>
       <p:sp>
         <p:nvSpPr>
-          <p:cNvPr id="11" name="Text 9"/>
+          <p:cNvPr id="12" name="Text 9"/>
           <p:cNvSpPr txBox="1"/>
           <p:nvPr/>
         </p:nvSpPr>
@@ -11699,7 +11699,7 @@
       </p:sp>
       <p:sp>
         <p:nvSpPr>
-          <p:cNvPr id="12" name="Shape 10"/>
+          <p:cNvPr id="13" name="Shape 10"/>
           <p:cNvSpPr/>
           <p:nvPr/>
         </p:nvSpPr>
@@ -11724,7 +11724,7 @@
       </p:sp>
       <p:sp>
         <p:nvSpPr>
-          <p:cNvPr id="13" name="Text 11"/>
+          <p:cNvPr id="14" name="Text 11"/>
           <p:cNvSpPr txBox="1"/>
           <p:nvPr/>
         </p:nvSpPr>
@@ -11763,7 +11763,7 @@
       </p:sp>
       <p:sp>
         <p:nvSpPr>
-          <p:cNvPr id="14" name="Text 12"/>
+          <p:cNvPr id="15" name="Text 12"/>
           <p:cNvSpPr txBox="1"/>
           <p:nvPr/>
         </p:nvSpPr>
@@ -11819,7 +11819,7 @@
       </p:sp>
       <p:sp>
         <p:nvSpPr>
-          <p:cNvPr id="15" name="Shape 13"/>
+          <p:cNvPr id="16" name="Shape 13"/>
           <p:cNvSpPr/>
           <p:nvPr/>
         </p:nvSpPr>
@@ -11844,7 +11844,7 @@
       </p:sp>
       <p:sp>
         <p:nvSpPr>
-          <p:cNvPr id="16" name="Text 14"/>
+          <p:cNvPr id="17" name="Text 14"/>
           <p:cNvSpPr txBox="1"/>
           <p:nvPr/>
         </p:nvSpPr>
@@ -11883,7 +11883,7 @@
       </p:sp>
       <p:sp>
         <p:nvSpPr>
-          <p:cNvPr id="17" name="Text 15"/>
+          <p:cNvPr id="18" name="Text 15"/>
           <p:cNvSpPr txBox="1"/>
           <p:nvPr/>
         </p:nvSpPr>
@@ -11939,7 +11939,7 @@
       </p:sp>
       <p:sp>
         <p:nvSpPr>
-          <p:cNvPr id="18" name="Shape 16"/>
+          <p:cNvPr id="19" name="Shape 16"/>
           <p:cNvSpPr/>
           <p:nvPr/>
         </p:nvSpPr>
@@ -11964,7 +11964,7 @@
       </p:sp>
       <p:sp>
         <p:nvSpPr>
-          <p:cNvPr id="19" name="Text 17"/>
+          <p:cNvPr id="20" name="Text 17"/>
           <p:cNvSpPr txBox="1"/>
           <p:nvPr/>
         </p:nvSpPr>
@@ -12003,7 +12003,7 @@
       </p:sp>
       <p:sp>
         <p:nvSpPr>
-          <p:cNvPr id="20" name="Text 18"/>
+          <p:cNvPr id="21" name="Text 18"/>
           <p:cNvSpPr txBox="1"/>
           <p:nvPr/>
         </p:nvSpPr>
@@ -12059,7 +12059,7 @@
       </p:sp>
       <p:sp>
         <p:nvSpPr>
-          <p:cNvPr id="21" name="Shape 19"/>
+          <p:cNvPr id="22" name="Shape 19"/>
           <p:cNvSpPr/>
           <p:nvPr/>
         </p:nvSpPr>
@@ -12086,7 +12086,7 @@
       </p:sp>
       <p:sp>
         <p:nvSpPr>
-          <p:cNvPr id="22" name="Text 20"/>
+          <p:cNvPr id="23" name="Text 20"/>
           <p:cNvSpPr txBox="1"/>
           <p:nvPr/>
         </p:nvSpPr>
@@ -12125,7 +12125,7 @@
       </p:sp>
       <p:sp>
         <p:nvSpPr>
-          <p:cNvPr id="23" name="Text 21"/>
+          <p:cNvPr id="24" name="Text 21"/>
           <p:cNvSpPr txBox="1"/>
           <p:nvPr/>
         </p:nvSpPr>
@@ -12278,7 +12278,7 @@
       </p:sp>
       <p:sp>
         <p:nvSpPr>
-          <p:cNvPr id="3" name="Shape 1"/>
+          <p:cNvPr id="4" name="Shape 1"/>
           <p:cNvSpPr/>
           <p:nvPr/>
         </p:nvSpPr>
@@ -12305,7 +12305,7 @@
       </p:sp>
       <p:sp>
         <p:nvSpPr>
-          <p:cNvPr id="4" name="Text 2"/>
+          <p:cNvPr id="5" name="Text 2"/>
           <p:cNvSpPr txBox="1"/>
           <p:nvPr/>
         </p:nvSpPr>
@@ -12344,7 +12344,7 @@
       </p:sp>
       <p:sp>
         <p:nvSpPr>
-          <p:cNvPr id="5" name="Text 3"/>
+          <p:cNvPr id="6" name="Text 3"/>
           <p:cNvSpPr txBox="1"/>
           <p:nvPr/>
         </p:nvSpPr>
@@ -12383,7 +12383,7 @@
       </p:sp>
       <p:sp>
         <p:nvSpPr>
-          <p:cNvPr id="6" name="Shape 4"/>
+          <p:cNvPr id="7" name="Shape 4"/>
           <p:cNvSpPr/>
           <p:nvPr/>
         </p:nvSpPr>
@@ -12410,7 +12410,7 @@
       </p:sp>
       <p:sp>
         <p:nvSpPr>
-          <p:cNvPr id="7" name="Text 5"/>
+          <p:cNvPr id="8" name="Text 5"/>
           <p:cNvSpPr txBox="1"/>
           <p:nvPr/>
         </p:nvSpPr>
@@ -12449,7 +12449,7 @@
       </p:sp>
       <p:sp>
         <p:nvSpPr>
-          <p:cNvPr id="8" name="Shape 6"/>
+          <p:cNvPr id="9" name="Shape 6"/>
           <p:cNvSpPr/>
           <p:nvPr/>
         </p:nvSpPr>
@@ -12476,7 +12476,7 @@
       </p:sp>
       <p:sp>
         <p:nvSpPr>
-          <p:cNvPr id="9" name="Text 7"/>
+          <p:cNvPr id="10" name="Text 7"/>
           <p:cNvSpPr txBox="1"/>
           <p:nvPr/>
         </p:nvSpPr>
@@ -12515,7 +12515,7 @@
       </p:sp>
       <p:sp>
         <p:nvSpPr>
-          <p:cNvPr id="10" name="Text 8"/>
+          <p:cNvPr id="11" name="Text 8"/>
           <p:cNvSpPr txBox="1"/>
           <p:nvPr/>
         </p:nvSpPr>
@@ -12554,7 +12554,7 @@
       </p:sp>
       <p:sp>
         <p:nvSpPr>
-          <p:cNvPr id="11" name="Shape 9"/>
+          <p:cNvPr id="12" name="Shape 9"/>
           <p:cNvSpPr/>
           <p:nvPr/>
         </p:nvSpPr>
@@ -12581,7 +12581,7 @@
       </p:sp>
       <p:sp>
         <p:nvSpPr>
-          <p:cNvPr id="12" name="Text 10"/>
+          <p:cNvPr id="13" name="Text 10"/>
           <p:cNvSpPr txBox="1"/>
           <p:nvPr/>
         </p:nvSpPr>
@@ -12620,7 +12620,7 @@
       </p:sp>
       <p:sp>
         <p:nvSpPr>
-          <p:cNvPr id="13" name="Shape 11"/>
+          <p:cNvPr id="14" name="Shape 11"/>
           <p:cNvSpPr/>
           <p:nvPr/>
         </p:nvSpPr>
@@ -12647,7 +12647,7 @@
       </p:sp>
       <p:sp>
         <p:nvSpPr>
-          <p:cNvPr id="14" name="Text 12"/>
+          <p:cNvPr id="15" name="Text 12"/>
           <p:cNvSpPr txBox="1"/>
           <p:nvPr/>
         </p:nvSpPr>
@@ -12686,7 +12686,7 @@
       </p:sp>
       <p:sp>
         <p:nvSpPr>
-          <p:cNvPr id="15" name="Text 13"/>
+          <p:cNvPr id="16" name="Text 13"/>
           <p:cNvSpPr txBox="1"/>
           <p:nvPr/>
         </p:nvSpPr>
@@ -12725,7 +12725,7 @@
       </p:sp>
       <p:sp>
         <p:nvSpPr>
-          <p:cNvPr id="16" name="Shape 14"/>
+          <p:cNvPr id="17" name="Shape 14"/>
           <p:cNvSpPr/>
           <p:nvPr/>
         </p:nvSpPr>
@@ -12752,7 +12752,7 @@
       </p:sp>
       <p:sp>
         <p:nvSpPr>
-          <p:cNvPr id="17" name="Text 15"/>
+          <p:cNvPr id="18" name="Text 15"/>
           <p:cNvSpPr txBox="1"/>
           <p:nvPr/>
         </p:nvSpPr>
@@ -12791,7 +12791,7 @@
       </p:sp>
       <p:sp>
         <p:nvSpPr>
-          <p:cNvPr id="18" name="Shape 16"/>
+          <p:cNvPr id="19" name="Shape 16"/>
           <p:cNvSpPr/>
           <p:nvPr/>
         </p:nvSpPr>
@@ -12818,7 +12818,7 @@
       </p:sp>
       <p:sp>
         <p:nvSpPr>
-          <p:cNvPr id="19" name="Text 17"/>
+          <p:cNvPr id="20" name="Text 17"/>
           <p:cNvSpPr txBox="1"/>
           <p:nvPr/>
         </p:nvSpPr>
@@ -12857,7 +12857,7 @@
       </p:sp>
       <p:sp>
         <p:nvSpPr>
-          <p:cNvPr id="20" name="Text 18"/>
+          <p:cNvPr id="21" name="Text 18"/>
           <p:cNvSpPr txBox="1"/>
           <p:nvPr/>
         </p:nvSpPr>
@@ -12896,7 +12896,7 @@
       </p:sp>
       <p:sp>
         <p:nvSpPr>
-          <p:cNvPr id="21" name="Shape 19"/>
+          <p:cNvPr id="22" name="Shape 19"/>
           <p:cNvSpPr/>
           <p:nvPr/>
         </p:nvSpPr>
@@ -12923,7 +12923,7 @@
       </p:sp>
       <p:sp>
         <p:nvSpPr>
-          <p:cNvPr id="22" name="Text 20"/>
+          <p:cNvPr id="23" name="Text 20"/>
           <p:cNvSpPr txBox="1"/>
           <p:nvPr/>
         </p:nvSpPr>
@@ -12962,7 +12962,7 @@
       </p:sp>
       <p:sp>
         <p:nvSpPr>
-          <p:cNvPr id="23" name="Shape 21"/>
+          <p:cNvPr id="24" name="Shape 21"/>
           <p:cNvSpPr/>
           <p:nvPr/>
         </p:nvSpPr>
@@ -12989,7 +12989,7 @@
       </p:sp>
       <p:sp>
         <p:nvSpPr>
-          <p:cNvPr id="24" name="Text 22"/>
+          <p:cNvPr id="25" name="Text 22"/>
           <p:cNvSpPr txBox="1"/>
           <p:nvPr/>
         </p:nvSpPr>
@@ -13028,7 +13028,7 @@
       </p:sp>
       <p:sp>
         <p:nvSpPr>
-          <p:cNvPr id="25" name="Text 23"/>
+          <p:cNvPr id="26" name="Text 23"/>
           <p:cNvSpPr txBox="1"/>
           <p:nvPr/>
         </p:nvSpPr>
@@ -13067,7 +13067,7 @@
       </p:sp>
       <p:sp>
         <p:nvSpPr>
-          <p:cNvPr id="26" name="Shape 24"/>
+          <p:cNvPr id="27" name="Shape 24"/>
           <p:cNvSpPr/>
           <p:nvPr/>
         </p:nvSpPr>
@@ -13094,7 +13094,7 @@
       </p:sp>
       <p:sp>
         <p:nvSpPr>
-          <p:cNvPr id="27" name="Text 25"/>
+          <p:cNvPr id="28" name="Text 25"/>
           <p:cNvSpPr txBox="1"/>
           <p:nvPr/>
         </p:nvSpPr>
@@ -13133,7 +13133,7 @@
       </p:sp>
       <p:sp>
         <p:nvSpPr>
-          <p:cNvPr id="28" name="Shape 26"/>
+          <p:cNvPr id="29" name="Shape 26"/>
           <p:cNvSpPr/>
           <p:nvPr/>
         </p:nvSpPr>
@@ -13160,7 +13160,7 @@
       </p:sp>
       <p:sp>
         <p:nvSpPr>
-          <p:cNvPr id="29" name="Text 27"/>
+          <p:cNvPr id="30" name="Text 27"/>
           <p:cNvSpPr txBox="1"/>
           <p:nvPr/>
         </p:nvSpPr>
@@ -13199,7 +13199,7 @@
       </p:sp>
       <p:sp>
         <p:nvSpPr>
-          <p:cNvPr id="30" name="Text 28"/>
+          <p:cNvPr id="31" name="Text 28"/>
           <p:cNvSpPr txBox="1"/>
           <p:nvPr/>
         </p:nvSpPr>
@@ -13238,7 +13238,7 @@
       </p:sp>
       <p:sp>
         <p:nvSpPr>
-          <p:cNvPr id="31" name="Shape 29"/>
+          <p:cNvPr id="32" name="Shape 29"/>
           <p:cNvSpPr/>
           <p:nvPr/>
         </p:nvSpPr>
@@ -13265,7 +13265,7 @@
       </p:sp>
       <p:sp>
         <p:nvSpPr>
-          <p:cNvPr id="32" name="Text 30"/>
+          <p:cNvPr id="33" name="Text 30"/>
           <p:cNvSpPr txBox="1"/>
           <p:nvPr/>
         </p:nvSpPr>
@@ -13304,7 +13304,7 @@
       </p:sp>
       <p:sp>
         <p:nvSpPr>
-          <p:cNvPr id="33" name="Shape 31"/>
+          <p:cNvPr id="34" name="Shape 31"/>
           <p:cNvSpPr/>
           <p:nvPr/>
         </p:nvSpPr>
@@ -13331,7 +13331,7 @@
       </p:sp>
       <p:sp>
         <p:nvSpPr>
-          <p:cNvPr id="34" name="Text 32"/>
+          <p:cNvPr id="35" name="Text 32"/>
           <p:cNvSpPr txBox="1"/>
           <p:nvPr/>
         </p:nvSpPr>
@@ -13370,7 +13370,7 @@
       </p:sp>
       <p:sp>
         <p:nvSpPr>
-          <p:cNvPr id="35" name="Text 33"/>
+          <p:cNvPr id="36" name="Text 33"/>
           <p:cNvSpPr txBox="1"/>
           <p:nvPr/>
         </p:nvSpPr>
@@ -13409,7 +13409,7 @@
       </p:sp>
       <p:sp>
         <p:nvSpPr>
-          <p:cNvPr id="36" name="Shape 34"/>
+          <p:cNvPr id="37" name="Shape 34"/>
           <p:cNvSpPr/>
           <p:nvPr/>
         </p:nvSpPr>
@@ -13436,7 +13436,7 @@
       </p:sp>
       <p:sp>
         <p:nvSpPr>
-          <p:cNvPr id="37" name="Text 35"/>
+          <p:cNvPr id="38" name="Text 35"/>
           <p:cNvSpPr txBox="1"/>
           <p:nvPr/>
         </p:nvSpPr>
@@ -13589,7 +13589,7 @@
       </p:sp>
       <p:sp>
         <p:nvSpPr>
-          <p:cNvPr id="3" name="Text 1"/>
+          <p:cNvPr id="4" name="Text 1"/>
           <p:cNvSpPr txBox="1"/>
           <p:nvPr/>
         </p:nvSpPr>
@@ -13628,7 +13628,7 @@
       </p:sp>
       <p:sp>
         <p:nvSpPr>
-          <p:cNvPr id="4" name="Shape 2"/>
+          <p:cNvPr id="5" name="Shape 2"/>
           <p:cNvSpPr/>
           <p:nvPr/>
         </p:nvSpPr>
@@ -13655,7 +13655,7 @@
       </p:sp>
       <p:sp>
         <p:nvSpPr>
-          <p:cNvPr id="5" name="Shape 3"/>
+          <p:cNvPr id="6" name="Shape 3"/>
           <p:cNvSpPr/>
           <p:nvPr/>
         </p:nvSpPr>
@@ -13680,7 +13680,7 @@
       </p:sp>
       <p:sp>
         <p:nvSpPr>
-          <p:cNvPr id="6" name="Text 4"/>
+          <p:cNvPr id="7" name="Text 4"/>
           <p:cNvSpPr txBox="1"/>
           <p:nvPr/>
         </p:nvSpPr>
@@ -13719,7 +13719,7 @@
       </p:sp>
       <p:sp>
         <p:nvSpPr>
-          <p:cNvPr id="7" name="Text 5"/>
+          <p:cNvPr id="8" name="Text 5"/>
           <p:cNvSpPr txBox="1"/>
           <p:nvPr/>
         </p:nvSpPr>
@@ -13758,7 +13758,7 @@
       </p:sp>
       <p:sp>
         <p:nvSpPr>
-          <p:cNvPr id="8" name="Shape 6"/>
+          <p:cNvPr id="9" name="Shape 6"/>
           <p:cNvSpPr/>
           <p:nvPr/>
         </p:nvSpPr>
@@ -13785,7 +13785,7 @@
       </p:sp>
       <p:sp>
         <p:nvSpPr>
-          <p:cNvPr id="9" name="Shape 7"/>
+          <p:cNvPr id="10" name="Shape 7"/>
           <p:cNvSpPr/>
           <p:nvPr/>
         </p:nvSpPr>
@@ -13810,7 +13810,7 @@
       </p:sp>
       <p:sp>
         <p:nvSpPr>
-          <p:cNvPr id="10" name="Text 8"/>
+          <p:cNvPr id="11" name="Text 8"/>
           <p:cNvSpPr txBox="1"/>
           <p:nvPr/>
         </p:nvSpPr>
@@ -13849,7 +13849,7 @@
       </p:sp>
       <p:sp>
         <p:nvSpPr>
-          <p:cNvPr id="11" name="Text 9"/>
+          <p:cNvPr id="12" name="Text 9"/>
           <p:cNvSpPr txBox="1"/>
           <p:nvPr/>
         </p:nvSpPr>
@@ -14002,7 +14002,7 @@
       </p:sp>
       <p:sp>
         <p:nvSpPr>
-          <p:cNvPr id="3" name="Shape 1"/>
+          <p:cNvPr id="4" name="Shape 1"/>
           <p:cNvSpPr/>
           <p:nvPr/>
         </p:nvSpPr>
@@ -14029,7 +14029,7 @@
       </p:sp>
       <p:sp>
         <p:nvSpPr>
-          <p:cNvPr id="4" name="Text 2"/>
+          <p:cNvPr id="5" name="Text 2"/>
           <p:cNvSpPr txBox="1"/>
           <p:nvPr/>
         </p:nvSpPr>
@@ -14068,7 +14068,7 @@
       </p:sp>
       <p:sp>
         <p:nvSpPr>
-          <p:cNvPr id="5" name="Shape 3"/>
+          <p:cNvPr id="6" name="Shape 3"/>
           <p:cNvSpPr/>
           <p:nvPr/>
         </p:nvSpPr>
@@ -14095,7 +14095,7 @@
       </p:sp>
       <p:sp>
         <p:nvSpPr>
-          <p:cNvPr id="6" name="Text 4"/>
+          <p:cNvPr id="7" name="Text 4"/>
           <p:cNvSpPr txBox="1"/>
           <p:nvPr/>
         </p:nvSpPr>
@@ -14134,7 +14134,7 @@
       </p:sp>
       <p:sp>
         <p:nvSpPr>
-          <p:cNvPr id="7" name="Shape 5"/>
+          <p:cNvPr id="8" name="Shape 5"/>
           <p:cNvSpPr/>
           <p:nvPr/>
         </p:nvSpPr>
@@ -14161,7 +14161,7 @@
       </p:sp>
       <p:sp>
         <p:nvSpPr>
-          <p:cNvPr id="8" name="Text 6"/>
+          <p:cNvPr id="9" name="Text 6"/>
           <p:cNvSpPr txBox="1"/>
           <p:nvPr/>
         </p:nvSpPr>
@@ -14200,7 +14200,7 @@
       </p:sp>
       <p:sp>
         <p:nvSpPr>
-          <p:cNvPr id="9" name="Shape 7"/>
+          <p:cNvPr id="10" name="Shape 7"/>
           <p:cNvSpPr/>
           <p:nvPr/>
         </p:nvSpPr>
@@ -14227,7 +14227,7 @@
       </p:sp>
       <p:sp>
         <p:nvSpPr>
-          <p:cNvPr id="10" name="Text 8"/>
+          <p:cNvPr id="11" name="Text 8"/>
           <p:cNvSpPr txBox="1"/>
           <p:nvPr/>
         </p:nvSpPr>
@@ -14266,7 +14266,7 @@
       </p:sp>
       <p:sp>
         <p:nvSpPr>
-          <p:cNvPr id="11" name="Shape 9"/>
+          <p:cNvPr id="12" name="Shape 9"/>
           <p:cNvSpPr/>
           <p:nvPr/>
         </p:nvSpPr>
@@ -14293,7 +14293,7 @@
       </p:sp>
       <p:sp>
         <p:nvSpPr>
-          <p:cNvPr id="12" name="Text 10"/>
+          <p:cNvPr id="13" name="Text 10"/>
           <p:cNvSpPr txBox="1"/>
           <p:nvPr/>
         </p:nvSpPr>
@@ -14332,7 +14332,7 @@
       </p:sp>
       <p:sp>
         <p:nvSpPr>
-          <p:cNvPr id="13" name="Text 11"/>
+          <p:cNvPr id="14" name="Text 11"/>
           <p:cNvSpPr txBox="1"/>
           <p:nvPr/>
         </p:nvSpPr>
@@ -14371,7 +14371,7 @@
       </p:sp>
       <p:sp>
         <p:nvSpPr>
-          <p:cNvPr id="14" name="Text 12"/>
+          <p:cNvPr id="15" name="Text 12"/>
           <p:cNvSpPr txBox="1"/>
           <p:nvPr/>
         </p:nvSpPr>
@@ -14519,7 +14519,7 @@
       </p:sp>
       <p:sp>
         <p:nvSpPr>
-          <p:cNvPr id="15" name="Text 13"/>
+          <p:cNvPr id="16" name="Text 13"/>
           <p:cNvSpPr txBox="1"/>
           <p:nvPr/>
         </p:nvSpPr>
@@ -14781,7 +14781,7 @@
       </p:sp>
       <p:sp>
         <p:nvSpPr>
-          <p:cNvPr id="3" name="Text 1"/>
+          <p:cNvPr id="4" name="Text 1"/>
           <p:cNvSpPr txBox="1"/>
           <p:nvPr/>
         </p:nvSpPr>
@@ -14880,7 +14880,7 @@
       </p:sp>
       <p:sp>
         <p:nvSpPr>
-          <p:cNvPr id="4" name="Text 2"/>
+          <p:cNvPr id="5" name="Text 2"/>
           <p:cNvSpPr txBox="1"/>
           <p:nvPr/>
         </p:nvSpPr>
@@ -14919,7 +14919,7 @@
       </p:sp>
       <p:sp>
         <p:nvSpPr>
-          <p:cNvPr id="5" name="Shape 3"/>
+          <p:cNvPr id="6" name="Shape 3"/>
           <p:cNvSpPr/>
           <p:nvPr/>
         </p:nvSpPr>
@@ -14944,7 +14944,7 @@
       </p:sp>
       <p:sp>
         <p:nvSpPr>
-          <p:cNvPr id="6" name="Text 4"/>
+          <p:cNvPr id="7" name="Text 4"/>
           <p:cNvSpPr txBox="1"/>
           <p:nvPr/>
         </p:nvSpPr>
@@ -14983,7 +14983,7 @@
       </p:sp>
       <p:sp>
         <p:nvSpPr>
-          <p:cNvPr id="7" name="Shape 5"/>
+          <p:cNvPr id="8" name="Shape 5"/>
           <p:cNvSpPr/>
           <p:nvPr/>
         </p:nvSpPr>
@@ -15010,7 +15010,7 @@
       </p:sp>
       <p:sp>
         <p:nvSpPr>
-          <p:cNvPr id="8" name="Text 6"/>
+          <p:cNvPr id="9" name="Text 6"/>
           <p:cNvSpPr txBox="1"/>
           <p:nvPr/>
         </p:nvSpPr>
@@ -15049,7 +15049,7 @@
       </p:sp>
       <p:sp>
         <p:nvSpPr>
-          <p:cNvPr id="9" name="Shape 7"/>
+          <p:cNvPr id="10" name="Shape 7"/>
           <p:cNvSpPr/>
           <p:nvPr/>
         </p:nvSpPr>
@@ -15076,7 +15076,7 @@
       </p:sp>
       <p:sp>
         <p:nvSpPr>
-          <p:cNvPr id="10" name="Text 8"/>
+          <p:cNvPr id="11" name="Text 8"/>
           <p:cNvSpPr txBox="1"/>
           <p:nvPr/>
         </p:nvSpPr>
@@ -15115,7 +15115,7 @@
       </p:sp>
       <p:sp>
         <p:nvSpPr>
-          <p:cNvPr id="11" name="Shape 9"/>
+          <p:cNvPr id="12" name="Shape 9"/>
           <p:cNvSpPr/>
           <p:nvPr/>
         </p:nvSpPr>
@@ -15142,7 +15142,7 @@
       </p:sp>
       <p:sp>
         <p:nvSpPr>
-          <p:cNvPr id="12" name="Text 10"/>
+          <p:cNvPr id="13" name="Text 10"/>
           <p:cNvSpPr txBox="1"/>
           <p:nvPr/>
         </p:nvSpPr>
@@ -15295,7 +15295,7 @@
       </p:sp>
       <p:sp>
         <p:nvSpPr>
-          <p:cNvPr id="3" name="Text 1"/>
+          <p:cNvPr id="4" name="Text 1"/>
           <p:cNvSpPr txBox="1"/>
           <p:nvPr/>
         </p:nvSpPr>
@@ -15334,7 +15334,7 @@
       </p:sp>
       <p:sp>
         <p:nvSpPr>
-          <p:cNvPr id="4" name="Shape 2"/>
+          <p:cNvPr id="5" name="Shape 2"/>
           <p:cNvSpPr/>
           <p:nvPr/>
         </p:nvSpPr>
@@ -15361,7 +15361,7 @@
       </p:sp>
       <p:sp>
         <p:nvSpPr>
-          <p:cNvPr id="5" name="Text 3"/>
+          <p:cNvPr id="6" name="Text 3"/>
           <p:cNvSpPr txBox="1"/>
           <p:nvPr/>
         </p:nvSpPr>
@@ -15400,7 +15400,7 @@
       </p:sp>
       <p:sp>
         <p:nvSpPr>
-          <p:cNvPr id="6" name="Text 4"/>
+          <p:cNvPr id="7" name="Text 4"/>
           <p:cNvSpPr txBox="1"/>
           <p:nvPr/>
         </p:nvSpPr>
@@ -15439,7 +15439,7 @@
       </p:sp>
       <p:sp>
         <p:nvSpPr>
-          <p:cNvPr id="7" name="Text 5"/>
+          <p:cNvPr id="8" name="Text 5"/>
           <p:cNvSpPr txBox="1"/>
           <p:nvPr/>
         </p:nvSpPr>
@@ -15478,7 +15478,7 @@
       </p:sp>
       <p:sp>
         <p:nvSpPr>
-          <p:cNvPr id="8" name="Text 6"/>
+          <p:cNvPr id="9" name="Text 6"/>
           <p:cNvSpPr txBox="1"/>
           <p:nvPr/>
         </p:nvSpPr>
@@ -15517,7 +15517,7 @@
       </p:sp>
       <p:sp>
         <p:nvSpPr>
-          <p:cNvPr id="9" name="Shape 7"/>
+          <p:cNvPr id="10" name="Shape 7"/>
           <p:cNvSpPr/>
           <p:nvPr/>
         </p:nvSpPr>
@@ -15544,7 +15544,7 @@
       </p:sp>
       <p:sp>
         <p:nvSpPr>
-          <p:cNvPr id="10" name="Text 8"/>
+          <p:cNvPr id="11" name="Text 8"/>
           <p:cNvSpPr txBox="1"/>
           <p:nvPr/>
         </p:nvSpPr>
@@ -15583,7 +15583,7 @@
       </p:sp>
       <p:sp>
         <p:nvSpPr>
-          <p:cNvPr id="11" name="Text 9"/>
+          <p:cNvPr id="12" name="Text 9"/>
           <p:cNvSpPr txBox="1"/>
           <p:nvPr/>
         </p:nvSpPr>
@@ -15622,7 +15622,7 @@
       </p:sp>
       <p:sp>
         <p:nvSpPr>
-          <p:cNvPr id="12" name="Text 10"/>
+          <p:cNvPr id="13" name="Text 10"/>
           <p:cNvSpPr txBox="1"/>
           <p:nvPr/>
         </p:nvSpPr>
@@ -15661,7 +15661,7 @@
       </p:sp>
       <p:sp>
         <p:nvSpPr>
-          <p:cNvPr id="13" name="Text 11"/>
+          <p:cNvPr id="14" name="Text 11"/>
           <p:cNvSpPr txBox="1"/>
           <p:nvPr/>
         </p:nvSpPr>
@@ -15700,7 +15700,7 @@
       </p:sp>
       <p:sp>
         <p:nvSpPr>
-          <p:cNvPr id="14" name="Shape 12"/>
+          <p:cNvPr id="15" name="Shape 12"/>
           <p:cNvSpPr/>
           <p:nvPr/>
         </p:nvSpPr>
@@ -15727,7 +15727,7 @@
       </p:sp>
       <p:sp>
         <p:nvSpPr>
-          <p:cNvPr id="15" name="Text 13"/>
+          <p:cNvPr id="16" name="Text 13"/>
           <p:cNvSpPr txBox="1"/>
           <p:nvPr/>
         </p:nvSpPr>
@@ -15766,7 +15766,7 @@
       </p:sp>
       <p:sp>
         <p:nvSpPr>
-          <p:cNvPr id="16" name="Text 14"/>
+          <p:cNvPr id="17" name="Text 14"/>
           <p:cNvSpPr txBox="1"/>
           <p:nvPr/>
         </p:nvSpPr>
@@ -15805,7 +15805,7 @@
       </p:sp>
       <p:sp>
         <p:nvSpPr>
-          <p:cNvPr id="17" name="Text 15"/>
+          <p:cNvPr id="18" name="Text 15"/>
           <p:cNvSpPr txBox="1"/>
           <p:nvPr/>
         </p:nvSpPr>
@@ -15844,7 +15844,7 @@
       </p:sp>
       <p:sp>
         <p:nvSpPr>
-          <p:cNvPr id="18" name="Text 16"/>
+          <p:cNvPr id="19" name="Text 16"/>
           <p:cNvSpPr txBox="1"/>
           <p:nvPr/>
         </p:nvSpPr>
@@ -15997,7 +15997,7 @@
       </p:sp>
       <p:sp>
         <p:nvSpPr>
-          <p:cNvPr id="3" name="Text 1"/>
+          <p:cNvPr id="4" name="Text 1"/>
           <p:cNvSpPr txBox="1"/>
           <p:nvPr/>
         </p:nvSpPr>
@@ -16208,7 +16208,7 @@
       </p:sp>
       <p:sp>
         <p:nvSpPr>
-          <p:cNvPr id="4" name="Text 2"/>
+          <p:cNvPr id="5" name="Text 2"/>
           <p:cNvSpPr txBox="1"/>
           <p:nvPr/>
         </p:nvSpPr>
@@ -16419,7 +16419,7 @@
       </p:sp>
       <p:sp>
         <p:nvSpPr>
-          <p:cNvPr id="5" name="Shape 3"/>
+          <p:cNvPr id="6" name="Shape 3"/>
           <p:cNvSpPr/>
           <p:nvPr/>
         </p:nvSpPr>
@@ -16446,7 +16446,7 @@
       </p:sp>
       <p:sp>
         <p:nvSpPr>
-          <p:cNvPr id="6" name="Text 4"/>
+          <p:cNvPr id="7" name="Text 4"/>
           <p:cNvSpPr txBox="1"/>
           <p:nvPr/>
         </p:nvSpPr>
@@ -16599,7 +16599,7 @@
       </p:sp>
       <p:sp>
         <p:nvSpPr>
-          <p:cNvPr id="3" name="Shape 1"/>
+          <p:cNvPr id="4" name="Shape 1"/>
           <p:cNvSpPr/>
           <p:nvPr/>
         </p:nvSpPr>
@@ -16626,7 +16626,7 @@
       </p:sp>
       <p:sp>
         <p:nvSpPr>
-          <p:cNvPr id="4" name="Text 2"/>
+          <p:cNvPr id="5" name="Text 2"/>
           <p:cNvSpPr txBox="1"/>
           <p:nvPr/>
         </p:nvSpPr>
@@ -16665,7 +16665,7 @@
       </p:sp>
       <p:sp>
         <p:nvSpPr>
-          <p:cNvPr id="5" name="Text 3"/>
+          <p:cNvPr id="6" name="Text 3"/>
           <p:cNvSpPr txBox="1"/>
           <p:nvPr/>
         </p:nvSpPr>
@@ -16704,7 +16704,7 @@
       </p:sp>
       <p:sp>
         <p:nvSpPr>
-          <p:cNvPr id="6" name="Shape 4"/>
+          <p:cNvPr id="7" name="Shape 4"/>
           <p:cNvSpPr/>
           <p:nvPr/>
         </p:nvSpPr>
@@ -16731,7 +16731,7 @@
       </p:sp>
       <p:sp>
         <p:nvSpPr>
-          <p:cNvPr id="7" name="Text 5"/>
+          <p:cNvPr id="8" name="Text 5"/>
           <p:cNvSpPr txBox="1"/>
           <p:nvPr/>
         </p:nvSpPr>
@@ -16770,7 +16770,7 @@
       </p:sp>
       <p:sp>
         <p:nvSpPr>
-          <p:cNvPr id="8" name="Text 6"/>
+          <p:cNvPr id="9" name="Text 6"/>
           <p:cNvSpPr txBox="1"/>
           <p:nvPr/>
         </p:nvSpPr>
@@ -16809,7 +16809,7 @@
       </p:sp>
       <p:sp>
         <p:nvSpPr>
-          <p:cNvPr id="9" name="Shape 7"/>
+          <p:cNvPr id="10" name="Shape 7"/>
           <p:cNvSpPr/>
           <p:nvPr/>
         </p:nvSpPr>
@@ -16836,7 +16836,7 @@
       </p:sp>
       <p:sp>
         <p:nvSpPr>
-          <p:cNvPr id="10" name="Text 8"/>
+          <p:cNvPr id="11" name="Text 8"/>
           <p:cNvSpPr txBox="1"/>
           <p:nvPr/>
         </p:nvSpPr>
@@ -16875,7 +16875,7 @@
       </p:sp>
       <p:sp>
         <p:nvSpPr>
-          <p:cNvPr id="11" name="Text 9"/>
+          <p:cNvPr id="12" name="Text 9"/>
           <p:cNvSpPr txBox="1"/>
           <p:nvPr/>
         </p:nvSpPr>
@@ -16914,7 +16914,7 @@
       </p:sp>
       <p:sp>
         <p:nvSpPr>
-          <p:cNvPr id="12" name="Shape 10"/>
+          <p:cNvPr id="13" name="Shape 10"/>
           <p:cNvSpPr/>
           <p:nvPr/>
         </p:nvSpPr>
@@ -16941,7 +16941,7 @@
       </p:sp>
       <p:sp>
         <p:nvSpPr>
-          <p:cNvPr id="13" name="Text 11"/>
+          <p:cNvPr id="14" name="Text 11"/>
           <p:cNvSpPr txBox="1"/>
           <p:nvPr/>
         </p:nvSpPr>
@@ -16980,7 +16980,7 @@
       </p:sp>
       <p:sp>
         <p:nvSpPr>
-          <p:cNvPr id="14" name="Text 12"/>
+          <p:cNvPr id="15" name="Text 12"/>
           <p:cNvSpPr txBox="1"/>
           <p:nvPr/>
         </p:nvSpPr>
@@ -17133,7 +17133,7 @@
       </p:sp>
       <p:sp>
         <p:nvSpPr>
-          <p:cNvPr id="3" name="Shape 1"/>
+          <p:cNvPr id="4" name="Shape 1"/>
           <p:cNvSpPr/>
           <p:nvPr/>
         </p:nvSpPr>
@@ -17160,7 +17160,7 @@
       </p:sp>
       <p:sp>
         <p:nvSpPr>
-          <p:cNvPr id="4" name="Text 2"/>
+          <p:cNvPr id="5" name="Text 2"/>
           <p:cNvSpPr txBox="1"/>
           <p:nvPr/>
         </p:nvSpPr>
@@ -17199,7 +17199,7 @@
       </p:sp>
       <p:sp>
         <p:nvSpPr>
-          <p:cNvPr id="5" name="Text 3"/>
+          <p:cNvPr id="6" name="Text 3"/>
           <p:cNvSpPr txBox="1"/>
           <p:nvPr/>
         </p:nvSpPr>
@@ -17238,7 +17238,7 @@
       </p:sp>
       <p:sp>
         <p:nvSpPr>
-          <p:cNvPr id="6" name="Shape 4"/>
+          <p:cNvPr id="7" name="Shape 4"/>
           <p:cNvSpPr/>
           <p:nvPr/>
         </p:nvSpPr>
@@ -17265,7 +17265,7 @@
       </p:sp>
       <p:sp>
         <p:nvSpPr>
-          <p:cNvPr id="7" name="Text 5"/>
+          <p:cNvPr id="8" name="Text 5"/>
           <p:cNvSpPr txBox="1"/>
           <p:nvPr/>
         </p:nvSpPr>
@@ -17304,7 +17304,7 @@
       </p:sp>
       <p:sp>
         <p:nvSpPr>
-          <p:cNvPr id="8" name="Text 6"/>
+          <p:cNvPr id="9" name="Text 6"/>
           <p:cNvSpPr txBox="1"/>
           <p:nvPr/>
         </p:nvSpPr>
@@ -17343,7 +17343,7 @@
       </p:sp>
       <p:sp>
         <p:nvSpPr>
-          <p:cNvPr id="9" name="Shape 7"/>
+          <p:cNvPr id="10" name="Shape 7"/>
           <p:cNvSpPr/>
           <p:nvPr/>
         </p:nvSpPr>
@@ -17370,7 +17370,7 @@
       </p:sp>
       <p:sp>
         <p:nvSpPr>
-          <p:cNvPr id="10" name="Text 8"/>
+          <p:cNvPr id="11" name="Text 8"/>
           <p:cNvSpPr txBox="1"/>
           <p:nvPr/>
         </p:nvSpPr>
@@ -17409,7 +17409,7 @@
       </p:sp>
       <p:sp>
         <p:nvSpPr>
-          <p:cNvPr id="11" name="Text 9"/>
+          <p:cNvPr id="12" name="Text 9"/>
           <p:cNvSpPr txBox="1"/>
           <p:nvPr/>
         </p:nvSpPr>
@@ -17448,7 +17448,7 @@
       </p:sp>
       <p:sp>
         <p:nvSpPr>
-          <p:cNvPr id="12" name="Shape 10"/>
+          <p:cNvPr id="13" name="Shape 10"/>
           <p:cNvSpPr/>
           <p:nvPr/>
         </p:nvSpPr>
@@ -17475,7 +17475,7 @@
       </p:sp>
       <p:sp>
         <p:nvSpPr>
-          <p:cNvPr id="13" name="Text 11"/>
+          <p:cNvPr id="14" name="Text 11"/>
           <p:cNvSpPr txBox="1"/>
           <p:nvPr/>
         </p:nvSpPr>
@@ -17514,7 +17514,7 @@
       </p:sp>
       <p:sp>
         <p:nvSpPr>
-          <p:cNvPr id="14" name="Text 12"/>
+          <p:cNvPr id="15" name="Text 12"/>
           <p:cNvSpPr txBox="1"/>
           <p:nvPr/>
         </p:nvSpPr>
@@ -17553,7 +17553,7 @@
       </p:sp>
       <p:sp>
         <p:nvSpPr>
-          <p:cNvPr id="15" name="Text 13"/>
+          <p:cNvPr id="16" name="Text 13"/>
           <p:cNvSpPr txBox="1"/>
           <p:nvPr/>
         </p:nvSpPr>
@@ -17706,7 +17706,7 @@
       </p:sp>
       <p:sp>
         <p:nvSpPr>
-          <p:cNvPr id="3" name="Shape 1"/>
+          <p:cNvPr id="4" name="Shape 1"/>
           <p:cNvSpPr/>
           <p:nvPr/>
         </p:nvSpPr>
@@ -17733,7 +17733,7 @@
       </p:sp>
       <p:sp>
         <p:nvSpPr>
-          <p:cNvPr id="4" name="Shape 2"/>
+          <p:cNvPr id="5" name="Shape 2"/>
           <p:cNvSpPr/>
           <p:nvPr/>
         </p:nvSpPr>
@@ -17758,7 +17758,7 @@
       </p:sp>
       <p:sp>
         <p:nvSpPr>
-          <p:cNvPr id="5" name="Text 3"/>
+          <p:cNvPr id="6" name="Text 3"/>
           <p:cNvSpPr txBox="1"/>
           <p:nvPr/>
         </p:nvSpPr>
@@ -17797,7 +17797,7 @@
       </p:sp>
       <p:sp>
         <p:nvSpPr>
-          <p:cNvPr id="6" name="Text 4"/>
+          <p:cNvPr id="7" name="Text 4"/>
           <p:cNvSpPr txBox="1"/>
           <p:nvPr/>
         </p:nvSpPr>
@@ -17836,7 +17836,7 @@
       </p:sp>
       <p:sp>
         <p:nvSpPr>
-          <p:cNvPr id="7" name="Text 5"/>
+          <p:cNvPr id="8" name="Text 5"/>
           <p:cNvSpPr txBox="1"/>
           <p:nvPr/>
         </p:nvSpPr>
@@ -17875,7 +17875,7 @@
       </p:sp>
       <p:sp>
         <p:nvSpPr>
-          <p:cNvPr id="8" name="Shape 6"/>
+          <p:cNvPr id="9" name="Shape 6"/>
           <p:cNvSpPr/>
           <p:nvPr/>
         </p:nvSpPr>
@@ -17902,7 +17902,7 @@
       </p:sp>
       <p:sp>
         <p:nvSpPr>
-          <p:cNvPr id="9" name="Shape 7"/>
+          <p:cNvPr id="10" name="Shape 7"/>
           <p:cNvSpPr/>
           <p:nvPr/>
         </p:nvSpPr>
@@ -17927,7 +17927,7 @@
       </p:sp>
       <p:sp>
         <p:nvSpPr>
-          <p:cNvPr id="10" name="Text 8"/>
+          <p:cNvPr id="11" name="Text 8"/>
           <p:cNvSpPr txBox="1"/>
           <p:nvPr/>
         </p:nvSpPr>
@@ -17966,7 +17966,7 @@
       </p:sp>
       <p:sp>
         <p:nvSpPr>
-          <p:cNvPr id="11" name="Text 9"/>
+          <p:cNvPr id="12" name="Text 9"/>
           <p:cNvSpPr txBox="1"/>
           <p:nvPr/>
         </p:nvSpPr>
@@ -18005,7 +18005,7 @@
       </p:sp>
       <p:sp>
         <p:nvSpPr>
-          <p:cNvPr id="12" name="Text 10"/>
+          <p:cNvPr id="13" name="Text 10"/>
           <p:cNvSpPr txBox="1"/>
           <p:nvPr/>
         </p:nvSpPr>
@@ -18044,7 +18044,7 @@
       </p:sp>
       <p:sp>
         <p:nvSpPr>
-          <p:cNvPr id="13" name="Shape 11"/>
+          <p:cNvPr id="14" name="Shape 11"/>
           <p:cNvSpPr/>
           <p:nvPr/>
         </p:nvSpPr>
@@ -18071,7 +18071,7 @@
       </p:sp>
       <p:sp>
         <p:nvSpPr>
-          <p:cNvPr id="14" name="Shape 12"/>
+          <p:cNvPr id="15" name="Shape 12"/>
           <p:cNvSpPr/>
           <p:nvPr/>
         </p:nvSpPr>
@@ -18096,7 +18096,7 @@
       </p:sp>
       <p:sp>
         <p:nvSpPr>
-          <p:cNvPr id="15" name="Text 13"/>
+          <p:cNvPr id="16" name="Text 13"/>
           <p:cNvSpPr txBox="1"/>
           <p:nvPr/>
         </p:nvSpPr>
@@ -18135,7 +18135,7 @@
       </p:sp>
       <p:sp>
         <p:nvSpPr>
-          <p:cNvPr id="16" name="Text 14"/>
+          <p:cNvPr id="17" name="Text 14"/>
           <p:cNvSpPr txBox="1"/>
           <p:nvPr/>
         </p:nvSpPr>
@@ -18174,7 +18174,7 @@
       </p:sp>
       <p:sp>
         <p:nvSpPr>
-          <p:cNvPr id="17" name="Text 15"/>
+          <p:cNvPr id="18" name="Text 15"/>
           <p:cNvSpPr txBox="1"/>
           <p:nvPr/>
         </p:nvSpPr>
@@ -18213,7 +18213,7 @@
       </p:sp>
       <p:sp>
         <p:nvSpPr>
-          <p:cNvPr id="18" name="Shape 16"/>
+          <p:cNvPr id="19" name="Shape 16"/>
           <p:cNvSpPr/>
           <p:nvPr/>
         </p:nvSpPr>
@@ -18240,7 +18240,7 @@
       </p:sp>
       <p:sp>
         <p:nvSpPr>
-          <p:cNvPr id="19" name="Shape 17"/>
+          <p:cNvPr id="20" name="Shape 17"/>
           <p:cNvSpPr/>
           <p:nvPr/>
         </p:nvSpPr>
@@ -18265,7 +18265,7 @@
       </p:sp>
       <p:sp>
         <p:nvSpPr>
-          <p:cNvPr id="20" name="Text 18"/>
+          <p:cNvPr id="21" name="Text 18"/>
           <p:cNvSpPr txBox="1"/>
           <p:nvPr/>
         </p:nvSpPr>
@@ -18304,7 +18304,7 @@
       </p:sp>
       <p:sp>
         <p:nvSpPr>
-          <p:cNvPr id="21" name="Text 19"/>
+          <p:cNvPr id="22" name="Text 19"/>
           <p:cNvSpPr txBox="1"/>
           <p:nvPr/>
         </p:nvSpPr>
@@ -18343,7 +18343,7 @@
       </p:sp>
       <p:sp>
         <p:nvSpPr>
-          <p:cNvPr id="22" name="Text 20"/>
+          <p:cNvPr id="23" name="Text 20"/>
           <p:cNvSpPr txBox="1"/>
           <p:nvPr/>
         </p:nvSpPr>
@@ -18496,7 +18496,7 @@
       </p:sp>
       <p:sp>
         <p:nvSpPr>
-          <p:cNvPr id="3" name="Shape 1"/>
+          <p:cNvPr id="4" name="Shape 1"/>
           <p:cNvSpPr/>
           <p:nvPr/>
         </p:nvSpPr>
@@ -18523,7 +18523,7 @@
       </p:sp>
       <p:sp>
         <p:nvSpPr>
-          <p:cNvPr id="4" name="Text 2"/>
+          <p:cNvPr id="5" name="Text 2"/>
           <p:cNvSpPr txBox="1"/>
           <p:nvPr/>
         </p:nvSpPr>
@@ -18562,7 +18562,7 @@
       </p:sp>
       <p:sp>
         <p:nvSpPr>
-          <p:cNvPr id="5" name="Text 3"/>
+          <p:cNvPr id="6" name="Text 3"/>
           <p:cNvSpPr txBox="1"/>
           <p:nvPr/>
         </p:nvSpPr>
@@ -18601,7 +18601,7 @@
       </p:sp>
       <p:sp>
         <p:nvSpPr>
-          <p:cNvPr id="6" name="Shape 4"/>
+          <p:cNvPr id="7" name="Shape 4"/>
           <p:cNvSpPr/>
           <p:nvPr/>
         </p:nvSpPr>
@@ -18628,7 +18628,7 @@
       </p:sp>
       <p:sp>
         <p:nvSpPr>
-          <p:cNvPr id="7" name="Text 5"/>
+          <p:cNvPr id="8" name="Text 5"/>
           <p:cNvSpPr txBox="1"/>
           <p:nvPr/>
         </p:nvSpPr>
@@ -18667,7 +18667,7 @@
       </p:sp>
       <p:sp>
         <p:nvSpPr>
-          <p:cNvPr id="8" name="Text 6"/>
+          <p:cNvPr id="9" name="Text 6"/>
           <p:cNvSpPr txBox="1"/>
           <p:nvPr/>
         </p:nvSpPr>
@@ -18706,7 +18706,7 @@
       </p:sp>
       <p:sp>
         <p:nvSpPr>
-          <p:cNvPr id="9" name="Shape 7"/>
+          <p:cNvPr id="10" name="Shape 7"/>
           <p:cNvSpPr/>
           <p:nvPr/>
         </p:nvSpPr>
@@ -18733,7 +18733,7 @@
       </p:sp>
       <p:sp>
         <p:nvSpPr>
-          <p:cNvPr id="10" name="Text 8"/>
+          <p:cNvPr id="11" name="Text 8"/>
           <p:cNvSpPr txBox="1"/>
           <p:nvPr/>
         </p:nvSpPr>
@@ -18772,7 +18772,7 @@
       </p:sp>
       <p:sp>
         <p:nvSpPr>
-          <p:cNvPr id="11" name="Text 9"/>
+          <p:cNvPr id="12" name="Text 9"/>
           <p:cNvSpPr txBox="1"/>
           <p:nvPr/>
         </p:nvSpPr>
@@ -18891,7 +18891,7 @@
       </p:grpSpPr>
       <p:sp>
         <p:nvSpPr>
-          <p:cNvPr id="2" name="Text 0"/>
+          <p:cNvPr id="3" name="Text 0"/>
           <p:cNvSpPr txBox="1"/>
           <p:nvPr/>
         </p:nvSpPr>
@@ -18930,7 +18930,7 @@
       </p:sp>
       <p:sp>
         <p:nvSpPr>
-          <p:cNvPr id="3" name="Text 1"/>
+          <p:cNvPr id="4" name="Text 1"/>
           <p:cNvSpPr txBox="1"/>
           <p:nvPr/>
         </p:nvSpPr>
@@ -18969,7 +18969,7 @@
       </p:sp>
       <p:sp>
         <p:nvSpPr>
-          <p:cNvPr id="4" name="Shape 2"/>
+          <p:cNvPr id="5" name="Shape 2"/>
           <p:cNvSpPr/>
           <p:nvPr/>
         </p:nvSpPr>
@@ -18996,7 +18996,7 @@
       </p:sp>
       <p:sp>
         <p:nvSpPr>
-          <p:cNvPr id="5" name="Text 3"/>
+          <p:cNvPr id="6" name="Text 3"/>
           <p:cNvSpPr txBox="1"/>
           <p:nvPr/>
         </p:nvSpPr>
@@ -19101,7 +19101,7 @@
       </p:sp>
       <p:sp>
         <p:nvSpPr>
-          <p:cNvPr id="3" name="Shape 1"/>
+          <p:cNvPr id="4" name="Shape 1"/>
           <p:cNvSpPr/>
           <p:nvPr/>
         </p:nvSpPr>
@@ -19128,7 +19128,7 @@
       </p:sp>
       <p:sp>
         <p:nvSpPr>
-          <p:cNvPr id="4" name="Text 2"/>
+          <p:cNvPr id="5" name="Text 2"/>
           <p:cNvSpPr txBox="1"/>
           <p:nvPr/>
         </p:nvSpPr>
@@ -19167,7 +19167,7 @@
       </p:sp>
       <p:sp>
         <p:nvSpPr>
-          <p:cNvPr id="5" name="Text 3"/>
+          <p:cNvPr id="6" name="Text 3"/>
           <p:cNvSpPr txBox="1"/>
           <p:nvPr/>
         </p:nvSpPr>
@@ -19206,7 +19206,7 @@
       </p:sp>
       <p:sp>
         <p:nvSpPr>
-          <p:cNvPr id="6" name="Shape 4"/>
+          <p:cNvPr id="7" name="Shape 4"/>
           <p:cNvSpPr/>
           <p:nvPr/>
         </p:nvSpPr>
@@ -19233,7 +19233,7 @@
       </p:sp>
       <p:sp>
         <p:nvSpPr>
-          <p:cNvPr id="7" name="Text 5"/>
+          <p:cNvPr id="8" name="Text 5"/>
           <p:cNvSpPr txBox="1"/>
           <p:nvPr/>
         </p:nvSpPr>
@@ -19272,7 +19272,7 @@
       </p:sp>
       <p:sp>
         <p:nvSpPr>
-          <p:cNvPr id="8" name="Text 6"/>
+          <p:cNvPr id="9" name="Text 6"/>
           <p:cNvSpPr txBox="1"/>
           <p:nvPr/>
         </p:nvSpPr>
@@ -19425,7 +19425,7 @@
       </p:sp>
       <p:sp>
         <p:nvSpPr>
-          <p:cNvPr id="3" name="Shape 1"/>
+          <p:cNvPr id="4" name="Shape 1"/>
           <p:cNvSpPr/>
           <p:nvPr/>
         </p:nvSpPr>
@@ -19452,7 +19452,7 @@
       </p:sp>
       <p:sp>
         <p:nvSpPr>
-          <p:cNvPr id="4" name="Text 2"/>
+          <p:cNvPr id="5" name="Text 2"/>
           <p:cNvSpPr txBox="1"/>
           <p:nvPr/>
         </p:nvSpPr>
@@ -19491,7 +19491,7 @@
       </p:sp>
       <p:sp>
         <p:nvSpPr>
-          <p:cNvPr id="5" name="Shape 3"/>
+          <p:cNvPr id="6" name="Shape 3"/>
           <p:cNvSpPr/>
           <p:nvPr/>
         </p:nvSpPr>
@@ -19518,7 +19518,7 @@
       </p:sp>
       <p:sp>
         <p:nvSpPr>
-          <p:cNvPr id="6" name="Text 4"/>
+          <p:cNvPr id="7" name="Text 4"/>
           <p:cNvSpPr txBox="1"/>
           <p:nvPr/>
         </p:nvSpPr>
@@ -19557,7 +19557,7 @@
       </p:sp>
       <p:sp>
         <p:nvSpPr>
-          <p:cNvPr id="7" name="Shape 5"/>
+          <p:cNvPr id="8" name="Shape 5"/>
           <p:cNvSpPr/>
           <p:nvPr/>
         </p:nvSpPr>
@@ -19584,7 +19584,7 @@
       </p:sp>
       <p:sp>
         <p:nvSpPr>
-          <p:cNvPr id="8" name="Text 6"/>
+          <p:cNvPr id="9" name="Text 6"/>
           <p:cNvSpPr txBox="1"/>
           <p:nvPr/>
         </p:nvSpPr>
@@ -19623,7 +19623,7 @@
       </p:sp>
       <p:sp>
         <p:nvSpPr>
-          <p:cNvPr id="9" name="Shape 7"/>
+          <p:cNvPr id="10" name="Shape 7"/>
           <p:cNvSpPr/>
           <p:nvPr/>
         </p:nvSpPr>
@@ -19650,7 +19650,7 @@
       </p:sp>
       <p:sp>
         <p:nvSpPr>
-          <p:cNvPr id="10" name="Text 8"/>
+          <p:cNvPr id="11" name="Text 8"/>
           <p:cNvSpPr txBox="1"/>
           <p:nvPr/>
         </p:nvSpPr>
@@ -19803,7 +19803,7 @@
       </p:sp>
       <p:sp>
         <p:nvSpPr>
-          <p:cNvPr id="3" name="Shape 1"/>
+          <p:cNvPr id="4" name="Shape 1"/>
           <p:cNvSpPr/>
           <p:nvPr/>
         </p:nvSpPr>
@@ -19830,7 +19830,7 @@
       </p:sp>
       <p:sp>
         <p:nvSpPr>
-          <p:cNvPr id="4" name="Text 2"/>
+          <p:cNvPr id="5" name="Text 2"/>
           <p:cNvSpPr txBox="1"/>
           <p:nvPr/>
         </p:nvSpPr>
@@ -19869,7 +19869,7 @@
       </p:sp>
       <p:sp>
         <p:nvSpPr>
-          <p:cNvPr id="5" name="Text 3"/>
+          <p:cNvPr id="6" name="Text 3"/>
           <p:cNvSpPr txBox="1"/>
           <p:nvPr/>
         </p:nvSpPr>
@@ -19908,7 +19908,7 @@
       </p:sp>
       <p:sp>
         <p:nvSpPr>
-          <p:cNvPr id="6" name="Text 4"/>
+          <p:cNvPr id="7" name="Text 4"/>
           <p:cNvSpPr txBox="1"/>
           <p:nvPr/>
         </p:nvSpPr>
@@ -19947,7 +19947,7 @@
       </p:sp>
       <p:sp>
         <p:nvSpPr>
-          <p:cNvPr id="7" name="Text 5"/>
+          <p:cNvPr id="8" name="Text 5"/>
           <p:cNvSpPr txBox="1"/>
           <p:nvPr/>
         </p:nvSpPr>
@@ -19986,7 +19986,7 @@
       </p:sp>
       <p:sp>
         <p:nvSpPr>
-          <p:cNvPr id="8" name="Shape 6"/>
+          <p:cNvPr id="9" name="Shape 6"/>
           <p:cNvSpPr/>
           <p:nvPr/>
         </p:nvSpPr>
@@ -20013,7 +20013,7 @@
       </p:sp>
       <p:sp>
         <p:nvSpPr>
-          <p:cNvPr id="9" name="Text 7"/>
+          <p:cNvPr id="10" name="Text 7"/>
           <p:cNvSpPr txBox="1"/>
           <p:nvPr/>
         </p:nvSpPr>
@@ -20052,7 +20052,7 @@
       </p:sp>
       <p:sp>
         <p:nvSpPr>
-          <p:cNvPr id="10" name="Text 8"/>
+          <p:cNvPr id="11" name="Text 8"/>
           <p:cNvSpPr txBox="1"/>
           <p:nvPr/>
         </p:nvSpPr>
@@ -20091,7 +20091,7 @@
       </p:sp>
       <p:sp>
         <p:nvSpPr>
-          <p:cNvPr id="11" name="Text 9"/>
+          <p:cNvPr id="12" name="Text 9"/>
           <p:cNvSpPr txBox="1"/>
           <p:nvPr/>
         </p:nvSpPr>
@@ -20130,7 +20130,7 @@
       </p:sp>
       <p:sp>
         <p:nvSpPr>
-          <p:cNvPr id="12" name="Text 10"/>
+          <p:cNvPr id="13" name="Text 10"/>
           <p:cNvSpPr txBox="1"/>
           <p:nvPr/>
         </p:nvSpPr>
@@ -20169,7 +20169,7 @@
       </p:sp>
       <p:sp>
         <p:nvSpPr>
-          <p:cNvPr id="13" name="Shape 11"/>
+          <p:cNvPr id="14" name="Shape 11"/>
           <p:cNvSpPr/>
           <p:nvPr/>
         </p:nvSpPr>
@@ -20196,7 +20196,7 @@
       </p:sp>
       <p:sp>
         <p:nvSpPr>
-          <p:cNvPr id="14" name="Text 12"/>
+          <p:cNvPr id="15" name="Text 12"/>
           <p:cNvSpPr txBox="1"/>
           <p:nvPr/>
         </p:nvSpPr>
@@ -20235,7 +20235,7 @@
       </p:sp>
       <p:sp>
         <p:nvSpPr>
-          <p:cNvPr id="15" name="Text 13"/>
+          <p:cNvPr id="16" name="Text 13"/>
           <p:cNvSpPr txBox="1"/>
           <p:nvPr/>
         </p:nvSpPr>
@@ -20274,7 +20274,7 @@
       </p:sp>
       <p:sp>
         <p:nvSpPr>
-          <p:cNvPr id="16" name="Text 14"/>
+          <p:cNvPr id="17" name="Text 14"/>
           <p:cNvSpPr txBox="1"/>
           <p:nvPr/>
         </p:nvSpPr>
@@ -20313,7 +20313,7 @@
       </p:sp>
       <p:sp>
         <p:nvSpPr>
-          <p:cNvPr id="17" name="Text 15"/>
+          <p:cNvPr id="18" name="Text 15"/>
           <p:cNvSpPr txBox="1"/>
           <p:nvPr/>
         </p:nvSpPr>
@@ -20352,7 +20352,7 @@
       </p:sp>
       <p:sp>
         <p:nvSpPr>
-          <p:cNvPr id="18" name="Shape 16"/>
+          <p:cNvPr id="19" name="Shape 16"/>
           <p:cNvSpPr/>
           <p:nvPr/>
         </p:nvSpPr>
@@ -20379,7 +20379,7 @@
       </p:sp>
       <p:sp>
         <p:nvSpPr>
-          <p:cNvPr id="19" name="Text 17"/>
+          <p:cNvPr id="20" name="Text 17"/>
           <p:cNvSpPr txBox="1"/>
           <p:nvPr/>
         </p:nvSpPr>
@@ -20418,7 +20418,7 @@
       </p:sp>
       <p:sp>
         <p:nvSpPr>
-          <p:cNvPr id="20" name="Text 18"/>
+          <p:cNvPr id="21" name="Text 18"/>
           <p:cNvSpPr txBox="1"/>
           <p:nvPr/>
         </p:nvSpPr>
@@ -20457,7 +20457,7 @@
       </p:sp>
       <p:sp>
         <p:nvSpPr>
-          <p:cNvPr id="21" name="Text 19"/>
+          <p:cNvPr id="22" name="Text 19"/>
           <p:cNvSpPr txBox="1"/>
           <p:nvPr/>
         </p:nvSpPr>
@@ -20496,7 +20496,7 @@
       </p:sp>
       <p:sp>
         <p:nvSpPr>
-          <p:cNvPr id="22" name="Text 20"/>
+          <p:cNvPr id="23" name="Text 20"/>
           <p:cNvSpPr txBox="1"/>
           <p:nvPr/>
         </p:nvSpPr>
@@ -20649,7 +20649,7 @@
       </p:sp>
       <p:sp>
         <p:nvSpPr>
-          <p:cNvPr id="3" name="Text 1"/>
+          <p:cNvPr id="4" name="Text 1"/>
           <p:cNvSpPr txBox="1"/>
           <p:nvPr/>
         </p:nvSpPr>
@@ -20688,7 +20688,7 @@
       </p:sp>
       <p:sp>
         <p:nvSpPr>
-          <p:cNvPr id="4" name="Text 2"/>
+          <p:cNvPr id="5" name="Text 2"/>
           <p:cNvSpPr txBox="1"/>
           <p:nvPr/>
         </p:nvSpPr>
@@ -20815,7 +20815,7 @@
       </p:sp>
       <p:sp>
         <p:nvSpPr>
-          <p:cNvPr id="5" name="Shape 3"/>
+          <p:cNvPr id="6" name="Shape 3"/>
           <p:cNvSpPr/>
           <p:nvPr/>
         </p:nvSpPr>
@@ -20842,7 +20842,7 @@
       </p:sp>
       <p:sp>
         <p:nvSpPr>
-          <p:cNvPr id="6" name="Text 4"/>
+          <p:cNvPr id="7" name="Text 4"/>
           <p:cNvSpPr txBox="1"/>
           <p:nvPr/>
         </p:nvSpPr>
@@ -20881,7 +20881,7 @@
       </p:sp>
       <p:sp>
         <p:nvSpPr>
-          <p:cNvPr id="7" name="Text 5"/>
+          <p:cNvPr id="8" name="Text 5"/>
           <p:cNvSpPr txBox="1"/>
           <p:nvPr/>
         </p:nvSpPr>
@@ -21034,7 +21034,7 @@
       </p:sp>
       <p:sp>
         <p:nvSpPr>
-          <p:cNvPr id="3" name="Text 1"/>
+          <p:cNvPr id="4" name="Text 1"/>
           <p:cNvSpPr txBox="1"/>
           <p:nvPr/>
         </p:nvSpPr>
@@ -21073,7 +21073,7 @@
       </p:sp>
       <p:sp>
         <p:nvSpPr>
-          <p:cNvPr id="4" name="Text 2"/>
+          <p:cNvPr id="5" name="Text 2"/>
           <p:cNvSpPr txBox="1"/>
           <p:nvPr/>
         </p:nvSpPr>
@@ -21200,7 +21200,7 @@
       </p:sp>
       <p:sp>
         <p:nvSpPr>
-          <p:cNvPr id="5" name="Shape 3"/>
+          <p:cNvPr id="6" name="Shape 3"/>
           <p:cNvSpPr/>
           <p:nvPr/>
         </p:nvSpPr>
@@ -21227,7 +21227,7 @@
       </p:sp>
       <p:sp>
         <p:nvSpPr>
-          <p:cNvPr id="6" name="Text 4"/>
+          <p:cNvPr id="7" name="Text 4"/>
           <p:cNvSpPr txBox="1"/>
           <p:nvPr/>
         </p:nvSpPr>
@@ -21380,7 +21380,7 @@
       </p:sp>
       <p:sp>
         <p:nvSpPr>
-          <p:cNvPr id="3" name="Shape 1"/>
+          <p:cNvPr id="4" name="Shape 1"/>
           <p:cNvSpPr/>
           <p:nvPr/>
         </p:nvSpPr>
@@ -21407,7 +21407,7 @@
       </p:sp>
       <p:sp>
         <p:nvSpPr>
-          <p:cNvPr id="4" name="Text 2"/>
+          <p:cNvPr id="5" name="Text 2"/>
           <p:cNvSpPr txBox="1"/>
           <p:nvPr/>
         </p:nvSpPr>
@@ -21446,7 +21446,7 @@
       </p:sp>
       <p:sp>
         <p:nvSpPr>
-          <p:cNvPr id="5" name="Text 3"/>
+          <p:cNvPr id="6" name="Text 3"/>
           <p:cNvSpPr txBox="1"/>
           <p:nvPr/>
         </p:nvSpPr>
@@ -21552,7 +21552,7 @@
       </p:sp>
       <p:sp>
         <p:nvSpPr>
-          <p:cNvPr id="6" name="Text 4"/>
+          <p:cNvPr id="7" name="Text 4"/>
           <p:cNvSpPr txBox="1"/>
           <p:nvPr/>
         </p:nvSpPr>
@@ -21591,7 +21591,7 @@
       </p:sp>
       <p:sp>
         <p:nvSpPr>
-          <p:cNvPr id="7" name="Text 5"/>
+          <p:cNvPr id="8" name="Text 5"/>
           <p:cNvSpPr txBox="1"/>
           <p:nvPr/>
         </p:nvSpPr>
@@ -21744,7 +21744,7 @@
       </p:sp>
       <p:sp>
         <p:nvSpPr>
-          <p:cNvPr id="3" name="Shape 1"/>
+          <p:cNvPr id="4" name="Shape 1"/>
           <p:cNvSpPr/>
           <p:nvPr/>
         </p:nvSpPr>
@@ -21771,7 +21771,7 @@
       </p:sp>
       <p:sp>
         <p:nvSpPr>
-          <p:cNvPr id="4" name="Text 2"/>
+          <p:cNvPr id="5" name="Text 2"/>
           <p:cNvSpPr txBox="1"/>
           <p:nvPr/>
         </p:nvSpPr>
@@ -21810,7 +21810,7 @@
       </p:sp>
       <p:sp>
         <p:nvSpPr>
-          <p:cNvPr id="5" name="Text 3"/>
+          <p:cNvPr id="6" name="Text 3"/>
           <p:cNvSpPr txBox="1"/>
           <p:nvPr/>
         </p:nvSpPr>
@@ -21849,7 +21849,7 @@
       </p:sp>
       <p:sp>
         <p:nvSpPr>
-          <p:cNvPr id="6" name="Text 4"/>
+          <p:cNvPr id="7" name="Text 4"/>
           <p:cNvSpPr txBox="1"/>
           <p:nvPr/>
         </p:nvSpPr>
@@ -21888,7 +21888,7 @@
       </p:sp>
       <p:sp>
         <p:nvSpPr>
-          <p:cNvPr id="7" name="Shape 5"/>
+          <p:cNvPr id="8" name="Shape 5"/>
           <p:cNvSpPr/>
           <p:nvPr/>
         </p:nvSpPr>
@@ -21915,7 +21915,7 @@
       </p:sp>
       <p:sp>
         <p:nvSpPr>
-          <p:cNvPr id="8" name="Text 6"/>
+          <p:cNvPr id="9" name="Text 6"/>
           <p:cNvSpPr txBox="1"/>
           <p:nvPr/>
         </p:nvSpPr>
@@ -21954,7 +21954,7 @@
       </p:sp>
       <p:sp>
         <p:nvSpPr>
-          <p:cNvPr id="9" name="Text 7"/>
+          <p:cNvPr id="10" name="Text 7"/>
           <p:cNvSpPr txBox="1"/>
           <p:nvPr/>
         </p:nvSpPr>
@@ -21993,7 +21993,7 @@
       </p:sp>
       <p:sp>
         <p:nvSpPr>
-          <p:cNvPr id="10" name="Text 8"/>
+          <p:cNvPr id="11" name="Text 8"/>
           <p:cNvSpPr txBox="1"/>
           <p:nvPr/>
         </p:nvSpPr>
@@ -22032,7 +22032,7 @@
       </p:sp>
       <p:sp>
         <p:nvSpPr>
-          <p:cNvPr id="11" name="Shape 9"/>
+          <p:cNvPr id="12" name="Shape 9"/>
           <p:cNvSpPr/>
           <p:nvPr/>
         </p:nvSpPr>
@@ -22059,7 +22059,7 @@
       </p:sp>
       <p:sp>
         <p:nvSpPr>
-          <p:cNvPr id="12" name="Text 10"/>
+          <p:cNvPr id="13" name="Text 10"/>
           <p:cNvSpPr txBox="1"/>
           <p:nvPr/>
         </p:nvSpPr>
@@ -22098,7 +22098,7 @@
       </p:sp>
       <p:sp>
         <p:nvSpPr>
-          <p:cNvPr id="13" name="Text 11"/>
+          <p:cNvPr id="14" name="Text 11"/>
           <p:cNvSpPr txBox="1"/>
           <p:nvPr/>
         </p:nvSpPr>
@@ -22137,7 +22137,7 @@
       </p:sp>
       <p:sp>
         <p:nvSpPr>
-          <p:cNvPr id="14" name="Text 12"/>
+          <p:cNvPr id="15" name="Text 12"/>
           <p:cNvSpPr txBox="1"/>
           <p:nvPr/>
         </p:nvSpPr>
@@ -22176,7 +22176,7 @@
       </p:sp>
       <p:sp>
         <p:nvSpPr>
-          <p:cNvPr id="15" name="Shape 13"/>
+          <p:cNvPr id="16" name="Shape 13"/>
           <p:cNvSpPr/>
           <p:nvPr/>
         </p:nvSpPr>
@@ -22203,7 +22203,7 @@
       </p:sp>
       <p:sp>
         <p:nvSpPr>
-          <p:cNvPr id="16" name="Text 14"/>
+          <p:cNvPr id="17" name="Text 14"/>
           <p:cNvSpPr txBox="1"/>
           <p:nvPr/>
         </p:nvSpPr>
@@ -22242,7 +22242,7 @@
       </p:sp>
       <p:sp>
         <p:nvSpPr>
-          <p:cNvPr id="17" name="Text 15"/>
+          <p:cNvPr id="18" name="Text 15"/>
           <p:cNvSpPr txBox="1"/>
           <p:nvPr/>
         </p:nvSpPr>
@@ -22281,7 +22281,7 @@
       </p:sp>
       <p:sp>
         <p:nvSpPr>
-          <p:cNvPr id="18" name="Text 16"/>
+          <p:cNvPr id="19" name="Text 16"/>
           <p:cNvSpPr txBox="1"/>
           <p:nvPr/>
         </p:nvSpPr>
@@ -22320,7 +22320,7 @@
       </p:sp>
       <p:sp>
         <p:nvSpPr>
-          <p:cNvPr id="19" name="Shape 17"/>
+          <p:cNvPr id="20" name="Shape 17"/>
           <p:cNvSpPr/>
           <p:nvPr/>
         </p:nvSpPr>
@@ -22347,7 +22347,7 @@
       </p:sp>
       <p:sp>
         <p:nvSpPr>
-          <p:cNvPr id="20" name="Text 18"/>
+          <p:cNvPr id="21" name="Text 18"/>
           <p:cNvSpPr txBox="1"/>
           <p:nvPr/>
         </p:nvSpPr>
@@ -22386,7 +22386,7 @@
       </p:sp>
       <p:sp>
         <p:nvSpPr>
-          <p:cNvPr id="21" name="Text 19"/>
+          <p:cNvPr id="22" name="Text 19"/>
           <p:cNvSpPr txBox="1"/>
           <p:nvPr/>
         </p:nvSpPr>
@@ -22425,7 +22425,7 @@
       </p:sp>
       <p:sp>
         <p:nvSpPr>
-          <p:cNvPr id="22" name="Text 20"/>
+          <p:cNvPr id="23" name="Text 20"/>
           <p:cNvSpPr txBox="1"/>
           <p:nvPr/>
         </p:nvSpPr>
@@ -22464,7 +22464,7 @@
       </p:sp>
       <p:sp>
         <p:nvSpPr>
-          <p:cNvPr id="23" name="Text 21"/>
+          <p:cNvPr id="24" name="Text 21"/>
           <p:cNvSpPr txBox="1"/>
           <p:nvPr/>
         </p:nvSpPr>
@@ -22617,7 +22617,7 @@
       </p:sp>
       <p:sp>
         <p:nvSpPr>
-          <p:cNvPr id="3" name="Shape 1"/>
+          <p:cNvPr id="4" name="Shape 1"/>
           <p:cNvSpPr/>
           <p:nvPr/>
         </p:nvSpPr>
@@ -22644,7 +22644,7 @@
       </p:sp>
       <p:sp>
         <p:nvSpPr>
-          <p:cNvPr id="4" name="Text 2"/>
+          <p:cNvPr id="5" name="Text 2"/>
           <p:cNvSpPr txBox="1"/>
           <p:nvPr/>
         </p:nvSpPr>
@@ -22683,7 +22683,7 @@
       </p:sp>
       <p:sp>
         <p:nvSpPr>
-          <p:cNvPr id="5" name="Text 3"/>
+          <p:cNvPr id="6" name="Text 3"/>
           <p:cNvSpPr txBox="1"/>
           <p:nvPr/>
         </p:nvSpPr>
@@ -22722,7 +22722,7 @@
       </p:sp>
       <p:sp>
         <p:nvSpPr>
-          <p:cNvPr id="6" name="Text 4"/>
+          <p:cNvPr id="7" name="Text 4"/>
           <p:cNvSpPr txBox="1"/>
           <p:nvPr/>
         </p:nvSpPr>
@@ -22761,7 +22761,7 @@
       </p:sp>
       <p:sp>
         <p:nvSpPr>
-          <p:cNvPr id="7" name="Shape 5"/>
+          <p:cNvPr id="8" name="Shape 5"/>
           <p:cNvSpPr/>
           <p:nvPr/>
         </p:nvSpPr>
@@ -22788,7 +22788,7 @@
       </p:sp>
       <p:sp>
         <p:nvSpPr>
-          <p:cNvPr id="8" name="Text 6"/>
+          <p:cNvPr id="9" name="Text 6"/>
           <p:cNvSpPr txBox="1"/>
           <p:nvPr/>
         </p:nvSpPr>
@@ -22827,7 +22827,7 @@
       </p:sp>
       <p:sp>
         <p:nvSpPr>
-          <p:cNvPr id="9" name="Text 7"/>
+          <p:cNvPr id="10" name="Text 7"/>
           <p:cNvSpPr txBox="1"/>
           <p:nvPr/>
         </p:nvSpPr>
@@ -22866,7 +22866,7 @@
       </p:sp>
       <p:sp>
         <p:nvSpPr>
-          <p:cNvPr id="10" name="Text 8"/>
+          <p:cNvPr id="11" name="Text 8"/>
           <p:cNvSpPr txBox="1"/>
           <p:nvPr/>
         </p:nvSpPr>
@@ -22905,7 +22905,7 @@
       </p:sp>
       <p:sp>
         <p:nvSpPr>
-          <p:cNvPr id="11" name="Shape 9"/>
+          <p:cNvPr id="12" name="Shape 9"/>
           <p:cNvSpPr/>
           <p:nvPr/>
         </p:nvSpPr>
@@ -22932,7 +22932,7 @@
       </p:sp>
       <p:sp>
         <p:nvSpPr>
-          <p:cNvPr id="12" name="Text 10"/>
+          <p:cNvPr id="13" name="Text 10"/>
           <p:cNvSpPr txBox="1"/>
           <p:nvPr/>
         </p:nvSpPr>
@@ -22971,7 +22971,7 @@
       </p:sp>
       <p:sp>
         <p:nvSpPr>
-          <p:cNvPr id="13" name="Text 11"/>
+          <p:cNvPr id="14" name="Text 11"/>
           <p:cNvSpPr txBox="1"/>
           <p:nvPr/>
         </p:nvSpPr>
@@ -23010,7 +23010,7 @@
       </p:sp>
       <p:sp>
         <p:nvSpPr>
-          <p:cNvPr id="14" name="Text 12"/>
+          <p:cNvPr id="15" name="Text 12"/>
           <p:cNvSpPr txBox="1"/>
           <p:nvPr/>
         </p:nvSpPr>
@@ -23122,7 +23122,7 @@
       </p:grpSpPr>
       <p:sp>
         <p:nvSpPr>
-          <p:cNvPr id="2" name="Text 0"/>
+          <p:cNvPr id="3" name="Text 0"/>
           <p:cNvSpPr txBox="1"/>
           <p:nvPr/>
         </p:nvSpPr>
@@ -23161,7 +23161,7 @@
       </p:sp>
       <p:sp>
         <p:nvSpPr>
-          <p:cNvPr id="3" name="Text 1"/>
+          <p:cNvPr id="4" name="Text 1"/>
           <p:cNvSpPr txBox="1"/>
           <p:nvPr/>
         </p:nvSpPr>
@@ -23266,7 +23266,7 @@
       </p:sp>
       <p:sp>
         <p:nvSpPr>
-          <p:cNvPr id="3" name="Shape 1"/>
+          <p:cNvPr id="4" name="Shape 1"/>
           <p:cNvSpPr/>
           <p:nvPr/>
         </p:nvSpPr>
@@ -23291,7 +23291,7 @@
       </p:sp>
       <p:sp>
         <p:nvSpPr>
-          <p:cNvPr id="4" name="Text 2"/>
+          <p:cNvPr id="5" name="Text 2"/>
           <p:cNvSpPr txBox="1"/>
           <p:nvPr/>
         </p:nvSpPr>
@@ -23330,7 +23330,7 @@
       </p:sp>
       <p:sp>
         <p:nvSpPr>
-          <p:cNvPr id="5" name="Text 3"/>
+          <p:cNvPr id="6" name="Text 3"/>
           <p:cNvSpPr txBox="1"/>
           <p:nvPr/>
         </p:nvSpPr>
@@ -23397,7 +23397,7 @@
       </p:sp>
       <p:sp>
         <p:nvSpPr>
-          <p:cNvPr id="6" name="Shape 4"/>
+          <p:cNvPr id="7" name="Shape 4"/>
           <p:cNvSpPr/>
           <p:nvPr/>
         </p:nvSpPr>
@@ -23422,7 +23422,7 @@
       </p:sp>
       <p:sp>
         <p:nvSpPr>
-          <p:cNvPr id="7" name="Text 5"/>
+          <p:cNvPr id="8" name="Text 5"/>
           <p:cNvSpPr txBox="1"/>
           <p:nvPr/>
         </p:nvSpPr>
@@ -23461,7 +23461,7 @@
       </p:sp>
       <p:sp>
         <p:nvSpPr>
-          <p:cNvPr id="8" name="Text 6"/>
+          <p:cNvPr id="9" name="Text 6"/>
           <p:cNvSpPr txBox="1"/>
           <p:nvPr/>
         </p:nvSpPr>
@@ -23514,7 +23514,7 @@
       </p:sp>
       <p:sp>
         <p:nvSpPr>
-          <p:cNvPr id="9" name="Shape 7"/>
+          <p:cNvPr id="10" name="Shape 7"/>
           <p:cNvSpPr/>
           <p:nvPr/>
         </p:nvSpPr>
@@ -23539,7 +23539,7 @@
       </p:sp>
       <p:sp>
         <p:nvSpPr>
-          <p:cNvPr id="10" name="Text 8"/>
+          <p:cNvPr id="11" name="Text 8"/>
           <p:cNvSpPr txBox="1"/>
           <p:nvPr/>
         </p:nvSpPr>
@@ -23578,7 +23578,7 @@
       </p:sp>
       <p:sp>
         <p:nvSpPr>
-          <p:cNvPr id="11" name="Text 9"/>
+          <p:cNvPr id="12" name="Text 9"/>
           <p:cNvSpPr txBox="1"/>
           <p:nvPr/>
         </p:nvSpPr>
@@ -23645,7 +23645,7 @@
       </p:sp>
       <p:sp>
         <p:nvSpPr>
-          <p:cNvPr id="12" name="Shape 10"/>
+          <p:cNvPr id="13" name="Shape 10"/>
           <p:cNvSpPr/>
           <p:nvPr/>
         </p:nvSpPr>
@@ -23670,7 +23670,7 @@
       </p:sp>
       <p:sp>
         <p:nvSpPr>
-          <p:cNvPr id="13" name="Text 11"/>
+          <p:cNvPr id="14" name="Text 11"/>
           <p:cNvSpPr txBox="1"/>
           <p:nvPr/>
         </p:nvSpPr>
@@ -23709,7 +23709,7 @@
       </p:sp>
       <p:sp>
         <p:nvSpPr>
-          <p:cNvPr id="14" name="Text 12"/>
+          <p:cNvPr id="15" name="Text 12"/>
           <p:cNvSpPr txBox="1"/>
           <p:nvPr/>
         </p:nvSpPr>
@@ -23762,7 +23762,7 @@
       </p:sp>
       <p:sp>
         <p:nvSpPr>
-          <p:cNvPr id="15" name="Shape 13"/>
+          <p:cNvPr id="16" name="Shape 13"/>
           <p:cNvSpPr/>
           <p:nvPr/>
         </p:nvSpPr>
@@ -23787,7 +23787,7 @@
       </p:sp>
       <p:sp>
         <p:nvSpPr>
-          <p:cNvPr id="16" name="Text 14"/>
+          <p:cNvPr id="17" name="Text 14"/>
           <p:cNvSpPr txBox="1"/>
           <p:nvPr/>
         </p:nvSpPr>
@@ -23826,7 +23826,7 @@
       </p:sp>
       <p:sp>
         <p:nvSpPr>
-          <p:cNvPr id="17" name="Text 15"/>
+          <p:cNvPr id="18" name="Text 15"/>
           <p:cNvSpPr txBox="1"/>
           <p:nvPr/>
         </p:nvSpPr>
@@ -23879,7 +23879,7 @@
       </p:sp>
       <p:sp>
         <p:nvSpPr>
-          <p:cNvPr id="18" name="Shape 16"/>
+          <p:cNvPr id="19" name="Shape 16"/>
           <p:cNvSpPr/>
           <p:nvPr/>
         </p:nvSpPr>
@@ -23904,7 +23904,7 @@
       </p:sp>
       <p:sp>
         <p:nvSpPr>
-          <p:cNvPr id="19" name="Text 17"/>
+          <p:cNvPr id="20" name="Text 17"/>
           <p:cNvSpPr txBox="1"/>
           <p:nvPr/>
         </p:nvSpPr>
@@ -23943,7 +23943,7 @@
       </p:sp>
       <p:sp>
         <p:nvSpPr>
-          <p:cNvPr id="20" name="Text 18"/>
+          <p:cNvPr id="21" name="Text 18"/>
           <p:cNvSpPr txBox="1"/>
           <p:nvPr/>
         </p:nvSpPr>
@@ -24096,7 +24096,7 @@
       </p:sp>
       <p:sp>
         <p:nvSpPr>
-          <p:cNvPr id="3" name="Shape 1"/>
+          <p:cNvPr id="4" name="Shape 1"/>
           <p:cNvSpPr/>
           <p:nvPr/>
         </p:nvSpPr>
@@ -24121,7 +24121,7 @@
       </p:sp>
       <p:sp>
         <p:nvSpPr>
-          <p:cNvPr id="4" name="Text 2"/>
+          <p:cNvPr id="5" name="Text 2"/>
           <p:cNvSpPr txBox="1"/>
           <p:nvPr/>
         </p:nvSpPr>
@@ -24160,7 +24160,7 @@
       </p:sp>
       <p:sp>
         <p:nvSpPr>
-          <p:cNvPr id="5" name="Text 3"/>
+          <p:cNvPr id="6" name="Text 3"/>
           <p:cNvSpPr txBox="1"/>
           <p:nvPr/>
         </p:nvSpPr>
@@ -24199,7 +24199,7 @@
       </p:sp>
       <p:sp>
         <p:nvSpPr>
-          <p:cNvPr id="6" name="Shape 4"/>
+          <p:cNvPr id="7" name="Shape 4"/>
           <p:cNvSpPr/>
           <p:nvPr/>
         </p:nvSpPr>
@@ -24224,7 +24224,7 @@
       </p:sp>
       <p:sp>
         <p:nvSpPr>
-          <p:cNvPr id="7" name="Text 5"/>
+          <p:cNvPr id="8" name="Text 5"/>
           <p:cNvSpPr txBox="1"/>
           <p:nvPr/>
         </p:nvSpPr>
@@ -24263,7 +24263,7 @@
       </p:sp>
       <p:sp>
         <p:nvSpPr>
-          <p:cNvPr id="8" name="Text 6"/>
+          <p:cNvPr id="9" name="Text 6"/>
           <p:cNvSpPr txBox="1"/>
           <p:nvPr/>
         </p:nvSpPr>
@@ -24302,7 +24302,7 @@
       </p:sp>
       <p:sp>
         <p:nvSpPr>
-          <p:cNvPr id="9" name="Shape 7"/>
+          <p:cNvPr id="10" name="Shape 7"/>
           <p:cNvSpPr/>
           <p:nvPr/>
         </p:nvSpPr>
@@ -24327,7 +24327,7 @@
       </p:sp>
       <p:sp>
         <p:nvSpPr>
-          <p:cNvPr id="10" name="Text 8"/>
+          <p:cNvPr id="11" name="Text 8"/>
           <p:cNvSpPr txBox="1"/>
           <p:nvPr/>
         </p:nvSpPr>
@@ -24366,7 +24366,7 @@
       </p:sp>
       <p:sp>
         <p:nvSpPr>
-          <p:cNvPr id="11" name="Text 9"/>
+          <p:cNvPr id="12" name="Text 9"/>
           <p:cNvSpPr txBox="1"/>
           <p:nvPr/>
         </p:nvSpPr>
@@ -24405,7 +24405,7 @@
       </p:sp>
       <p:sp>
         <p:nvSpPr>
-          <p:cNvPr id="12" name="Shape 10"/>
+          <p:cNvPr id="13" name="Shape 10"/>
           <p:cNvSpPr/>
           <p:nvPr/>
         </p:nvSpPr>
@@ -24430,7 +24430,7 @@
       </p:sp>
       <p:sp>
         <p:nvSpPr>
-          <p:cNvPr id="13" name="Text 11"/>
+          <p:cNvPr id="14" name="Text 11"/>
           <p:cNvSpPr txBox="1"/>
           <p:nvPr/>
         </p:nvSpPr>
@@ -24469,7 +24469,7 @@
       </p:sp>
       <p:sp>
         <p:nvSpPr>
-          <p:cNvPr id="14" name="Text 12"/>
+          <p:cNvPr id="15" name="Text 12"/>
           <p:cNvSpPr txBox="1"/>
           <p:nvPr/>
         </p:nvSpPr>
@@ -24508,7 +24508,7 @@
       </p:sp>
       <p:sp>
         <p:nvSpPr>
-          <p:cNvPr id="15" name="Shape 13"/>
+          <p:cNvPr id="16" name="Shape 13"/>
           <p:cNvSpPr/>
           <p:nvPr/>
         </p:nvSpPr>
@@ -24533,7 +24533,7 @@
       </p:sp>
       <p:sp>
         <p:nvSpPr>
-          <p:cNvPr id="16" name="Text 14"/>
+          <p:cNvPr id="17" name="Text 14"/>
           <p:cNvSpPr txBox="1"/>
           <p:nvPr/>
         </p:nvSpPr>
@@ -24572,7 +24572,7 @@
       </p:sp>
       <p:sp>
         <p:nvSpPr>
-          <p:cNvPr id="17" name="Text 15"/>
+          <p:cNvPr id="18" name="Text 15"/>
           <p:cNvSpPr txBox="1"/>
           <p:nvPr/>
         </p:nvSpPr>
@@ -24611,7 +24611,7 @@
       </p:sp>
       <p:sp>
         <p:nvSpPr>
-          <p:cNvPr id="18" name="Shape 16"/>
+          <p:cNvPr id="19" name="Shape 16"/>
           <p:cNvSpPr/>
           <p:nvPr/>
         </p:nvSpPr>
@@ -24636,7 +24636,7 @@
       </p:sp>
       <p:sp>
         <p:nvSpPr>
-          <p:cNvPr id="19" name="Text 17"/>
+          <p:cNvPr id="20" name="Text 17"/>
           <p:cNvSpPr txBox="1"/>
           <p:nvPr/>
         </p:nvSpPr>
@@ -24675,7 +24675,7 @@
       </p:sp>
       <p:sp>
         <p:nvSpPr>
-          <p:cNvPr id="20" name="Text 18"/>
+          <p:cNvPr id="21" name="Text 18"/>
           <p:cNvSpPr txBox="1"/>
           <p:nvPr/>
         </p:nvSpPr>
@@ -24714,7 +24714,7 @@
       </p:sp>
       <p:sp>
         <p:nvSpPr>
-          <p:cNvPr id="21" name="Shape 19"/>
+          <p:cNvPr id="22" name="Shape 19"/>
           <p:cNvSpPr/>
           <p:nvPr/>
         </p:nvSpPr>
@@ -24739,7 +24739,7 @@
       </p:sp>
       <p:sp>
         <p:nvSpPr>
-          <p:cNvPr id="22" name="Text 20"/>
+          <p:cNvPr id="23" name="Text 20"/>
           <p:cNvSpPr txBox="1"/>
           <p:nvPr/>
         </p:nvSpPr>
@@ -24778,7 +24778,7 @@
       </p:sp>
       <p:sp>
         <p:nvSpPr>
-          <p:cNvPr id="23" name="Text 21"/>
+          <p:cNvPr id="24" name="Text 21"/>
           <p:cNvSpPr txBox="1"/>
           <p:nvPr/>
         </p:nvSpPr>
@@ -24817,7 +24817,7 @@
       </p:sp>
       <p:sp>
         <p:nvSpPr>
-          <p:cNvPr id="24" name="Text 22"/>
+          <p:cNvPr id="25" name="Text 22"/>
           <p:cNvSpPr txBox="1"/>
           <p:nvPr/>
         </p:nvSpPr>
@@ -24970,7 +24970,7 @@
       </p:sp>
       <p:sp>
         <p:nvSpPr>
-          <p:cNvPr id="3" name="Shape 1"/>
+          <p:cNvPr id="4" name="Shape 1"/>
           <p:cNvSpPr/>
           <p:nvPr/>
         </p:nvSpPr>
@@ -24997,7 +24997,7 @@
       </p:sp>
       <p:sp>
         <p:nvSpPr>
-          <p:cNvPr id="4" name="Shape 2"/>
+          <p:cNvPr id="5" name="Shape 2"/>
           <p:cNvSpPr/>
           <p:nvPr/>
         </p:nvSpPr>
@@ -25022,7 +25022,7 @@
       </p:sp>
       <p:sp>
         <p:nvSpPr>
-          <p:cNvPr id="5" name="Text 3"/>
+          <p:cNvPr id="6" name="Text 3"/>
           <p:cNvSpPr txBox="1"/>
           <p:nvPr/>
         </p:nvSpPr>
@@ -25061,7 +25061,7 @@
       </p:sp>
       <p:sp>
         <p:nvSpPr>
-          <p:cNvPr id="6" name="Text 4"/>
+          <p:cNvPr id="7" name="Text 4"/>
           <p:cNvSpPr txBox="1"/>
           <p:nvPr/>
         </p:nvSpPr>
@@ -25100,7 +25100,7 @@
       </p:sp>
       <p:sp>
         <p:nvSpPr>
-          <p:cNvPr id="7" name="Text 5"/>
+          <p:cNvPr id="8" name="Text 5"/>
           <p:cNvSpPr txBox="1"/>
           <p:nvPr/>
         </p:nvSpPr>
@@ -25139,7 +25139,7 @@
       </p:sp>
       <p:sp>
         <p:nvSpPr>
-          <p:cNvPr id="8" name="Shape 6"/>
+          <p:cNvPr id="9" name="Shape 6"/>
           <p:cNvSpPr/>
           <p:nvPr/>
         </p:nvSpPr>
@@ -25166,7 +25166,7 @@
       </p:sp>
       <p:sp>
         <p:nvSpPr>
-          <p:cNvPr id="9" name="Shape 7"/>
+          <p:cNvPr id="10" name="Shape 7"/>
           <p:cNvSpPr/>
           <p:nvPr/>
         </p:nvSpPr>
@@ -25191,7 +25191,7 @@
       </p:sp>
       <p:sp>
         <p:nvSpPr>
-          <p:cNvPr id="10" name="Text 8"/>
+          <p:cNvPr id="11" name="Text 8"/>
           <p:cNvSpPr txBox="1"/>
           <p:nvPr/>
         </p:nvSpPr>
@@ -25230,7 +25230,7 @@
       </p:sp>
       <p:sp>
         <p:nvSpPr>
-          <p:cNvPr id="11" name="Text 9"/>
+          <p:cNvPr id="12" name="Text 9"/>
           <p:cNvSpPr txBox="1"/>
           <p:nvPr/>
         </p:nvSpPr>
@@ -25269,7 +25269,7 @@
       </p:sp>
       <p:sp>
         <p:nvSpPr>
-          <p:cNvPr id="12" name="Shape 10"/>
+          <p:cNvPr id="13" name="Shape 10"/>
           <p:cNvSpPr/>
           <p:nvPr/>
         </p:nvSpPr>
@@ -25296,7 +25296,7 @@
       </p:sp>
       <p:sp>
         <p:nvSpPr>
-          <p:cNvPr id="13" name="Text 11"/>
+          <p:cNvPr id="14" name="Text 11"/>
           <p:cNvSpPr txBox="1"/>
           <p:nvPr/>
         </p:nvSpPr>
@@ -25352,7 +25352,7 @@
       </p:sp>
       <p:sp>
         <p:nvSpPr>
-          <p:cNvPr id="14" name="Text 12"/>
+          <p:cNvPr id="15" name="Text 12"/>
           <p:cNvSpPr txBox="1"/>
           <p:nvPr/>
         </p:nvSpPr>
@@ -25391,7 +25391,7 @@
       </p:sp>
       <p:sp>
         <p:nvSpPr>
-          <p:cNvPr id="15" name="Text 13"/>
+          <p:cNvPr id="16" name="Text 13"/>
           <p:cNvSpPr txBox="1"/>
           <p:nvPr/>
         </p:nvSpPr>
@@ -25663,7 +25663,7 @@
       </p:sp>
       <p:sp>
         <p:nvSpPr>
-          <p:cNvPr id="3" name="Shape 1"/>
+          <p:cNvPr id="4" name="Shape 1"/>
           <p:cNvSpPr/>
           <p:nvPr/>
         </p:nvSpPr>
@@ -25690,7 +25690,7 @@
       </p:sp>
       <p:sp>
         <p:nvSpPr>
-          <p:cNvPr id="4" name="Text 2"/>
+          <p:cNvPr id="5" name="Text 2"/>
           <p:cNvSpPr txBox="1"/>
           <p:nvPr/>
         </p:nvSpPr>
@@ -25729,7 +25729,7 @@
       </p:sp>
       <p:sp>
         <p:nvSpPr>
-          <p:cNvPr id="5" name="Text 3"/>
+          <p:cNvPr id="6" name="Text 3"/>
           <p:cNvSpPr txBox="1"/>
           <p:nvPr/>
         </p:nvSpPr>
@@ -25768,7 +25768,7 @@
       </p:sp>
       <p:sp>
         <p:nvSpPr>
-          <p:cNvPr id="6" name="Text 4"/>
+          <p:cNvPr id="7" name="Text 4"/>
           <p:cNvSpPr txBox="1"/>
           <p:nvPr/>
         </p:nvSpPr>
@@ -25807,7 +25807,7 @@
       </p:sp>
       <p:sp>
         <p:nvSpPr>
-          <p:cNvPr id="7" name="Shape 5"/>
+          <p:cNvPr id="8" name="Shape 5"/>
           <p:cNvSpPr/>
           <p:nvPr/>
         </p:nvSpPr>
@@ -25834,7 +25834,7 @@
       </p:sp>
       <p:sp>
         <p:nvSpPr>
-          <p:cNvPr id="8" name="Text 6"/>
+          <p:cNvPr id="9" name="Text 6"/>
           <p:cNvSpPr txBox="1"/>
           <p:nvPr/>
         </p:nvSpPr>
@@ -25873,7 +25873,7 @@
       </p:sp>
       <p:sp>
         <p:nvSpPr>
-          <p:cNvPr id="9" name="Text 7"/>
+          <p:cNvPr id="10" name="Text 7"/>
           <p:cNvSpPr txBox="1"/>
           <p:nvPr/>
         </p:nvSpPr>
@@ -25912,7 +25912,7 @@
       </p:sp>
       <p:sp>
         <p:nvSpPr>
-          <p:cNvPr id="10" name="Text 8"/>
+          <p:cNvPr id="11" name="Text 8"/>
           <p:cNvSpPr txBox="1"/>
           <p:nvPr/>
         </p:nvSpPr>
@@ -25951,7 +25951,7 @@
       </p:sp>
       <p:sp>
         <p:nvSpPr>
-          <p:cNvPr id="11" name="Shape 9"/>
+          <p:cNvPr id="12" name="Shape 9"/>
           <p:cNvSpPr/>
           <p:nvPr/>
         </p:nvSpPr>
@@ -25978,7 +25978,7 @@
       </p:sp>
       <p:sp>
         <p:nvSpPr>
-          <p:cNvPr id="12" name="Text 10"/>
+          <p:cNvPr id="13" name="Text 10"/>
           <p:cNvSpPr txBox="1"/>
           <p:nvPr/>
         </p:nvSpPr>
@@ -26017,7 +26017,7 @@
       </p:sp>
       <p:sp>
         <p:nvSpPr>
-          <p:cNvPr id="13" name="Text 11"/>
+          <p:cNvPr id="14" name="Text 11"/>
           <p:cNvSpPr txBox="1"/>
           <p:nvPr/>
         </p:nvSpPr>
@@ -26056,7 +26056,7 @@
       </p:sp>
       <p:sp>
         <p:nvSpPr>
-          <p:cNvPr id="14" name="Text 12"/>
+          <p:cNvPr id="15" name="Text 12"/>
           <p:cNvSpPr txBox="1"/>
           <p:nvPr/>
         </p:nvSpPr>
@@ -26175,7 +26175,7 @@
       </p:grpSpPr>
       <p:sp>
         <p:nvSpPr>
-          <p:cNvPr id="2" name="Text 0"/>
+          <p:cNvPr id="3" name="Text 0"/>
           <p:cNvSpPr txBox="1"/>
           <p:nvPr/>
         </p:nvSpPr>
@@ -26214,7 +26214,7 @@
       </p:sp>
       <p:sp>
         <p:nvSpPr>
-          <p:cNvPr id="3" name="Text 1"/>
+          <p:cNvPr id="4" name="Text 1"/>
           <p:cNvSpPr txBox="1"/>
           <p:nvPr/>
         </p:nvSpPr>
@@ -26253,7 +26253,7 @@
       </p:sp>
       <p:sp>
         <p:nvSpPr>
-          <p:cNvPr id="4" name="Shape 2"/>
+          <p:cNvPr id="5" name="Shape 2"/>
           <p:cNvSpPr/>
           <p:nvPr/>
         </p:nvSpPr>
@@ -26280,7 +26280,7 @@
       </p:sp>
       <p:sp>
         <p:nvSpPr>
-          <p:cNvPr id="5" name="Text 3"/>
+          <p:cNvPr id="6" name="Text 3"/>
           <p:cNvSpPr txBox="1"/>
           <p:nvPr/>
         </p:nvSpPr>
@@ -26385,7 +26385,7 @@
       </p:sp>
       <p:sp>
         <p:nvSpPr>
-          <p:cNvPr id="3" name="Shape 1"/>
+          <p:cNvPr id="4" name="Shape 1"/>
           <p:cNvSpPr/>
           <p:nvPr/>
         </p:nvSpPr>
@@ -26412,7 +26412,7 @@
       </p:sp>
       <p:sp>
         <p:nvSpPr>
-          <p:cNvPr id="4" name="Shape 2"/>
+          <p:cNvPr id="5" name="Shape 2"/>
           <p:cNvSpPr/>
           <p:nvPr/>
         </p:nvSpPr>
@@ -26437,7 +26437,7 @@
       </p:sp>
       <p:sp>
         <p:nvSpPr>
-          <p:cNvPr id="5" name="Text 3"/>
+          <p:cNvPr id="6" name="Text 3"/>
           <p:cNvSpPr txBox="1"/>
           <p:nvPr/>
         </p:nvSpPr>
@@ -26476,7 +26476,7 @@
       </p:sp>
       <p:sp>
         <p:nvSpPr>
-          <p:cNvPr id="6" name="Text 4"/>
+          <p:cNvPr id="7" name="Text 4"/>
           <p:cNvSpPr txBox="1"/>
           <p:nvPr/>
         </p:nvSpPr>
@@ -26515,7 +26515,7 @@
       </p:sp>
       <p:sp>
         <p:nvSpPr>
-          <p:cNvPr id="7" name="Text 5"/>
+          <p:cNvPr id="8" name="Text 5"/>
           <p:cNvSpPr txBox="1"/>
           <p:nvPr/>
         </p:nvSpPr>
@@ -26554,7 +26554,7 @@
       </p:sp>
       <p:sp>
         <p:nvSpPr>
-          <p:cNvPr id="8" name="Text 6"/>
+          <p:cNvPr id="9" name="Text 6"/>
           <p:cNvSpPr txBox="1"/>
           <p:nvPr/>
         </p:nvSpPr>
@@ -26660,7 +26660,7 @@
       </p:sp>
       <p:sp>
         <p:nvSpPr>
-          <p:cNvPr id="9" name="Shape 7"/>
+          <p:cNvPr id="10" name="Shape 7"/>
           <p:cNvSpPr/>
           <p:nvPr/>
         </p:nvSpPr>
@@ -26687,7 +26687,7 @@
       </p:sp>
       <p:sp>
         <p:nvSpPr>
-          <p:cNvPr id="10" name="Shape 8"/>
+          <p:cNvPr id="11" name="Shape 8"/>
           <p:cNvSpPr/>
           <p:nvPr/>
         </p:nvSpPr>
@@ -26712,7 +26712,7 @@
       </p:sp>
       <p:sp>
         <p:nvSpPr>
-          <p:cNvPr id="11" name="Text 9"/>
+          <p:cNvPr id="12" name="Text 9"/>
           <p:cNvSpPr txBox="1"/>
           <p:nvPr/>
         </p:nvSpPr>
@@ -26751,7 +26751,7 @@
       </p:sp>
       <p:sp>
         <p:nvSpPr>
-          <p:cNvPr id="12" name="Text 10"/>
+          <p:cNvPr id="13" name="Text 10"/>
           <p:cNvSpPr txBox="1"/>
           <p:nvPr/>
         </p:nvSpPr>
@@ -26790,7 +26790,7 @@
       </p:sp>
       <p:sp>
         <p:nvSpPr>
-          <p:cNvPr id="13" name="Text 11"/>
+          <p:cNvPr id="14" name="Text 11"/>
           <p:cNvSpPr txBox="1"/>
           <p:nvPr/>
         </p:nvSpPr>
@@ -26829,7 +26829,7 @@
       </p:sp>
       <p:sp>
         <p:nvSpPr>
-          <p:cNvPr id="14" name="Text 12"/>
+          <p:cNvPr id="15" name="Text 12"/>
           <p:cNvSpPr txBox="1"/>
           <p:nvPr/>
         </p:nvSpPr>
@@ -26935,7 +26935,7 @@
       </p:sp>
       <p:sp>
         <p:nvSpPr>
-          <p:cNvPr id="15" name="Shape 13"/>
+          <p:cNvPr id="16" name="Shape 13"/>
           <p:cNvSpPr/>
           <p:nvPr/>
         </p:nvSpPr>
@@ -26962,7 +26962,7 @@
       </p:sp>
       <p:sp>
         <p:nvSpPr>
-          <p:cNvPr id="16" name="Shape 14"/>
+          <p:cNvPr id="17" name="Shape 14"/>
           <p:cNvSpPr/>
           <p:nvPr/>
         </p:nvSpPr>
@@ -26987,7 +26987,7 @@
       </p:sp>
       <p:sp>
         <p:nvSpPr>
-          <p:cNvPr id="17" name="Text 15"/>
+          <p:cNvPr id="18" name="Text 15"/>
           <p:cNvSpPr txBox="1"/>
           <p:nvPr/>
         </p:nvSpPr>
@@ -27026,7 +27026,7 @@
       </p:sp>
       <p:sp>
         <p:nvSpPr>
-          <p:cNvPr id="18" name="Text 16"/>
+          <p:cNvPr id="19" name="Text 16"/>
           <p:cNvSpPr txBox="1"/>
           <p:nvPr/>
         </p:nvSpPr>
@@ -27065,7 +27065,7 @@
       </p:sp>
       <p:sp>
         <p:nvSpPr>
-          <p:cNvPr id="19" name="Text 17"/>
+          <p:cNvPr id="20" name="Text 17"/>
           <p:cNvSpPr txBox="1"/>
           <p:nvPr/>
         </p:nvSpPr>
@@ -27104,7 +27104,7 @@
       </p:sp>
       <p:sp>
         <p:nvSpPr>
-          <p:cNvPr id="20" name="Text 18"/>
+          <p:cNvPr id="21" name="Text 18"/>
           <p:cNvSpPr txBox="1"/>
           <p:nvPr/>
         </p:nvSpPr>
@@ -30117,7 +30117,7 @@
       </p:graphicFrame>
       <p:sp>
         <p:nvSpPr>
-          <p:cNvPr id="4" name="Text 1"/>
+          <p:cNvPr id="5" name="Text 1"/>
           <p:cNvSpPr txBox="1"/>
           <p:nvPr/>
         </p:nvSpPr>
@@ -30270,7 +30270,7 @@
       </p:sp>
       <p:sp>
         <p:nvSpPr>
-          <p:cNvPr id="3" name="Shape 1"/>
+          <p:cNvPr id="4" name="Shape 1"/>
           <p:cNvSpPr/>
           <p:nvPr/>
         </p:nvSpPr>
@@ -30297,7 +30297,7 @@
       </p:sp>
       <p:sp>
         <p:nvSpPr>
-          <p:cNvPr id="4" name="Text 2"/>
+          <p:cNvPr id="5" name="Text 2"/>
           <p:cNvSpPr txBox="1"/>
           <p:nvPr/>
         </p:nvSpPr>
@@ -30336,7 +30336,7 @@
       </p:sp>
       <p:sp>
         <p:nvSpPr>
-          <p:cNvPr id="5" name="Text 3"/>
+          <p:cNvPr id="6" name="Text 3"/>
           <p:cNvSpPr txBox="1"/>
           <p:nvPr/>
         </p:nvSpPr>
@@ -30375,7 +30375,7 @@
       </p:sp>
       <p:sp>
         <p:nvSpPr>
-          <p:cNvPr id="6" name="Text 4"/>
+          <p:cNvPr id="7" name="Text 4"/>
           <p:cNvSpPr txBox="1"/>
           <p:nvPr/>
         </p:nvSpPr>
@@ -30414,7 +30414,7 @@
       </p:sp>
       <p:sp>
         <p:nvSpPr>
-          <p:cNvPr id="7" name="Shape 5"/>
+          <p:cNvPr id="8" name="Shape 5"/>
           <p:cNvSpPr/>
           <p:nvPr/>
         </p:nvSpPr>
@@ -30441,7 +30441,7 @@
       </p:sp>
       <p:sp>
         <p:nvSpPr>
-          <p:cNvPr id="8" name="Text 6"/>
+          <p:cNvPr id="9" name="Text 6"/>
           <p:cNvSpPr txBox="1"/>
           <p:nvPr/>
         </p:nvSpPr>
@@ -30480,7 +30480,7 @@
       </p:sp>
       <p:sp>
         <p:nvSpPr>
-          <p:cNvPr id="9" name="Text 7"/>
+          <p:cNvPr id="10" name="Text 7"/>
           <p:cNvSpPr txBox="1"/>
           <p:nvPr/>
         </p:nvSpPr>
@@ -30519,7 +30519,7 @@
       </p:sp>
       <p:sp>
         <p:nvSpPr>
-          <p:cNvPr id="10" name="Text 8"/>
+          <p:cNvPr id="11" name="Text 8"/>
           <p:cNvSpPr txBox="1"/>
           <p:nvPr/>
         </p:nvSpPr>
@@ -30558,7 +30558,7 @@
       </p:sp>
       <p:sp>
         <p:nvSpPr>
-          <p:cNvPr id="11" name="Shape 9"/>
+          <p:cNvPr id="12" name="Shape 9"/>
           <p:cNvSpPr/>
           <p:nvPr/>
         </p:nvSpPr>
@@ -30585,7 +30585,7 @@
       </p:sp>
       <p:sp>
         <p:nvSpPr>
-          <p:cNvPr id="12" name="Text 10"/>
+          <p:cNvPr id="13" name="Text 10"/>
           <p:cNvSpPr txBox="1"/>
           <p:nvPr/>
         </p:nvSpPr>
@@ -30624,7 +30624,7 @@
       </p:sp>
       <p:sp>
         <p:nvSpPr>
-          <p:cNvPr id="13" name="Text 11"/>
+          <p:cNvPr id="14" name="Text 11"/>
           <p:cNvSpPr txBox="1"/>
           <p:nvPr/>
         </p:nvSpPr>
@@ -30663,7 +30663,7 @@
       </p:sp>
       <p:sp>
         <p:nvSpPr>
-          <p:cNvPr id="14" name="Text 12"/>
+          <p:cNvPr id="15" name="Text 12"/>
           <p:cNvSpPr txBox="1"/>
           <p:nvPr/>
         </p:nvSpPr>
@@ -30816,7 +30816,7 @@
       </p:sp>
       <p:sp>
         <p:nvSpPr>
-          <p:cNvPr id="3" name="Shape 1"/>
+          <p:cNvPr id="4" name="Shape 1"/>
           <p:cNvSpPr/>
           <p:nvPr/>
         </p:nvSpPr>
@@ -30841,7 +30841,7 @@
       </p:sp>
       <p:sp>
         <p:nvSpPr>
-          <p:cNvPr id="4" name="Text 2"/>
+          <p:cNvPr id="5" name="Text 2"/>
           <p:cNvSpPr txBox="1"/>
           <p:nvPr/>
         </p:nvSpPr>
@@ -30880,7 +30880,7 @@
       </p:sp>
       <p:sp>
         <p:nvSpPr>
-          <p:cNvPr id="5" name="Text 3"/>
+          <p:cNvPr id="6" name="Text 3"/>
           <p:cNvSpPr txBox="1"/>
           <p:nvPr/>
         </p:nvSpPr>
@@ -30919,7 +30919,7 @@
       </p:sp>
       <p:sp>
         <p:nvSpPr>
-          <p:cNvPr id="6" name="Text 4"/>
+          <p:cNvPr id="7" name="Text 4"/>
           <p:cNvSpPr txBox="1"/>
           <p:nvPr/>
         </p:nvSpPr>
@@ -30958,7 +30958,7 @@
       </p:sp>
       <p:sp>
         <p:nvSpPr>
-          <p:cNvPr id="7" name="Shape 5"/>
+          <p:cNvPr id="8" name="Shape 5"/>
           <p:cNvSpPr/>
           <p:nvPr/>
         </p:nvSpPr>
@@ -30983,7 +30983,7 @@
       </p:sp>
       <p:sp>
         <p:nvSpPr>
-          <p:cNvPr id="8" name="Text 6"/>
+          <p:cNvPr id="9" name="Text 6"/>
           <p:cNvSpPr txBox="1"/>
           <p:nvPr/>
         </p:nvSpPr>
@@ -31022,7 +31022,7 @@
       </p:sp>
       <p:sp>
         <p:nvSpPr>
-          <p:cNvPr id="9" name="Text 7"/>
+          <p:cNvPr id="10" name="Text 7"/>
           <p:cNvSpPr txBox="1"/>
           <p:nvPr/>
         </p:nvSpPr>
@@ -31061,7 +31061,7 @@
       </p:sp>
       <p:sp>
         <p:nvSpPr>
-          <p:cNvPr id="10" name="Text 8"/>
+          <p:cNvPr id="11" name="Text 8"/>
           <p:cNvSpPr txBox="1"/>
           <p:nvPr/>
         </p:nvSpPr>
@@ -31100,7 +31100,7 @@
       </p:sp>
       <p:sp>
         <p:nvSpPr>
-          <p:cNvPr id="11" name="Shape 9"/>
+          <p:cNvPr id="12" name="Shape 9"/>
           <p:cNvSpPr/>
           <p:nvPr/>
         </p:nvSpPr>
@@ -31125,7 +31125,7 @@
       </p:sp>
       <p:sp>
         <p:nvSpPr>
-          <p:cNvPr id="12" name="Text 10"/>
+          <p:cNvPr id="13" name="Text 10"/>
           <p:cNvSpPr txBox="1"/>
           <p:nvPr/>
         </p:nvSpPr>
@@ -31164,7 +31164,7 @@
       </p:sp>
       <p:sp>
         <p:nvSpPr>
-          <p:cNvPr id="13" name="Text 11"/>
+          <p:cNvPr id="14" name="Text 11"/>
           <p:cNvSpPr txBox="1"/>
           <p:nvPr/>
         </p:nvSpPr>
@@ -31203,7 +31203,7 @@
       </p:sp>
       <p:sp>
         <p:nvSpPr>
-          <p:cNvPr id="14" name="Text 12"/>
+          <p:cNvPr id="15" name="Text 12"/>
           <p:cNvSpPr txBox="1"/>
           <p:nvPr/>
         </p:nvSpPr>
@@ -31242,7 +31242,7 @@
       </p:sp>
       <p:sp>
         <p:nvSpPr>
-          <p:cNvPr id="15" name="Shape 13"/>
+          <p:cNvPr id="16" name="Shape 13"/>
           <p:cNvSpPr/>
           <p:nvPr/>
         </p:nvSpPr>
@@ -31267,7 +31267,7 @@
       </p:sp>
       <p:sp>
         <p:nvSpPr>
-          <p:cNvPr id="16" name="Text 14"/>
+          <p:cNvPr id="17" name="Text 14"/>
           <p:cNvSpPr txBox="1"/>
           <p:nvPr/>
         </p:nvSpPr>
@@ -31306,7 +31306,7 @@
       </p:sp>
       <p:sp>
         <p:nvSpPr>
-          <p:cNvPr id="17" name="Text 15"/>
+          <p:cNvPr id="18" name="Text 15"/>
           <p:cNvSpPr txBox="1"/>
           <p:nvPr/>
         </p:nvSpPr>
@@ -31345,7 +31345,7 @@
       </p:sp>
       <p:sp>
         <p:nvSpPr>
-          <p:cNvPr id="18" name="Text 16"/>
+          <p:cNvPr id="19" name="Text 16"/>
           <p:cNvSpPr txBox="1"/>
           <p:nvPr/>
         </p:nvSpPr>
@@ -31384,7 +31384,7 @@
       </p:sp>
       <p:sp>
         <p:nvSpPr>
-          <p:cNvPr id="19" name="Shape 17"/>
+          <p:cNvPr id="20" name="Shape 17"/>
           <p:cNvSpPr/>
           <p:nvPr/>
         </p:nvSpPr>
@@ -31409,7 +31409,7 @@
       </p:sp>
       <p:sp>
         <p:nvSpPr>
-          <p:cNvPr id="20" name="Text 18"/>
+          <p:cNvPr id="21" name="Text 18"/>
           <p:cNvSpPr txBox="1"/>
           <p:nvPr/>
         </p:nvSpPr>
@@ -31448,7 +31448,7 @@
       </p:sp>
       <p:sp>
         <p:nvSpPr>
-          <p:cNvPr id="21" name="Text 19"/>
+          <p:cNvPr id="22" name="Text 19"/>
           <p:cNvSpPr txBox="1"/>
           <p:nvPr/>
         </p:nvSpPr>
@@ -31487,7 +31487,7 @@
       </p:sp>
       <p:sp>
         <p:nvSpPr>
-          <p:cNvPr id="22" name="Text 20"/>
+          <p:cNvPr id="23" name="Text 20"/>
           <p:cNvSpPr txBox="1"/>
           <p:nvPr/>
         </p:nvSpPr>
@@ -31640,7 +31640,7 @@
       </p:sp>
       <p:sp>
         <p:nvSpPr>
-          <p:cNvPr id="3" name="Shape 1"/>
+          <p:cNvPr id="4" name="Shape 1"/>
           <p:cNvSpPr/>
           <p:nvPr/>
         </p:nvSpPr>
@@ -31667,7 +31667,7 @@
       </p:sp>
       <p:sp>
         <p:nvSpPr>
-          <p:cNvPr id="4" name="Shape 2"/>
+          <p:cNvPr id="5" name="Shape 2"/>
           <p:cNvSpPr/>
           <p:nvPr/>
         </p:nvSpPr>
@@ -31692,7 +31692,7 @@
       </p:sp>
       <p:sp>
         <p:nvSpPr>
-          <p:cNvPr id="5" name="Text 3"/>
+          <p:cNvPr id="6" name="Text 3"/>
           <p:cNvSpPr txBox="1"/>
           <p:nvPr/>
         </p:nvSpPr>
@@ -31731,7 +31731,7 @@
       </p:sp>
       <p:sp>
         <p:nvSpPr>
-          <p:cNvPr id="6" name="Text 4"/>
+          <p:cNvPr id="7" name="Text 4"/>
           <p:cNvSpPr txBox="1"/>
           <p:nvPr/>
         </p:nvSpPr>
@@ -31770,7 +31770,7 @@
       </p:sp>
       <p:sp>
         <p:nvSpPr>
-          <p:cNvPr id="7" name="Text 5"/>
+          <p:cNvPr id="8" name="Text 5"/>
           <p:cNvSpPr txBox="1"/>
           <p:nvPr/>
         </p:nvSpPr>
@@ -31809,7 +31809,7 @@
       </p:sp>
       <p:sp>
         <p:nvSpPr>
-          <p:cNvPr id="8" name="Shape 6"/>
+          <p:cNvPr id="9" name="Shape 6"/>
           <p:cNvSpPr/>
           <p:nvPr/>
         </p:nvSpPr>
@@ -31836,7 +31836,7 @@
       </p:sp>
       <p:sp>
         <p:nvSpPr>
-          <p:cNvPr id="9" name="Shape 7"/>
+          <p:cNvPr id="10" name="Shape 7"/>
           <p:cNvSpPr/>
           <p:nvPr/>
         </p:nvSpPr>
@@ -31861,7 +31861,7 @@
       </p:sp>
       <p:sp>
         <p:nvSpPr>
-          <p:cNvPr id="10" name="Text 8"/>
+          <p:cNvPr id="11" name="Text 8"/>
           <p:cNvSpPr txBox="1"/>
           <p:nvPr/>
         </p:nvSpPr>
@@ -31900,7 +31900,7 @@
       </p:sp>
       <p:sp>
         <p:nvSpPr>
-          <p:cNvPr id="11" name="Text 9"/>
+          <p:cNvPr id="12" name="Text 9"/>
           <p:cNvSpPr txBox="1"/>
           <p:nvPr/>
         </p:nvSpPr>
@@ -31939,7 +31939,7 @@
       </p:sp>
       <p:sp>
         <p:nvSpPr>
-          <p:cNvPr id="12" name="Text 10"/>
+          <p:cNvPr id="13" name="Text 10"/>
           <p:cNvSpPr txBox="1"/>
           <p:nvPr/>
         </p:nvSpPr>
@@ -31978,7 +31978,7 @@
       </p:sp>
       <p:sp>
         <p:nvSpPr>
-          <p:cNvPr id="13" name="Shape 11"/>
+          <p:cNvPr id="14" name="Shape 11"/>
           <p:cNvSpPr/>
           <p:nvPr/>
         </p:nvSpPr>
@@ -32005,7 +32005,7 @@
       </p:sp>
       <p:sp>
         <p:nvSpPr>
-          <p:cNvPr id="14" name="Shape 12"/>
+          <p:cNvPr id="15" name="Shape 12"/>
           <p:cNvSpPr/>
           <p:nvPr/>
         </p:nvSpPr>
@@ -32030,7 +32030,7 @@
       </p:sp>
       <p:sp>
         <p:nvSpPr>
-          <p:cNvPr id="15" name="Text 13"/>
+          <p:cNvPr id="16" name="Text 13"/>
           <p:cNvSpPr txBox="1"/>
           <p:nvPr/>
         </p:nvSpPr>
@@ -32069,7 +32069,7 @@
       </p:sp>
       <p:sp>
         <p:nvSpPr>
-          <p:cNvPr id="16" name="Text 14"/>
+          <p:cNvPr id="17" name="Text 14"/>
           <p:cNvSpPr txBox="1"/>
           <p:nvPr/>
         </p:nvSpPr>
@@ -32108,7 +32108,7 @@
       </p:sp>
       <p:sp>
         <p:nvSpPr>
-          <p:cNvPr id="17" name="Text 15"/>
+          <p:cNvPr id="18" name="Text 15"/>
           <p:cNvSpPr txBox="1"/>
           <p:nvPr/>
         </p:nvSpPr>
@@ -32147,7 +32147,7 @@
       </p:sp>
       <p:sp>
         <p:nvSpPr>
-          <p:cNvPr id="18" name="Shape 16"/>
+          <p:cNvPr id="19" name="Shape 16"/>
           <p:cNvSpPr/>
           <p:nvPr/>
         </p:nvSpPr>
@@ -32174,7 +32174,7 @@
       </p:sp>
       <p:sp>
         <p:nvSpPr>
-          <p:cNvPr id="19" name="Shape 17"/>
+          <p:cNvPr id="20" name="Shape 17"/>
           <p:cNvSpPr/>
           <p:nvPr/>
         </p:nvSpPr>
@@ -32199,7 +32199,7 @@
       </p:sp>
       <p:sp>
         <p:nvSpPr>
-          <p:cNvPr id="20" name="Text 18"/>
+          <p:cNvPr id="21" name="Text 18"/>
           <p:cNvSpPr txBox="1"/>
           <p:nvPr/>
         </p:nvSpPr>
@@ -32238,7 +32238,7 @@
       </p:sp>
       <p:sp>
         <p:nvSpPr>
-          <p:cNvPr id="21" name="Text 19"/>
+          <p:cNvPr id="22" name="Text 19"/>
           <p:cNvSpPr txBox="1"/>
           <p:nvPr/>
         </p:nvSpPr>
@@ -32277,7 +32277,7 @@
       </p:sp>
       <p:sp>
         <p:nvSpPr>
-          <p:cNvPr id="22" name="Text 20"/>
+          <p:cNvPr id="23" name="Text 20"/>
           <p:cNvSpPr txBox="1"/>
           <p:nvPr/>
         </p:nvSpPr>
@@ -32316,7 +32316,7 @@
       </p:sp>
       <p:sp>
         <p:nvSpPr>
-          <p:cNvPr id="23" name="Shape 21"/>
+          <p:cNvPr id="24" name="Shape 21"/>
           <p:cNvSpPr/>
           <p:nvPr/>
         </p:nvSpPr>
@@ -32343,7 +32343,7 @@
       </p:sp>
       <p:sp>
         <p:nvSpPr>
-          <p:cNvPr id="24" name="Shape 22"/>
+          <p:cNvPr id="25" name="Shape 22"/>
           <p:cNvSpPr/>
           <p:nvPr/>
         </p:nvSpPr>
@@ -32368,7 +32368,7 @@
       </p:sp>
       <p:sp>
         <p:nvSpPr>
-          <p:cNvPr id="25" name="Text 23"/>
+          <p:cNvPr id="26" name="Text 23"/>
           <p:cNvSpPr txBox="1"/>
           <p:nvPr/>
         </p:nvSpPr>
@@ -32407,7 +32407,7 @@
       </p:sp>
       <p:sp>
         <p:nvSpPr>
-          <p:cNvPr id="26" name="Text 24"/>
+          <p:cNvPr id="27" name="Text 24"/>
           <p:cNvSpPr txBox="1"/>
           <p:nvPr/>
         </p:nvSpPr>
@@ -32446,7 +32446,7 @@
       </p:sp>
       <p:sp>
         <p:nvSpPr>
-          <p:cNvPr id="27" name="Shape 25"/>
+          <p:cNvPr id="28" name="Shape 25"/>
           <p:cNvSpPr/>
           <p:nvPr/>
         </p:nvSpPr>
@@ -32473,7 +32473,7 @@
       </p:sp>
       <p:sp>
         <p:nvSpPr>
-          <p:cNvPr id="28" name="Text 26"/>
+          <p:cNvPr id="29" name="Text 26"/>
           <p:cNvSpPr txBox="1"/>
           <p:nvPr/>
         </p:nvSpPr>
@@ -32599,7 +32599,7 @@
       </p:grpSpPr>
       <p:sp>
         <p:nvSpPr>
-          <p:cNvPr id="2" name="Text 0"/>
+          <p:cNvPr id="3" name="Text 0"/>
           <p:cNvSpPr txBox="1"/>
           <p:nvPr/>
         </p:nvSpPr>
@@ -32638,7 +32638,7 @@
       </p:sp>
       <p:sp>
         <p:nvSpPr>
-          <p:cNvPr id="3" name="Text 1"/>
+          <p:cNvPr id="4" name="Text 1"/>
           <p:cNvSpPr txBox="1"/>
           <p:nvPr/>
         </p:nvSpPr>
@@ -32677,7 +32677,7 @@
       </p:sp>
       <p:sp>
         <p:nvSpPr>
-          <p:cNvPr id="4" name="Shape 2"/>
+          <p:cNvPr id="5" name="Shape 2"/>
           <p:cNvSpPr/>
           <p:nvPr/>
         </p:nvSpPr>
@@ -32704,7 +32704,7 @@
       </p:sp>
       <p:sp>
         <p:nvSpPr>
-          <p:cNvPr id="5" name="Text 3"/>
+          <p:cNvPr id="6" name="Text 3"/>
           <p:cNvSpPr txBox="1"/>
           <p:nvPr/>
         </p:nvSpPr>
@@ -32760,7 +32760,7 @@
       </p:sp>
       <p:sp>
         <p:nvSpPr>
-          <p:cNvPr id="6" name="Text 0"/>
+          <p:cNvPr id="7" name="Text 0"/>
           <p:cNvSpPr/>
           <p:nvPr>
             <p:ph idx="100" type="title" hasCustomPrompt="1"/>
@@ -32904,7 +32904,7 @@
       </p:sp>
       <p:sp>
         <p:nvSpPr>
-          <p:cNvPr id="3" name="Shape 1"/>
+          <p:cNvPr id="4" name="Shape 1"/>
           <p:cNvSpPr/>
           <p:nvPr/>
         </p:nvSpPr>
@@ -32931,7 +32931,7 @@
       </p:sp>
       <p:sp>
         <p:nvSpPr>
-          <p:cNvPr id="4" name="Text 2"/>
+          <p:cNvPr id="5" name="Text 2"/>
           <p:cNvSpPr txBox="1"/>
           <p:nvPr/>
         </p:nvSpPr>
@@ -32970,7 +32970,7 @@
       </p:sp>
       <p:sp>
         <p:nvSpPr>
-          <p:cNvPr id="5" name="Text 3"/>
+          <p:cNvPr id="6" name="Text 3"/>
           <p:cNvSpPr txBox="1"/>
           <p:nvPr/>
         </p:nvSpPr>
@@ -33055,7 +33055,7 @@
       </p:sp>
       <p:sp>
         <p:nvSpPr>
-          <p:cNvPr id="6" name="Shape 4"/>
+          <p:cNvPr id="7" name="Shape 4"/>
           <p:cNvSpPr/>
           <p:nvPr/>
         </p:nvSpPr>
@@ -33082,7 +33082,7 @@
       </p:sp>
       <p:sp>
         <p:nvSpPr>
-          <p:cNvPr id="7" name="Text 5"/>
+          <p:cNvPr id="8" name="Text 5"/>
           <p:cNvSpPr txBox="1"/>
           <p:nvPr/>
         </p:nvSpPr>
@@ -33121,7 +33121,7 @@
       </p:sp>
       <p:sp>
         <p:nvSpPr>
-          <p:cNvPr id="8" name="Text 6"/>
+          <p:cNvPr id="9" name="Text 6"/>
           <p:cNvSpPr txBox="1"/>
           <p:nvPr/>
         </p:nvSpPr>
@@ -33274,7 +33274,7 @@
       </p:sp>
       <p:sp>
         <p:nvSpPr>
-          <p:cNvPr id="3" name="Shape 1"/>
+          <p:cNvPr id="4" name="Shape 1"/>
           <p:cNvSpPr/>
           <p:nvPr/>
         </p:nvSpPr>
@@ -33301,7 +33301,7 @@
       </p:sp>
       <p:sp>
         <p:nvSpPr>
-          <p:cNvPr id="4" name="Text 2"/>
+          <p:cNvPr id="5" name="Text 2"/>
           <p:cNvSpPr txBox="1"/>
           <p:nvPr/>
         </p:nvSpPr>
@@ -33340,7 +33340,7 @@
       </p:sp>
       <p:sp>
         <p:nvSpPr>
-          <p:cNvPr id="5" name="Shape 3"/>
+          <p:cNvPr id="6" name="Shape 3"/>
           <p:cNvSpPr/>
           <p:nvPr/>
         </p:nvSpPr>
@@ -33367,7 +33367,7 @@
       </p:sp>
       <p:sp>
         <p:nvSpPr>
-          <p:cNvPr id="6" name="Text 4"/>
+          <p:cNvPr id="7" name="Text 4"/>
           <p:cNvSpPr txBox="1"/>
           <p:nvPr/>
         </p:nvSpPr>
@@ -33406,7 +33406,7 @@
       </p:sp>
       <p:sp>
         <p:nvSpPr>
-          <p:cNvPr id="7" name="Shape 5"/>
+          <p:cNvPr id="8" name="Shape 5"/>
           <p:cNvSpPr/>
           <p:nvPr/>
         </p:nvSpPr>
@@ -33433,7 +33433,7 @@
       </p:sp>
       <p:sp>
         <p:nvSpPr>
-          <p:cNvPr id="8" name="Text 6"/>
+          <p:cNvPr id="9" name="Text 6"/>
           <p:cNvSpPr txBox="1"/>
           <p:nvPr/>
         </p:nvSpPr>
@@ -33472,7 +33472,7 @@
       </p:sp>
       <p:sp>
         <p:nvSpPr>
-          <p:cNvPr id="9" name="Shape 7"/>
+          <p:cNvPr id="10" name="Shape 7"/>
           <p:cNvSpPr/>
           <p:nvPr/>
         </p:nvSpPr>
@@ -33499,7 +33499,7 @@
       </p:sp>
       <p:sp>
         <p:nvSpPr>
-          <p:cNvPr id="10" name="Text 8"/>
+          <p:cNvPr id="11" name="Text 8"/>
           <p:cNvSpPr txBox="1"/>
           <p:nvPr/>
         </p:nvSpPr>
@@ -33538,7 +33538,7 @@
       </p:sp>
       <p:sp>
         <p:nvSpPr>
-          <p:cNvPr id="11" name="Shape 9"/>
+          <p:cNvPr id="12" name="Shape 9"/>
           <p:cNvSpPr/>
           <p:nvPr/>
         </p:nvSpPr>
@@ -33565,7 +33565,7 @@
       </p:sp>
       <p:sp>
         <p:nvSpPr>
-          <p:cNvPr id="12" name="Text 10"/>
+          <p:cNvPr id="13" name="Text 10"/>
           <p:cNvSpPr txBox="1"/>
           <p:nvPr/>
         </p:nvSpPr>
@@ -33604,7 +33604,7 @@
       </p:sp>
       <p:sp>
         <p:nvSpPr>
-          <p:cNvPr id="13" name="Shape 11"/>
+          <p:cNvPr id="14" name="Shape 11"/>
           <p:cNvSpPr/>
           <p:nvPr/>
         </p:nvSpPr>
@@ -33631,7 +33631,7 @@
       </p:sp>
       <p:sp>
         <p:nvSpPr>
-          <p:cNvPr id="14" name="Text 12"/>
+          <p:cNvPr id="15" name="Text 12"/>
           <p:cNvSpPr txBox="1"/>
           <p:nvPr/>
         </p:nvSpPr>
@@ -33670,7 +33670,7 @@
       </p:sp>
       <p:sp>
         <p:nvSpPr>
-          <p:cNvPr id="15" name="Shape 13"/>
+          <p:cNvPr id="16" name="Shape 13"/>
           <p:cNvSpPr/>
           <p:nvPr/>
         </p:nvSpPr>
@@ -33697,7 +33697,7 @@
       </p:sp>
       <p:sp>
         <p:nvSpPr>
-          <p:cNvPr id="16" name="Text 14"/>
+          <p:cNvPr id="17" name="Text 14"/>
           <p:cNvSpPr txBox="1"/>
           <p:nvPr/>
         </p:nvSpPr>
@@ -33736,7 +33736,7 @@
       </p:sp>
       <p:sp>
         <p:nvSpPr>
-          <p:cNvPr id="17" name="Shape 15"/>
+          <p:cNvPr id="18" name="Shape 15"/>
           <p:cNvSpPr/>
           <p:nvPr/>
         </p:nvSpPr>
@@ -33763,7 +33763,7 @@
       </p:sp>
       <p:sp>
         <p:nvSpPr>
-          <p:cNvPr id="18" name="Text 16"/>
+          <p:cNvPr id="19" name="Text 16"/>
           <p:cNvSpPr txBox="1"/>
           <p:nvPr/>
         </p:nvSpPr>
@@ -33875,7 +33875,7 @@
       </p:grpSpPr>
       <p:sp>
         <p:nvSpPr>
-          <p:cNvPr id="2" name="Text 0"/>
+          <p:cNvPr id="3" name="Text 0"/>
           <p:cNvSpPr txBox="1"/>
           <p:nvPr/>
         </p:nvSpPr>
@@ -33914,7 +33914,7 @@
       </p:sp>
       <p:sp>
         <p:nvSpPr>
-          <p:cNvPr id="3" name="Text 1"/>
+          <p:cNvPr id="4" name="Text 1"/>
           <p:cNvSpPr txBox="1"/>
           <p:nvPr/>
         </p:nvSpPr>
@@ -33978,7 +33978,7 @@
       </p:grpSpPr>
       <p:sp>
         <p:nvSpPr>
-          <p:cNvPr id="2" name="Text 0"/>
+          <p:cNvPr id="3" name="Text 0"/>
           <p:cNvSpPr txBox="1"/>
           <p:nvPr/>
         </p:nvSpPr>
@@ -34017,7 +34017,7 @@
       </p:sp>
       <p:sp>
         <p:nvSpPr>
-          <p:cNvPr id="3" name="Text 1"/>
+          <p:cNvPr id="4" name="Text 1"/>
           <p:cNvSpPr txBox="1"/>
           <p:nvPr/>
         </p:nvSpPr>
@@ -34206,7 +34206,7 @@
       </p:sp>
       <p:sp>
         <p:nvSpPr>
-          <p:cNvPr id="3" name="Shape 1"/>
+          <p:cNvPr id="4" name="Shape 1"/>
           <p:cNvSpPr/>
           <p:nvPr/>
         </p:nvSpPr>
@@ -34233,7 +34233,7 @@
       </p:sp>
       <p:sp>
         <p:nvSpPr>
-          <p:cNvPr id="4" name="Text 2"/>
+          <p:cNvPr id="5" name="Text 2"/>
           <p:cNvSpPr txBox="1"/>
           <p:nvPr/>
         </p:nvSpPr>
@@ -34272,7 +34272,7 @@
       </p:sp>
       <p:sp>
         <p:nvSpPr>
-          <p:cNvPr id="5" name="Shape 3"/>
+          <p:cNvPr id="6" name="Shape 3"/>
           <p:cNvSpPr/>
           <p:nvPr/>
         </p:nvSpPr>
@@ -34297,7 +34297,7 @@
       </p:sp>
       <p:sp>
         <p:nvSpPr>
-          <p:cNvPr id="6" name="Text 4"/>
+          <p:cNvPr id="7" name="Text 4"/>
           <p:cNvSpPr txBox="1"/>
           <p:nvPr/>
         </p:nvSpPr>
@@ -34336,7 +34336,7 @@
       </p:sp>
       <p:sp>
         <p:nvSpPr>
-          <p:cNvPr id="7" name="Text 5"/>
+          <p:cNvPr id="8" name="Text 5"/>
           <p:cNvSpPr txBox="1"/>
           <p:nvPr/>
         </p:nvSpPr>
@@ -34375,7 +34375,7 @@
       </p:sp>
       <p:sp>
         <p:nvSpPr>
-          <p:cNvPr id="8" name="Shape 6"/>
+          <p:cNvPr id="9" name="Shape 6"/>
           <p:cNvSpPr/>
           <p:nvPr/>
         </p:nvSpPr>
@@ -34400,7 +34400,7 @@
       </p:sp>
       <p:sp>
         <p:nvSpPr>
-          <p:cNvPr id="9" name="Text 7"/>
+          <p:cNvPr id="10" name="Text 7"/>
           <p:cNvSpPr txBox="1"/>
           <p:nvPr/>
         </p:nvSpPr>
@@ -34439,7 +34439,7 @@
       </p:sp>
       <p:sp>
         <p:nvSpPr>
-          <p:cNvPr id="10" name="Text 8"/>
+          <p:cNvPr id="11" name="Text 8"/>
           <p:cNvSpPr txBox="1"/>
           <p:nvPr/>
         </p:nvSpPr>
@@ -34478,7 +34478,7 @@
       </p:sp>
       <p:sp>
         <p:nvSpPr>
-          <p:cNvPr id="11" name="Shape 9"/>
+          <p:cNvPr id="12" name="Shape 9"/>
           <p:cNvSpPr/>
           <p:nvPr/>
         </p:nvSpPr>
@@ -34503,7 +34503,7 @@
       </p:sp>
       <p:sp>
         <p:nvSpPr>
-          <p:cNvPr id="12" name="Text 10"/>
+          <p:cNvPr id="13" name="Text 10"/>
           <p:cNvSpPr txBox="1"/>
           <p:nvPr/>
         </p:nvSpPr>
@@ -34542,7 +34542,7 @@
       </p:sp>
       <p:sp>
         <p:nvSpPr>
-          <p:cNvPr id="13" name="Text 11"/>
+          <p:cNvPr id="14" name="Text 11"/>
           <p:cNvSpPr txBox="1"/>
           <p:nvPr/>
         </p:nvSpPr>
@@ -34581,7 +34581,7 @@
       </p:sp>
       <p:sp>
         <p:nvSpPr>
-          <p:cNvPr id="14" name="Shape 12"/>
+          <p:cNvPr id="15" name="Shape 12"/>
           <p:cNvSpPr/>
           <p:nvPr/>
         </p:nvSpPr>
@@ -34606,7 +34606,7 @@
       </p:sp>
       <p:sp>
         <p:nvSpPr>
-          <p:cNvPr id="15" name="Text 13"/>
+          <p:cNvPr id="16" name="Text 13"/>
           <p:cNvSpPr txBox="1"/>
           <p:nvPr/>
         </p:nvSpPr>
@@ -34645,7 +34645,7 @@
       </p:sp>
       <p:sp>
         <p:nvSpPr>
-          <p:cNvPr id="16" name="Text 14"/>
+          <p:cNvPr id="17" name="Text 14"/>
           <p:cNvSpPr txBox="1"/>
           <p:nvPr/>
         </p:nvSpPr>
@@ -34684,7 +34684,7 @@
       </p:sp>
       <p:sp>
         <p:nvSpPr>
-          <p:cNvPr id="17" name="Text 15"/>
+          <p:cNvPr id="18" name="Text 15"/>
           <p:cNvSpPr txBox="1"/>
           <p:nvPr/>
         </p:nvSpPr>
@@ -34723,7 +34723,7 @@
       </p:sp>
       <p:sp>
         <p:nvSpPr>
-          <p:cNvPr id="18" name="Shape 16"/>
+          <p:cNvPr id="19" name="Shape 16"/>
           <p:cNvSpPr/>
           <p:nvPr/>
         </p:nvSpPr>
@@ -34750,7 +34750,7 @@
       </p:sp>
       <p:sp>
         <p:nvSpPr>
-          <p:cNvPr id="19" name="Text 17"/>
+          <p:cNvPr id="20" name="Text 17"/>
           <p:cNvSpPr txBox="1"/>
           <p:nvPr/>
         </p:nvSpPr>
@@ -34806,7 +34806,7 @@
       </p:sp>
       <p:sp>
         <p:nvSpPr>
-          <p:cNvPr id="20" name="Shape 18"/>
+          <p:cNvPr id="21" name="Shape 18"/>
           <p:cNvSpPr/>
           <p:nvPr/>
         </p:nvSpPr>
@@ -34833,7 +34833,7 @@
       </p:sp>
       <p:sp>
         <p:nvSpPr>
-          <p:cNvPr id="21" name="Text 19"/>
+          <p:cNvPr id="22" name="Text 19"/>
           <p:cNvSpPr txBox="1"/>
           <p:nvPr/>
         </p:nvSpPr>
@@ -34872,7 +34872,7 @@
       </p:sp>
       <p:sp>
         <p:nvSpPr>
-          <p:cNvPr id="22" name="Shape 20"/>
+          <p:cNvPr id="23" name="Shape 20"/>
           <p:cNvSpPr/>
           <p:nvPr/>
         </p:nvSpPr>
@@ -34899,7 +34899,7 @@
       </p:sp>
       <p:sp>
         <p:nvSpPr>
-          <p:cNvPr id="23" name="Text 21"/>
+          <p:cNvPr id="24" name="Text 21"/>
           <p:cNvSpPr txBox="1"/>
           <p:nvPr/>
         </p:nvSpPr>
@@ -34938,7 +34938,7 @@
       </p:sp>
       <p:sp>
         <p:nvSpPr>
-          <p:cNvPr id="24" name="Shape 22"/>
+          <p:cNvPr id="25" name="Shape 22"/>
           <p:cNvSpPr/>
           <p:nvPr/>
         </p:nvSpPr>
@@ -34965,7 +34965,7 @@
       </p:sp>
       <p:sp>
         <p:nvSpPr>
-          <p:cNvPr id="25" name="Text 23"/>
+          <p:cNvPr id="26" name="Text 23"/>
           <p:cNvSpPr txBox="1"/>
           <p:nvPr/>
         </p:nvSpPr>
@@ -35118,7 +35118,7 @@
       </p:sp>
       <p:sp>
         <p:nvSpPr>
-          <p:cNvPr id="3" name="Shape 1"/>
+          <p:cNvPr id="4" name="Shape 1"/>
           <p:cNvSpPr/>
           <p:nvPr/>
         </p:nvSpPr>
@@ -35145,7 +35145,7 @@
       </p:sp>
       <p:sp>
         <p:nvSpPr>
-          <p:cNvPr id="4" name="Text 2"/>
+          <p:cNvPr id="5" name="Text 2"/>
           <p:cNvSpPr txBox="1"/>
           <p:nvPr/>
         </p:nvSpPr>
@@ -35184,7 +35184,7 @@
       </p:sp>
       <p:sp>
         <p:nvSpPr>
-          <p:cNvPr id="5" name="Shape 3"/>
+          <p:cNvPr id="6" name="Shape 3"/>
           <p:cNvSpPr/>
           <p:nvPr/>
         </p:nvSpPr>
@@ -35211,7 +35211,7 @@
       </p:sp>
       <p:sp>
         <p:nvSpPr>
-          <p:cNvPr id="6" name="Text 4"/>
+          <p:cNvPr id="7" name="Text 4"/>
           <p:cNvSpPr txBox="1"/>
           <p:nvPr/>
         </p:nvSpPr>
@@ -35250,7 +35250,7 @@
       </p:sp>
       <p:sp>
         <p:nvSpPr>
-          <p:cNvPr id="7" name="Text 5"/>
+          <p:cNvPr id="8" name="Text 5"/>
           <p:cNvSpPr txBox="1"/>
           <p:nvPr/>
         </p:nvSpPr>
@@ -35289,7 +35289,7 @@
       </p:sp>
       <p:sp>
         <p:nvSpPr>
-          <p:cNvPr id="8" name="Text 6"/>
+          <p:cNvPr id="9" name="Text 6"/>
           <p:cNvSpPr txBox="1"/>
           <p:nvPr/>
         </p:nvSpPr>
@@ -35416,7 +35416,7 @@
       </p:sp>
       <p:sp>
         <p:nvSpPr>
-          <p:cNvPr id="9" name="Shape 7"/>
+          <p:cNvPr id="10" name="Shape 7"/>
           <p:cNvSpPr/>
           <p:nvPr/>
         </p:nvSpPr>
@@ -35443,7 +35443,7 @@
       </p:sp>
       <p:sp>
         <p:nvSpPr>
-          <p:cNvPr id="10" name="Text 8"/>
+          <p:cNvPr id="11" name="Text 8"/>
           <p:cNvSpPr txBox="1"/>
           <p:nvPr/>
         </p:nvSpPr>
@@ -35482,7 +35482,7 @@
       </p:sp>
       <p:sp>
         <p:nvSpPr>
-          <p:cNvPr id="11" name="Text 9"/>
+          <p:cNvPr id="12" name="Text 9"/>
           <p:cNvSpPr txBox="1"/>
           <p:nvPr/>
         </p:nvSpPr>
@@ -35521,7 +35521,7 @@
       </p:sp>
       <p:sp>
         <p:nvSpPr>
-          <p:cNvPr id="12" name="Text 10"/>
+          <p:cNvPr id="13" name="Text 10"/>
           <p:cNvSpPr txBox="1"/>
           <p:nvPr/>
         </p:nvSpPr>
@@ -35648,7 +35648,7 @@
       </p:sp>
       <p:sp>
         <p:nvSpPr>
-          <p:cNvPr id="13" name="Shape 11"/>
+          <p:cNvPr id="14" name="Shape 11"/>
           <p:cNvSpPr/>
           <p:nvPr/>
         </p:nvSpPr>
@@ -35675,7 +35675,7 @@
       </p:sp>
       <p:sp>
         <p:nvSpPr>
-          <p:cNvPr id="14" name="Text 12"/>
+          <p:cNvPr id="15" name="Text 12"/>
           <p:cNvSpPr txBox="1"/>
           <p:nvPr/>
         </p:nvSpPr>
@@ -35714,7 +35714,7 @@
       </p:sp>
       <p:sp>
         <p:nvSpPr>
-          <p:cNvPr id="15" name="Text 13"/>
+          <p:cNvPr id="16" name="Text 13"/>
           <p:cNvSpPr txBox="1"/>
           <p:nvPr/>
         </p:nvSpPr>
@@ -35753,7 +35753,7 @@
       </p:sp>
       <p:sp>
         <p:nvSpPr>
-          <p:cNvPr id="16" name="Text 14"/>
+          <p:cNvPr id="17" name="Text 14"/>
           <p:cNvSpPr txBox="1"/>
           <p:nvPr/>
         </p:nvSpPr>
@@ -35994,7 +35994,7 @@
       </p:sp>
       <p:sp>
         <p:nvSpPr>
-          <p:cNvPr id="3" name="Text 1"/>
+          <p:cNvPr id="4" name="Text 1"/>
           <p:cNvSpPr txBox="1"/>
           <p:nvPr/>
         </p:nvSpPr>
@@ -36033,7 +36033,7 @@
       </p:sp>
       <p:sp>
         <p:nvSpPr>
-          <p:cNvPr id="4" name="Shape 2"/>
+          <p:cNvPr id="5" name="Shape 2"/>
           <p:cNvSpPr/>
           <p:nvPr/>
         </p:nvSpPr>
@@ -36060,7 +36060,7 @@
       </p:sp>
       <p:sp>
         <p:nvSpPr>
-          <p:cNvPr id="5" name="Text 3"/>
+          <p:cNvPr id="6" name="Text 3"/>
           <p:cNvSpPr txBox="1"/>
           <p:nvPr/>
         </p:nvSpPr>
@@ -36099,7 +36099,7 @@
       </p:sp>
       <p:sp>
         <p:nvSpPr>
-          <p:cNvPr id="6" name="Text 4"/>
+          <p:cNvPr id="7" name="Text 4"/>
           <p:cNvSpPr txBox="1"/>
           <p:nvPr/>
         </p:nvSpPr>
@@ -36138,7 +36138,7 @@
       </p:sp>
       <p:sp>
         <p:nvSpPr>
-          <p:cNvPr id="7" name="Text 5"/>
+          <p:cNvPr id="8" name="Text 5"/>
           <p:cNvSpPr txBox="1"/>
           <p:nvPr/>
         </p:nvSpPr>
@@ -36177,7 +36177,7 @@
       </p:sp>
       <p:sp>
         <p:nvSpPr>
-          <p:cNvPr id="8" name="Shape 6"/>
+          <p:cNvPr id="9" name="Shape 6"/>
           <p:cNvSpPr/>
           <p:nvPr/>
         </p:nvSpPr>
@@ -36204,7 +36204,7 @@
       </p:sp>
       <p:sp>
         <p:nvSpPr>
-          <p:cNvPr id="9" name="Text 7"/>
+          <p:cNvPr id="10" name="Text 7"/>
           <p:cNvSpPr txBox="1"/>
           <p:nvPr/>
         </p:nvSpPr>
@@ -36243,7 +36243,7 @@
       </p:sp>
       <p:sp>
         <p:nvSpPr>
-          <p:cNvPr id="10" name="Text 8"/>
+          <p:cNvPr id="11" name="Text 8"/>
           <p:cNvSpPr txBox="1"/>
           <p:nvPr/>
         </p:nvSpPr>
@@ -36282,7 +36282,7 @@
       </p:sp>
       <p:sp>
         <p:nvSpPr>
-          <p:cNvPr id="11" name="Text 9"/>
+          <p:cNvPr id="12" name="Text 9"/>
           <p:cNvSpPr txBox="1"/>
           <p:nvPr/>
         </p:nvSpPr>
@@ -36321,7 +36321,7 @@
       </p:sp>
       <p:sp>
         <p:nvSpPr>
-          <p:cNvPr id="12" name="Shape 10"/>
+          <p:cNvPr id="13" name="Shape 10"/>
           <p:cNvSpPr/>
           <p:nvPr/>
         </p:nvSpPr>
@@ -36348,7 +36348,7 @@
       </p:sp>
       <p:sp>
         <p:nvSpPr>
-          <p:cNvPr id="13" name="Text 11"/>
+          <p:cNvPr id="14" name="Text 11"/>
           <p:cNvSpPr txBox="1"/>
           <p:nvPr/>
         </p:nvSpPr>
@@ -36387,7 +36387,7 @@
       </p:sp>
       <p:sp>
         <p:nvSpPr>
-          <p:cNvPr id="14" name="Text 12"/>
+          <p:cNvPr id="15" name="Text 12"/>
           <p:cNvSpPr txBox="1"/>
           <p:nvPr/>
         </p:nvSpPr>
@@ -36426,7 +36426,7 @@
       </p:sp>
       <p:sp>
         <p:nvSpPr>
-          <p:cNvPr id="15" name="Text 13"/>
+          <p:cNvPr id="16" name="Text 13"/>
           <p:cNvSpPr txBox="1"/>
           <p:nvPr/>
         </p:nvSpPr>
@@ -36465,7 +36465,7 @@
       </p:sp>
       <p:sp>
         <p:nvSpPr>
-          <p:cNvPr id="16" name="Shape 14"/>
+          <p:cNvPr id="17" name="Shape 14"/>
           <p:cNvSpPr/>
           <p:nvPr/>
         </p:nvSpPr>
@@ -36492,7 +36492,7 @@
       </p:sp>
       <p:sp>
         <p:nvSpPr>
-          <p:cNvPr id="17" name="Text 15"/>
+          <p:cNvPr id="18" name="Text 15"/>
           <p:cNvSpPr txBox="1"/>
           <p:nvPr/>
         </p:nvSpPr>
@@ -36673,7 +36673,7 @@
       </p:sp>
       <p:graphicFrame>
         <p:nvGraphicFramePr>
-          <p:cNvPr id="3" name="Chart 0" descr=""/>
+          <p:cNvPr id="4" name="Chart 0" descr=""/>
           <p:cNvGraphicFramePr/>
           <p:nvPr/>
         </p:nvGraphicFramePr>
@@ -36689,7 +36689,7 @@
       </p:graphicFrame>
       <p:sp>
         <p:nvSpPr>
-          <p:cNvPr id="4" name="Shape 1"/>
+          <p:cNvPr id="5" name="Shape 1"/>
           <p:cNvSpPr/>
           <p:nvPr/>
         </p:nvSpPr>
@@ -36716,7 +36716,7 @@
       </p:sp>
       <p:sp>
         <p:nvSpPr>
-          <p:cNvPr id="5" name="Text 2"/>
+          <p:cNvPr id="6" name="Text 2"/>
           <p:cNvSpPr txBox="1"/>
           <p:nvPr/>
         </p:nvSpPr>
@@ -36755,7 +36755,7 @@
       </p:sp>
       <p:sp>
         <p:nvSpPr>
-          <p:cNvPr id="6" name="Text 3"/>
+          <p:cNvPr id="7" name="Text 3"/>
           <p:cNvSpPr txBox="1"/>
           <p:nvPr/>
         </p:nvSpPr>
@@ -36794,7 +36794,7 @@
       </p:sp>
       <p:sp>
         <p:nvSpPr>
-          <p:cNvPr id="7" name="Shape 4"/>
+          <p:cNvPr id="8" name="Shape 4"/>
           <p:cNvSpPr/>
           <p:nvPr/>
         </p:nvSpPr>
@@ -36821,7 +36821,7 @@
       </p:sp>
       <p:sp>
         <p:nvSpPr>
-          <p:cNvPr id="8" name="Text 5"/>
+          <p:cNvPr id="9" name="Text 5"/>
           <p:cNvSpPr txBox="1"/>
           <p:nvPr/>
         </p:nvSpPr>
@@ -36860,7 +36860,7 @@
       </p:sp>
       <p:sp>
         <p:nvSpPr>
-          <p:cNvPr id="9" name="Text 6"/>
+          <p:cNvPr id="10" name="Text 6"/>
           <p:cNvSpPr txBox="1"/>
           <p:nvPr/>
         </p:nvSpPr>
@@ -36899,7 +36899,7 @@
       </p:sp>
       <p:sp>
         <p:nvSpPr>
-          <p:cNvPr id="10" name="Text 7"/>
+          <p:cNvPr id="11" name="Text 7"/>
           <p:cNvSpPr txBox="1"/>
           <p:nvPr/>
         </p:nvSpPr>
@@ -37052,7 +37052,7 @@
       </p:sp>
       <p:sp>
         <p:nvSpPr>
-          <p:cNvPr id="3" name="Shape 1"/>
+          <p:cNvPr id="4" name="Shape 1"/>
           <p:cNvSpPr/>
           <p:nvPr/>
         </p:nvSpPr>
@@ -37079,7 +37079,7 @@
       </p:sp>
       <p:sp>
         <p:nvSpPr>
-          <p:cNvPr id="4" name="Text 2"/>
+          <p:cNvPr id="5" name="Text 2"/>
           <p:cNvSpPr txBox="1"/>
           <p:nvPr/>
         </p:nvSpPr>
@@ -37118,7 +37118,7 @@
       </p:sp>
       <p:sp>
         <p:nvSpPr>
-          <p:cNvPr id="5" name="Text 3"/>
+          <p:cNvPr id="6" name="Text 3"/>
           <p:cNvSpPr txBox="1"/>
           <p:nvPr/>
         </p:nvSpPr>
@@ -37157,7 +37157,7 @@
       </p:sp>
       <p:sp>
         <p:nvSpPr>
-          <p:cNvPr id="6" name="Text 4"/>
+          <p:cNvPr id="7" name="Text 4"/>
           <p:cNvSpPr txBox="1"/>
           <p:nvPr/>
         </p:nvSpPr>
@@ -37196,7 +37196,7 @@
       </p:sp>
       <p:sp>
         <p:nvSpPr>
-          <p:cNvPr id="7" name="Text 5"/>
+          <p:cNvPr id="8" name="Text 5"/>
           <p:cNvSpPr txBox="1"/>
           <p:nvPr/>
         </p:nvSpPr>
@@ -37235,7 +37235,7 @@
       </p:sp>
       <p:sp>
         <p:nvSpPr>
-          <p:cNvPr id="8" name="Shape 6"/>
+          <p:cNvPr id="9" name="Shape 6"/>
           <p:cNvSpPr/>
           <p:nvPr/>
         </p:nvSpPr>
@@ -37262,7 +37262,7 @@
       </p:sp>
       <p:sp>
         <p:nvSpPr>
-          <p:cNvPr id="9" name="Text 7"/>
+          <p:cNvPr id="10" name="Text 7"/>
           <p:cNvSpPr txBox="1"/>
           <p:nvPr/>
         </p:nvSpPr>
@@ -37301,7 +37301,7 @@
       </p:sp>
       <p:sp>
         <p:nvSpPr>
-          <p:cNvPr id="10" name="Text 8"/>
+          <p:cNvPr id="11" name="Text 8"/>
           <p:cNvSpPr txBox="1"/>
           <p:nvPr/>
         </p:nvSpPr>
@@ -37340,7 +37340,7 @@
       </p:sp>
       <p:sp>
         <p:nvSpPr>
-          <p:cNvPr id="11" name="Text 9"/>
+          <p:cNvPr id="12" name="Text 9"/>
           <p:cNvSpPr txBox="1"/>
           <p:nvPr/>
         </p:nvSpPr>
@@ -37379,7 +37379,7 @@
       </p:sp>
       <p:sp>
         <p:nvSpPr>
-          <p:cNvPr id="12" name="Text 10"/>
+          <p:cNvPr id="13" name="Text 10"/>
           <p:cNvSpPr txBox="1"/>
           <p:nvPr/>
         </p:nvSpPr>
@@ -37418,7 +37418,7 @@
       </p:sp>
       <p:sp>
         <p:nvSpPr>
-          <p:cNvPr id="13" name="Text 11"/>
+          <p:cNvPr id="14" name="Text 11"/>
           <p:cNvSpPr txBox="1"/>
           <p:nvPr/>
         </p:nvSpPr>
@@ -37571,7 +37571,7 @@
       </p:sp>
       <p:sp>
         <p:nvSpPr>
-          <p:cNvPr id="3" name="Shape 1"/>
+          <p:cNvPr id="4" name="Shape 1"/>
           <p:cNvSpPr/>
           <p:nvPr/>
         </p:nvSpPr>
@@ -37598,7 +37598,7 @@
       </p:sp>
       <p:sp>
         <p:nvSpPr>
-          <p:cNvPr id="4" name="Text 2"/>
+          <p:cNvPr id="5" name="Text 2"/>
           <p:cNvSpPr txBox="1"/>
           <p:nvPr/>
         </p:nvSpPr>
@@ -37637,7 +37637,7 @@
       </p:sp>
       <p:sp>
         <p:nvSpPr>
-          <p:cNvPr id="5" name="Text 3"/>
+          <p:cNvPr id="6" name="Text 3"/>
           <p:cNvSpPr txBox="1"/>
           <p:nvPr/>
         </p:nvSpPr>
@@ -37676,7 +37676,7 @@
       </p:sp>
       <p:sp>
         <p:nvSpPr>
-          <p:cNvPr id="6" name="Shape 4"/>
+          <p:cNvPr id="7" name="Shape 4"/>
           <p:cNvSpPr/>
           <p:nvPr/>
         </p:nvSpPr>
@@ -37703,7 +37703,7 @@
       </p:sp>
       <p:sp>
         <p:nvSpPr>
-          <p:cNvPr id="7" name="Text 5"/>
+          <p:cNvPr id="8" name="Text 5"/>
           <p:cNvSpPr txBox="1"/>
           <p:nvPr/>
         </p:nvSpPr>
@@ -37742,7 +37742,7 @@
       </p:sp>
       <p:sp>
         <p:nvSpPr>
-          <p:cNvPr id="8" name="Text 6"/>
+          <p:cNvPr id="9" name="Text 6"/>
           <p:cNvSpPr txBox="1"/>
           <p:nvPr/>
         </p:nvSpPr>
@@ -37895,7 +37895,7 @@
       </p:sp>
       <p:sp>
         <p:nvSpPr>
-          <p:cNvPr id="3" name="Text 1"/>
+          <p:cNvPr id="4" name="Text 1"/>
           <p:cNvSpPr txBox="1"/>
           <p:nvPr/>
         </p:nvSpPr>
@@ -37934,7 +37934,7 @@
       </p:sp>
       <p:sp>
         <p:nvSpPr>
-          <p:cNvPr id="4" name="Text 2"/>
+          <p:cNvPr id="5" name="Text 2"/>
           <p:cNvSpPr txBox="1"/>
           <p:nvPr/>
         </p:nvSpPr>
@@ -37973,7 +37973,7 @@
       </p:sp>
       <p:sp>
         <p:nvSpPr>
-          <p:cNvPr id="5" name="Text 3"/>
+          <p:cNvPr id="6" name="Text 3"/>
           <p:cNvSpPr txBox="1"/>
           <p:nvPr/>
         </p:nvSpPr>
@@ -38012,7 +38012,7 @@
       </p:sp>
       <p:sp>
         <p:nvSpPr>
-          <p:cNvPr id="6" name="Text 4"/>
+          <p:cNvPr id="7" name="Text 4"/>
           <p:cNvSpPr txBox="1"/>
           <p:nvPr/>
         </p:nvSpPr>
@@ -38051,7 +38051,7 @@
       </p:sp>
       <p:sp>
         <p:nvSpPr>
-          <p:cNvPr id="7" name="Text 5"/>
+          <p:cNvPr id="8" name="Text 5"/>
           <p:cNvSpPr txBox="1"/>
           <p:nvPr/>
         </p:nvSpPr>
@@ -38090,7 +38090,7 @@
       </p:sp>
       <p:sp>
         <p:nvSpPr>
-          <p:cNvPr id="8" name="Text 6"/>
+          <p:cNvPr id="9" name="Text 6"/>
           <p:cNvSpPr txBox="1"/>
           <p:nvPr/>
         </p:nvSpPr>
@@ -38129,7 +38129,7 @@
       </p:sp>
       <p:sp>
         <p:nvSpPr>
-          <p:cNvPr id="9" name="Text 7"/>
+          <p:cNvPr id="10" name="Text 7"/>
           <p:cNvSpPr txBox="1"/>
           <p:nvPr/>
         </p:nvSpPr>
@@ -38168,7 +38168,7 @@
       </p:sp>
       <p:sp>
         <p:nvSpPr>
-          <p:cNvPr id="10" name="Text 8"/>
+          <p:cNvPr id="11" name="Text 8"/>
           <p:cNvSpPr txBox="1"/>
           <p:nvPr/>
         </p:nvSpPr>
@@ -38207,7 +38207,7 @@
       </p:sp>
       <p:sp>
         <p:nvSpPr>
-          <p:cNvPr id="11" name="Text 9"/>
+          <p:cNvPr id="12" name="Text 9"/>
           <p:cNvSpPr txBox="1"/>
           <p:nvPr/>
         </p:nvSpPr>
@@ -38246,7 +38246,7 @@
       </p:sp>
       <p:sp>
         <p:nvSpPr>
-          <p:cNvPr id="12" name="Text 10"/>
+          <p:cNvPr id="13" name="Text 10"/>
           <p:cNvSpPr txBox="1"/>
           <p:nvPr/>
         </p:nvSpPr>
@@ -38285,7 +38285,7 @@
       </p:sp>
       <p:sp>
         <p:nvSpPr>
-          <p:cNvPr id="13" name="Text 11"/>
+          <p:cNvPr id="14" name="Text 11"/>
           <p:cNvSpPr txBox="1"/>
           <p:nvPr/>
         </p:nvSpPr>
@@ -38324,7 +38324,7 @@
       </p:sp>
       <p:sp>
         <p:nvSpPr>
-          <p:cNvPr id="14" name="Text 12"/>
+          <p:cNvPr id="15" name="Text 12"/>
           <p:cNvSpPr txBox="1"/>
           <p:nvPr/>
         </p:nvSpPr>
@@ -38363,7 +38363,7 @@
       </p:sp>
       <p:sp>
         <p:nvSpPr>
-          <p:cNvPr id="15" name="Text 13"/>
+          <p:cNvPr id="16" name="Text 13"/>
           <p:cNvSpPr txBox="1"/>
           <p:nvPr/>
         </p:nvSpPr>
@@ -38402,7 +38402,7 @@
       </p:sp>
       <p:sp>
         <p:nvSpPr>
-          <p:cNvPr id="16" name="Text 14"/>
+          <p:cNvPr id="17" name="Text 14"/>
           <p:cNvSpPr txBox="1"/>
           <p:nvPr/>
         </p:nvSpPr>
@@ -38441,7 +38441,7 @@
       </p:sp>
       <p:sp>
         <p:nvSpPr>
-          <p:cNvPr id="17" name="Text 15"/>
+          <p:cNvPr id="18" name="Text 15"/>
           <p:cNvSpPr txBox="1"/>
           <p:nvPr/>
         </p:nvSpPr>
@@ -38480,7 +38480,7 @@
       </p:sp>
       <p:sp>
         <p:nvSpPr>
-          <p:cNvPr id="18" name="Text 16"/>
+          <p:cNvPr id="19" name="Text 16"/>
           <p:cNvSpPr txBox="1"/>
           <p:nvPr/>
         </p:nvSpPr>
@@ -38519,7 +38519,7 @@
       </p:sp>
       <p:sp>
         <p:nvSpPr>
-          <p:cNvPr id="19" name="Text 17"/>
+          <p:cNvPr id="20" name="Text 17"/>
           <p:cNvSpPr txBox="1"/>
           <p:nvPr/>
         </p:nvSpPr>
@@ -38558,7 +38558,7 @@
       </p:sp>
       <p:sp>
         <p:nvSpPr>
-          <p:cNvPr id="20" name="Text 18"/>
+          <p:cNvPr id="21" name="Text 18"/>
           <p:cNvSpPr txBox="1"/>
           <p:nvPr/>
         </p:nvSpPr>
@@ -38597,7 +38597,7 @@
       </p:sp>
       <p:sp>
         <p:nvSpPr>
-          <p:cNvPr id="21" name="Shape 19"/>
+          <p:cNvPr id="22" name="Shape 19"/>
           <p:cNvSpPr/>
           <p:nvPr/>
         </p:nvSpPr>
@@ -38624,7 +38624,7 @@
       </p:sp>
       <p:sp>
         <p:nvSpPr>
-          <p:cNvPr id="22" name="Text 20"/>
+          <p:cNvPr id="23" name="Text 20"/>
           <p:cNvSpPr txBox="1"/>
           <p:nvPr/>
         </p:nvSpPr>
@@ -38663,7 +38663,7 @@
       </p:sp>
       <p:sp>
         <p:nvSpPr>
-          <p:cNvPr id="23" name="Text 21"/>
+          <p:cNvPr id="24" name="Text 21"/>
           <p:cNvSpPr txBox="1"/>
           <p:nvPr/>
         </p:nvSpPr>
@@ -38702,7 +38702,7 @@
       </p:sp>
       <p:sp>
         <p:nvSpPr>
-          <p:cNvPr id="24" name="Text 22"/>
+          <p:cNvPr id="25" name="Text 22"/>
           <p:cNvSpPr txBox="1"/>
           <p:nvPr/>
         </p:nvSpPr>
@@ -38741,7 +38741,7 @@
       </p:sp>
       <p:sp>
         <p:nvSpPr>
-          <p:cNvPr id="25" name="Text 23"/>
+          <p:cNvPr id="26" name="Text 23"/>
           <p:cNvSpPr txBox="1"/>
           <p:nvPr/>
         </p:nvSpPr>
@@ -38780,7 +38780,7 @@
       </p:sp>
       <p:sp>
         <p:nvSpPr>
-          <p:cNvPr id="26" name="Text 24"/>
+          <p:cNvPr id="27" name="Text 24"/>
           <p:cNvSpPr txBox="1"/>
           <p:nvPr/>
         </p:nvSpPr>
@@ -38933,7 +38933,7 @@
       </p:sp>
       <p:sp>
         <p:nvSpPr>
-          <p:cNvPr id="3" name="Shape 1"/>
+          <p:cNvPr id="4" name="Shape 1"/>
           <p:cNvSpPr/>
           <p:nvPr/>
         </p:nvSpPr>
@@ -38960,7 +38960,7 @@
       </p:sp>
       <p:sp>
         <p:nvSpPr>
-          <p:cNvPr id="4" name="Shape 2"/>
+          <p:cNvPr id="5" name="Shape 2"/>
           <p:cNvSpPr/>
           <p:nvPr/>
         </p:nvSpPr>
@@ -38985,7 +38985,7 @@
       </p:sp>
       <p:sp>
         <p:nvSpPr>
-          <p:cNvPr id="5" name="Text 3"/>
+          <p:cNvPr id="6" name="Text 3"/>
           <p:cNvSpPr txBox="1"/>
           <p:nvPr/>
         </p:nvSpPr>
@@ -39024,7 +39024,7 @@
       </p:sp>
       <p:sp>
         <p:nvSpPr>
-          <p:cNvPr id="6" name="Text 4"/>
+          <p:cNvPr id="7" name="Text 4"/>
           <p:cNvSpPr txBox="1"/>
           <p:nvPr/>
         </p:nvSpPr>
@@ -39063,7 +39063,7 @@
       </p:sp>
       <p:sp>
         <p:nvSpPr>
-          <p:cNvPr id="7" name="Text 5"/>
+          <p:cNvPr id="8" name="Text 5"/>
           <p:cNvSpPr txBox="1"/>
           <p:nvPr/>
         </p:nvSpPr>
@@ -39102,7 +39102,7 @@
       </p:sp>
       <p:sp>
         <p:nvSpPr>
-          <p:cNvPr id="8" name="Text 6"/>
+          <p:cNvPr id="9" name="Text 6"/>
           <p:cNvSpPr txBox="1"/>
           <p:nvPr/>
         </p:nvSpPr>
@@ -39141,7 +39141,7 @@
       </p:sp>
       <p:sp>
         <p:nvSpPr>
-          <p:cNvPr id="9" name="Shape 7"/>
+          <p:cNvPr id="10" name="Shape 7"/>
           <p:cNvSpPr/>
           <p:nvPr/>
         </p:nvSpPr>
@@ -39168,7 +39168,7 @@
       </p:sp>
       <p:sp>
         <p:nvSpPr>
-          <p:cNvPr id="10" name="Shape 8"/>
+          <p:cNvPr id="11" name="Shape 8"/>
           <p:cNvSpPr/>
           <p:nvPr/>
         </p:nvSpPr>
@@ -39193,7 +39193,7 @@
       </p:sp>
       <p:sp>
         <p:nvSpPr>
-          <p:cNvPr id="11" name="Text 9"/>
+          <p:cNvPr id="12" name="Text 9"/>
           <p:cNvSpPr txBox="1"/>
           <p:nvPr/>
         </p:nvSpPr>
@@ -39232,7 +39232,7 @@
       </p:sp>
       <p:sp>
         <p:nvSpPr>
-          <p:cNvPr id="12" name="Text 10"/>
+          <p:cNvPr id="13" name="Text 10"/>
           <p:cNvSpPr txBox="1"/>
           <p:nvPr/>
         </p:nvSpPr>
@@ -39271,7 +39271,7 @@
       </p:sp>
       <p:sp>
         <p:nvSpPr>
-          <p:cNvPr id="13" name="Text 11"/>
+          <p:cNvPr id="14" name="Text 11"/>
           <p:cNvSpPr txBox="1"/>
           <p:nvPr/>
         </p:nvSpPr>
@@ -39310,7 +39310,7 @@
       </p:sp>
       <p:sp>
         <p:nvSpPr>
-          <p:cNvPr id="14" name="Text 12"/>
+          <p:cNvPr id="15" name="Text 12"/>
           <p:cNvSpPr txBox="1"/>
           <p:nvPr/>
         </p:nvSpPr>
@@ -39349,7 +39349,7 @@
       </p:sp>
       <p:sp>
         <p:nvSpPr>
-          <p:cNvPr id="15" name="Shape 13"/>
+          <p:cNvPr id="16" name="Shape 13"/>
           <p:cNvSpPr/>
           <p:nvPr/>
         </p:nvSpPr>
@@ -39376,7 +39376,7 @@
       </p:sp>
       <p:sp>
         <p:nvSpPr>
-          <p:cNvPr id="16" name="Shape 14"/>
+          <p:cNvPr id="17" name="Shape 14"/>
           <p:cNvSpPr/>
           <p:nvPr/>
         </p:nvSpPr>
@@ -39401,7 +39401,7 @@
       </p:sp>
       <p:sp>
         <p:nvSpPr>
-          <p:cNvPr id="17" name="Text 15"/>
+          <p:cNvPr id="18" name="Text 15"/>
           <p:cNvSpPr txBox="1"/>
           <p:nvPr/>
         </p:nvSpPr>
@@ -39440,7 +39440,7 @@
       </p:sp>
       <p:sp>
         <p:nvSpPr>
-          <p:cNvPr id="18" name="Text 16"/>
+          <p:cNvPr id="19" name="Text 16"/>
           <p:cNvSpPr txBox="1"/>
           <p:nvPr/>
         </p:nvSpPr>
@@ -39479,7 +39479,7 @@
       </p:sp>
       <p:sp>
         <p:nvSpPr>
-          <p:cNvPr id="19" name="Text 17"/>
+          <p:cNvPr id="20" name="Text 17"/>
           <p:cNvSpPr txBox="1"/>
           <p:nvPr/>
         </p:nvSpPr>
@@ -39518,7 +39518,7 @@
       </p:sp>
       <p:sp>
         <p:nvSpPr>
-          <p:cNvPr id="20" name="Text 18"/>
+          <p:cNvPr id="21" name="Text 18"/>
           <p:cNvSpPr txBox="1"/>
           <p:nvPr/>
         </p:nvSpPr>
@@ -39557,7 +39557,7 @@
       </p:sp>
       <p:sp>
         <p:nvSpPr>
-          <p:cNvPr id="21" name="Shape 19"/>
+          <p:cNvPr id="22" name="Shape 19"/>
           <p:cNvSpPr/>
           <p:nvPr/>
         </p:nvSpPr>
@@ -39584,7 +39584,7 @@
       </p:sp>
       <p:sp>
         <p:nvSpPr>
-          <p:cNvPr id="22" name="Shape 20"/>
+          <p:cNvPr id="23" name="Shape 20"/>
           <p:cNvSpPr/>
           <p:nvPr/>
         </p:nvSpPr>
@@ -39609,7 +39609,7 @@
       </p:sp>
       <p:sp>
         <p:nvSpPr>
-          <p:cNvPr id="23" name="Text 21"/>
+          <p:cNvPr id="24" name="Text 21"/>
           <p:cNvSpPr txBox="1"/>
           <p:nvPr/>
         </p:nvSpPr>
@@ -39648,7 +39648,7 @@
       </p:sp>
       <p:sp>
         <p:nvSpPr>
-          <p:cNvPr id="24" name="Text 22"/>
+          <p:cNvPr id="25" name="Text 22"/>
           <p:cNvSpPr txBox="1"/>
           <p:nvPr/>
         </p:nvSpPr>
@@ -39687,7 +39687,7 @@
       </p:sp>
       <p:sp>
         <p:nvSpPr>
-          <p:cNvPr id="25" name="Text 23"/>
+          <p:cNvPr id="26" name="Text 23"/>
           <p:cNvSpPr txBox="1"/>
           <p:nvPr/>
         </p:nvSpPr>
@@ -39726,7 +39726,7 @@
       </p:sp>
       <p:sp>
         <p:nvSpPr>
-          <p:cNvPr id="26" name="Text 24"/>
+          <p:cNvPr id="27" name="Text 24"/>
           <p:cNvSpPr txBox="1"/>
           <p:nvPr/>
         </p:nvSpPr>
@@ -39838,7 +39838,7 @@
       </p:grpSpPr>
       <p:sp>
         <p:nvSpPr>
-          <p:cNvPr id="2" name="Text 0"/>
+          <p:cNvPr id="3" name="Text 0"/>
           <p:cNvSpPr txBox="1"/>
           <p:nvPr/>
         </p:nvSpPr>
@@ -39877,7 +39877,7 @@
       </p:sp>
       <p:sp>
         <p:nvSpPr>
-          <p:cNvPr id="3" name="Text 1"/>
+          <p:cNvPr id="4" name="Text 1"/>
           <p:cNvSpPr txBox="1"/>
           <p:nvPr/>
         </p:nvSpPr>
@@ -39916,7 +39916,7 @@
       </p:sp>
       <p:sp>
         <p:nvSpPr>
-          <p:cNvPr id="4" name="Text 2"/>
+          <p:cNvPr id="5" name="Text 2"/>
           <p:cNvSpPr txBox="1"/>
           <p:nvPr/>
         </p:nvSpPr>
@@ -40021,7 +40021,7 @@
       </p:sp>
       <p:sp>
         <p:nvSpPr>
-          <p:cNvPr id="3" name="Shape 1"/>
+          <p:cNvPr id="4" name="Shape 1"/>
           <p:cNvSpPr/>
           <p:nvPr/>
         </p:nvSpPr>
@@ -40048,7 +40048,7 @@
       </p:sp>
       <p:sp>
         <p:nvSpPr>
-          <p:cNvPr id="4" name="Text 2"/>
+          <p:cNvPr id="5" name="Text 2"/>
           <p:cNvSpPr txBox="1"/>
           <p:nvPr/>
         </p:nvSpPr>
@@ -40087,7 +40087,7 @@
       </p:sp>
       <p:sp>
         <p:nvSpPr>
-          <p:cNvPr id="5" name="Text 3"/>
+          <p:cNvPr id="6" name="Text 3"/>
           <p:cNvSpPr txBox="1"/>
           <p:nvPr/>
         </p:nvSpPr>
@@ -40126,7 +40126,7 @@
       </p:sp>
       <p:sp>
         <p:nvSpPr>
-          <p:cNvPr id="6" name="Shape 4"/>
+          <p:cNvPr id="7" name="Shape 4"/>
           <p:cNvSpPr/>
           <p:nvPr/>
         </p:nvSpPr>
@@ -40153,7 +40153,7 @@
       </p:sp>
       <p:sp>
         <p:nvSpPr>
-          <p:cNvPr id="7" name="Text 5"/>
+          <p:cNvPr id="8" name="Text 5"/>
           <p:cNvSpPr txBox="1"/>
           <p:nvPr/>
         </p:nvSpPr>
@@ -40192,7 +40192,7 @@
       </p:sp>
       <p:sp>
         <p:nvSpPr>
-          <p:cNvPr id="8" name="Text 6"/>
+          <p:cNvPr id="9" name="Text 6"/>
           <p:cNvSpPr txBox="1"/>
           <p:nvPr/>
         </p:nvSpPr>
@@ -40231,7 +40231,7 @@
       </p:sp>
       <p:sp>
         <p:nvSpPr>
-          <p:cNvPr id="9" name="Shape 7"/>
+          <p:cNvPr id="10" name="Shape 7"/>
           <p:cNvSpPr/>
           <p:nvPr/>
         </p:nvSpPr>
@@ -40258,7 +40258,7 @@
       </p:sp>
       <p:sp>
         <p:nvSpPr>
-          <p:cNvPr id="10" name="Text 8"/>
+          <p:cNvPr id="11" name="Text 8"/>
           <p:cNvSpPr txBox="1"/>
           <p:nvPr/>
         </p:nvSpPr>
@@ -40297,7 +40297,7 @@
       </p:sp>
       <p:sp>
         <p:nvSpPr>
-          <p:cNvPr id="11" name="Text 9"/>
+          <p:cNvPr id="12" name="Text 9"/>
           <p:cNvSpPr txBox="1"/>
           <p:nvPr/>
         </p:nvSpPr>
@@ -40336,7 +40336,7 @@
       </p:sp>
       <p:sp>
         <p:nvSpPr>
-          <p:cNvPr id="12" name="Shape 10"/>
+          <p:cNvPr id="13" name="Shape 10"/>
           <p:cNvSpPr/>
           <p:nvPr/>
         </p:nvSpPr>
@@ -40363,7 +40363,7 @@
       </p:sp>
       <p:sp>
         <p:nvSpPr>
-          <p:cNvPr id="13" name="Text 11"/>
+          <p:cNvPr id="14" name="Text 11"/>
           <p:cNvSpPr txBox="1"/>
           <p:nvPr/>
         </p:nvSpPr>
@@ -40402,7 +40402,7 @@
       </p:sp>
       <p:sp>
         <p:nvSpPr>
-          <p:cNvPr id="14" name="Text 12"/>
+          <p:cNvPr id="15" name="Text 12"/>
           <p:cNvSpPr txBox="1"/>
           <p:nvPr/>
         </p:nvSpPr>
@@ -40441,7 +40441,7 @@
       </p:sp>
       <p:sp>
         <p:nvSpPr>
-          <p:cNvPr id="15" name="Shape 13"/>
+          <p:cNvPr id="16" name="Shape 13"/>
           <p:cNvSpPr/>
           <p:nvPr/>
         </p:nvSpPr>
@@ -40468,7 +40468,7 @@
       </p:sp>
       <p:sp>
         <p:nvSpPr>
-          <p:cNvPr id="16" name="Text 14"/>
+          <p:cNvPr id="17" name="Text 14"/>
           <p:cNvSpPr txBox="1"/>
           <p:nvPr/>
         </p:nvSpPr>
@@ -40507,7 +40507,7 @@
       </p:sp>
       <p:sp>
         <p:nvSpPr>
-          <p:cNvPr id="17" name="Text 15"/>
+          <p:cNvPr id="18" name="Text 15"/>
           <p:cNvSpPr txBox="1"/>
           <p:nvPr/>
         </p:nvSpPr>
@@ -40660,7 +40660,7 @@
       </p:sp>
       <p:sp>
         <p:nvSpPr>
-          <p:cNvPr id="3" name="Shape 1"/>
+          <p:cNvPr id="4" name="Shape 1"/>
           <p:cNvSpPr/>
           <p:nvPr/>
         </p:nvSpPr>
@@ -40687,7 +40687,7 @@
       </p:sp>
       <p:sp>
         <p:nvSpPr>
-          <p:cNvPr id="4" name="Text 2"/>
+          <p:cNvPr id="5" name="Text 2"/>
           <p:cNvSpPr txBox="1"/>
           <p:nvPr/>
         </p:nvSpPr>
@@ -40726,7 +40726,7 @@
       </p:sp>
       <p:sp>
         <p:nvSpPr>
-          <p:cNvPr id="5" name="Text 3"/>
+          <p:cNvPr id="6" name="Text 3"/>
           <p:cNvSpPr txBox="1"/>
           <p:nvPr/>
         </p:nvSpPr>
@@ -40765,7 +40765,7 @@
       </p:sp>
       <p:sp>
         <p:nvSpPr>
-          <p:cNvPr id="6" name="Shape 4"/>
+          <p:cNvPr id="7" name="Shape 4"/>
           <p:cNvSpPr/>
           <p:nvPr/>
         </p:nvSpPr>
@@ -40792,7 +40792,7 @@
       </p:sp>
       <p:sp>
         <p:nvSpPr>
-          <p:cNvPr id="7" name="Text 5"/>
+          <p:cNvPr id="8" name="Text 5"/>
           <p:cNvSpPr txBox="1"/>
           <p:nvPr/>
         </p:nvSpPr>
@@ -40831,7 +40831,7 @@
       </p:sp>
       <p:sp>
         <p:nvSpPr>
-          <p:cNvPr id="8" name="Text 6"/>
+          <p:cNvPr id="9" name="Text 6"/>
           <p:cNvSpPr txBox="1"/>
           <p:nvPr/>
         </p:nvSpPr>
@@ -40870,7 +40870,7 @@
       </p:sp>
       <p:sp>
         <p:nvSpPr>
-          <p:cNvPr id="9" name="Shape 7"/>
+          <p:cNvPr id="10" name="Shape 7"/>
           <p:cNvSpPr/>
           <p:nvPr/>
         </p:nvSpPr>
@@ -40897,7 +40897,7 @@
       </p:sp>
       <p:sp>
         <p:nvSpPr>
-          <p:cNvPr id="10" name="Text 8"/>
+          <p:cNvPr id="11" name="Text 8"/>
           <p:cNvSpPr txBox="1"/>
           <p:nvPr/>
         </p:nvSpPr>
@@ -40936,7 +40936,7 @@
       </p:sp>
       <p:sp>
         <p:nvSpPr>
-          <p:cNvPr id="11" name="Text 9"/>
+          <p:cNvPr id="12" name="Text 9"/>
           <p:cNvSpPr txBox="1"/>
           <p:nvPr/>
         </p:nvSpPr>
@@ -40975,7 +40975,7 @@
       </p:sp>
       <p:sp>
         <p:nvSpPr>
-          <p:cNvPr id="12" name="Shape 10"/>
+          <p:cNvPr id="13" name="Shape 10"/>
           <p:cNvSpPr/>
           <p:nvPr/>
         </p:nvSpPr>
@@ -41002,7 +41002,7 @@
       </p:sp>
       <p:sp>
         <p:nvSpPr>
-          <p:cNvPr id="13" name="Text 11"/>
+          <p:cNvPr id="14" name="Text 11"/>
           <p:cNvSpPr txBox="1"/>
           <p:nvPr/>
         </p:nvSpPr>
@@ -41041,7 +41041,7 @@
       </p:sp>
       <p:sp>
         <p:nvSpPr>
-          <p:cNvPr id="14" name="Text 12"/>
+          <p:cNvPr id="15" name="Text 12"/>
           <p:cNvSpPr txBox="1"/>
           <p:nvPr/>
         </p:nvSpPr>
@@ -41080,7 +41080,7 @@
       </p:sp>
       <p:sp>
         <p:nvSpPr>
-          <p:cNvPr id="15" name="Text 13"/>
+          <p:cNvPr id="16" name="Text 13"/>
           <p:cNvSpPr txBox="1"/>
           <p:nvPr/>
         </p:nvSpPr>
@@ -41233,7 +41233,7 @@
       </p:sp>
       <p:sp>
         <p:nvSpPr>
-          <p:cNvPr id="3" name="Shape 1"/>
+          <p:cNvPr id="4" name="Shape 1"/>
           <p:cNvSpPr/>
           <p:nvPr/>
         </p:nvSpPr>
@@ -41260,7 +41260,7 @@
       </p:sp>
       <p:sp>
         <p:nvSpPr>
-          <p:cNvPr id="4" name="Text 2"/>
+          <p:cNvPr id="5" name="Text 2"/>
           <p:cNvSpPr txBox="1"/>
           <p:nvPr/>
         </p:nvSpPr>
@@ -41299,7 +41299,7 @@
       </p:sp>
       <p:sp>
         <p:nvSpPr>
-          <p:cNvPr id="5" name="Text 3"/>
+          <p:cNvPr id="6" name="Text 3"/>
           <p:cNvSpPr txBox="1"/>
           <p:nvPr/>
         </p:nvSpPr>
@@ -41426,7 +41426,7 @@
       </p:sp>
       <p:sp>
         <p:nvSpPr>
-          <p:cNvPr id="6" name="Shape 4"/>
+          <p:cNvPr id="7" name="Shape 4"/>
           <p:cNvSpPr/>
           <p:nvPr/>
         </p:nvSpPr>
@@ -41453,7 +41453,7 @@
       </p:sp>
       <p:sp>
         <p:nvSpPr>
-          <p:cNvPr id="7" name="Text 5"/>
+          <p:cNvPr id="8" name="Text 5"/>
           <p:cNvSpPr txBox="1"/>
           <p:nvPr/>
         </p:nvSpPr>
@@ -41492,7 +41492,7 @@
       </p:sp>
       <p:sp>
         <p:nvSpPr>
-          <p:cNvPr id="8" name="Text 6"/>
+          <p:cNvPr id="9" name="Text 6"/>
           <p:cNvSpPr txBox="1"/>
           <p:nvPr/>
         </p:nvSpPr>
@@ -41692,7 +41692,7 @@
       </p:grpSpPr>
       <p:sp>
         <p:nvSpPr>
-          <p:cNvPr id="2" name="Text 0"/>
+          <p:cNvPr id="3" name="Text 0"/>
           <p:cNvSpPr txBox="1"/>
           <p:nvPr/>
         </p:nvSpPr>
@@ -41731,7 +41731,7 @@
       </p:sp>
       <p:sp>
         <p:nvSpPr>
-          <p:cNvPr id="3" name="Text 1"/>
+          <p:cNvPr id="4" name="Text 1"/>
           <p:cNvSpPr txBox="1"/>
           <p:nvPr/>
         </p:nvSpPr>
@@ -41770,7 +41770,7 @@
       </p:sp>
       <p:sp>
         <p:nvSpPr>
-          <p:cNvPr id="4" name="Text 2"/>
+          <p:cNvPr id="5" name="Text 2"/>
           <p:cNvSpPr txBox="1"/>
           <p:nvPr/>
         </p:nvSpPr>
@@ -41809,7 +41809,7 @@
       </p:sp>
       <p:sp>
         <p:nvSpPr>
-          <p:cNvPr id="5" name="Shape 3"/>
+          <p:cNvPr id="6" name="Shape 3"/>
           <p:cNvSpPr/>
           <p:nvPr/>
         </p:nvSpPr>
@@ -41836,7 +41836,7 @@
       </p:sp>
       <p:sp>
         <p:nvSpPr>
-          <p:cNvPr id="6" name="Text 4"/>
+          <p:cNvPr id="7" name="Text 4"/>
           <p:cNvSpPr txBox="1"/>
           <p:nvPr/>
         </p:nvSpPr>
@@ -41875,7 +41875,7 @@
       </p:sp>
       <p:sp>
         <p:nvSpPr>
-          <p:cNvPr id="7" name="Shape 5"/>
+          <p:cNvPr id="8" name="Shape 5"/>
           <p:cNvSpPr/>
           <p:nvPr/>
         </p:nvSpPr>
@@ -41902,7 +41902,7 @@
       </p:sp>
       <p:sp>
         <p:nvSpPr>
-          <p:cNvPr id="8" name="Text 6"/>
+          <p:cNvPr id="9" name="Text 6"/>
           <p:cNvSpPr txBox="1"/>
           <p:nvPr/>
         </p:nvSpPr>
@@ -41941,7 +41941,7 @@
       </p:sp>
       <p:sp>
         <p:nvSpPr>
-          <p:cNvPr id="9" name="Shape 7"/>
+          <p:cNvPr id="10" name="Shape 7"/>
           <p:cNvSpPr/>
           <p:nvPr/>
         </p:nvSpPr>
@@ -41968,7 +41968,7 @@
       </p:sp>
       <p:sp>
         <p:nvSpPr>
-          <p:cNvPr id="10" name="Text 8"/>
+          <p:cNvPr id="11" name="Text 8"/>
           <p:cNvSpPr txBox="1"/>
           <p:nvPr/>
         </p:nvSpPr>
@@ -42007,7 +42007,7 @@
       </p:sp>
       <p:sp>
         <p:nvSpPr>
-          <p:cNvPr id="11" name="Shape 9"/>
+          <p:cNvPr id="12" name="Shape 9"/>
           <p:cNvSpPr/>
           <p:nvPr/>
         </p:nvSpPr>
@@ -42034,7 +42034,7 @@
       </p:sp>
       <p:sp>
         <p:nvSpPr>
-          <p:cNvPr id="12" name="Text 10"/>
+          <p:cNvPr id="13" name="Text 10"/>
           <p:cNvSpPr txBox="1"/>
           <p:nvPr/>
         </p:nvSpPr>
@@ -42073,7 +42073,7 @@
       </p:sp>
       <p:sp>
         <p:nvSpPr>
-          <p:cNvPr id="13" name="Shape 11"/>
+          <p:cNvPr id="14" name="Shape 11"/>
           <p:cNvSpPr/>
           <p:nvPr/>
         </p:nvSpPr>
@@ -42100,7 +42100,7 @@
       </p:sp>
       <p:sp>
         <p:nvSpPr>
-          <p:cNvPr id="14" name="Text 12"/>
+          <p:cNvPr id="15" name="Text 12"/>
           <p:cNvSpPr txBox="1"/>
           <p:nvPr/>
         </p:nvSpPr>
@@ -42139,7 +42139,7 @@
       </p:sp>
       <p:sp>
         <p:nvSpPr>
-          <p:cNvPr id="15" name="Shape 13"/>
+          <p:cNvPr id="16" name="Shape 13"/>
           <p:cNvSpPr/>
           <p:nvPr/>
         </p:nvSpPr>
@@ -42166,7 +42166,7 @@
       </p:sp>
       <p:sp>
         <p:nvSpPr>
-          <p:cNvPr id="16" name="Text 14"/>
+          <p:cNvPr id="17" name="Text 14"/>
           <p:cNvSpPr txBox="1"/>
           <p:nvPr/>
         </p:nvSpPr>
@@ -42205,7 +42205,7 @@
       </p:sp>
       <p:sp>
         <p:nvSpPr>
-          <p:cNvPr id="17" name="Shape 15"/>
+          <p:cNvPr id="18" name="Shape 15"/>
           <p:cNvSpPr/>
           <p:nvPr/>
         </p:nvSpPr>
@@ -42232,7 +42232,7 @@
       </p:sp>
       <p:sp>
         <p:nvSpPr>
-          <p:cNvPr id="18" name="Text 16"/>
+          <p:cNvPr id="19" name="Text 16"/>
           <p:cNvSpPr txBox="1"/>
           <p:nvPr/>
         </p:nvSpPr>
@@ -42271,7 +42271,7 @@
       </p:sp>
       <p:sp>
         <p:nvSpPr>
-          <p:cNvPr id="19" name="Shape 17"/>
+          <p:cNvPr id="20" name="Shape 17"/>
           <p:cNvSpPr/>
           <p:nvPr/>
         </p:nvSpPr>
@@ -42298,7 +42298,7 @@
       </p:sp>
       <p:sp>
         <p:nvSpPr>
-          <p:cNvPr id="20" name="Text 18"/>
+          <p:cNvPr id="21" name="Text 18"/>
           <p:cNvSpPr txBox="1"/>
           <p:nvPr/>
         </p:nvSpPr>
@@ -42337,7 +42337,7 @@
       </p:sp>
       <p:sp>
         <p:nvSpPr>
-          <p:cNvPr id="21" name="Shape 19"/>
+          <p:cNvPr id="22" name="Shape 19"/>
           <p:cNvSpPr/>
           <p:nvPr/>
         </p:nvSpPr>
@@ -42364,7 +42364,7 @@
       </p:sp>
       <p:sp>
         <p:nvSpPr>
-          <p:cNvPr id="22" name="Text 20"/>
+          <p:cNvPr id="23" name="Text 20"/>
           <p:cNvSpPr txBox="1"/>
           <p:nvPr/>
         </p:nvSpPr>
@@ -42403,7 +42403,7 @@
       </p:sp>
       <p:sp>
         <p:nvSpPr>
-          <p:cNvPr id="23" name="Shape 21"/>
+          <p:cNvPr id="24" name="Shape 21"/>
           <p:cNvSpPr/>
           <p:nvPr/>
         </p:nvSpPr>
@@ -42430,7 +42430,7 @@
       </p:sp>
       <p:sp>
         <p:nvSpPr>
-          <p:cNvPr id="24" name="Text 22"/>
+          <p:cNvPr id="25" name="Text 22"/>
           <p:cNvSpPr txBox="1"/>
           <p:nvPr/>
         </p:nvSpPr>
@@ -42469,7 +42469,7 @@
       </p:sp>
       <p:sp>
         <p:nvSpPr>
-          <p:cNvPr id="25" name="Text 23"/>
+          <p:cNvPr id="26" name="Text 23"/>
           <p:cNvSpPr txBox="1"/>
           <p:nvPr/>
         </p:nvSpPr>
@@ -42508,7 +42508,7 @@
       </p:sp>
       <p:sp>
         <p:nvSpPr>
-          <p:cNvPr id="26" name="Text 0"/>
+          <p:cNvPr id="27" name="Text 0"/>
           <p:cNvSpPr/>
           <p:nvPr>
             <p:ph idx="100" type="title" hasCustomPrompt="1"/>
